--- a/media/exports/reports/2026-02/cost-to-raise.pptx
+++ b/media/exports/reports/2026-02/cost-to-raise.pptx
@@ -260,7 +260,9 @@
     <a:lstStyle/>
     <a:p>
       <a:pPr>
-        <a:defRPr sz="1800"/>
+        <a:defRPr sz="1800">
+          <a:latin typeface="Roboto"/>
+        </a:defRPr>
       </a:pPr>
       <a:endParaRPr lang="en-US"/>
     </a:p>
@@ -514,7 +516,9 @@
     <a:lstStyle/>
     <a:p>
       <a:pPr>
-        <a:defRPr sz="1800"/>
+        <a:defRPr sz="1800">
+          <a:latin typeface="Roboto"/>
+        </a:defRPr>
       </a:pPr>
       <a:endParaRPr/>
     </a:p>
@@ -3545,11 +3549,17 @@
           <a:bodyPr rtlCol="0" anchor="ctr"/>
           <a:lstStyle/>
           <a:p>
+            <a:pPr>
+              <a:defRPr>
+                <a:latin typeface="Roboto"/>
+              </a:defRPr>
+            </a:pPr>
             <a:r>
               <a:rPr sz="1600" b="1">
                 <a:solidFill>
                   <a:srgbClr val="FFFFFF"/>
                 </a:solidFill>
+                <a:latin typeface="Roboto"/>
               </a:rPr>
               <a:t>4th</a:t>
             </a:r>
@@ -3578,14 +3588,19 @@
           </a:bodyPr>
           <a:lstStyle/>
           <a:p>
+            <a:pPr>
+              <a:defRPr>
+                <a:latin typeface="Roboto"/>
+              </a:defRPr>
+            </a:pPr>
             <a:r>
               <a:rPr sz="1800" b="1">
                 <a:solidFill>
                   <a:srgbClr val="25342A"/>
                 </a:solidFill>
-                <a:latin typeface="Arial"/>
-              </a:rPr>
-              <a:t>The 4th Sheet</a:t>
+                <a:latin typeface="Roboto"/>
+              </a:rPr>
+              <a:t>The Fourth Sheet</a:t>
             </a:r>
           </a:p>
         </p:txBody>
@@ -3612,12 +3627,17 @@
           </a:bodyPr>
           <a:lstStyle/>
           <a:p>
+            <a:pPr>
+              <a:defRPr>
+                <a:latin typeface="Roboto"/>
+              </a:defRPr>
+            </a:pPr>
             <a:r>
               <a:rPr sz="1100" b="1">
                 <a:solidFill>
                   <a:srgbClr val="8A7A52"/>
                 </a:solidFill>
-                <a:latin typeface="Arial"/>
+                <a:latin typeface="Roboto"/>
               </a:rPr>
               <a:t>SAMPLE DATA · invented figures for demonstration</a:t>
             </a:r>
@@ -3646,12 +3666,17 @@
           </a:bodyPr>
           <a:lstStyle/>
           <a:p>
+            <a:pPr>
+              <a:defRPr>
+                <a:latin typeface="Roboto"/>
+              </a:defRPr>
+            </a:pPr>
             <a:r>
               <a:rPr sz="3400" b="1">
                 <a:solidFill>
                   <a:srgbClr val="25342A"/>
                 </a:solidFill>
-                <a:latin typeface="Arial"/>
+                <a:latin typeface="Roboto"/>
               </a:rPr>
               <a:t>What does it cost to raise a dollar?</a:t>
             </a:r>
@@ -3680,12 +3705,17 @@
           </a:bodyPr>
           <a:lstStyle/>
           <a:p>
+            <a:pPr>
+              <a:defRPr>
+                <a:latin typeface="Roboto"/>
+              </a:defRPr>
+            </a:pPr>
             <a:r>
               <a:rPr sz="1600" b="0">
                 <a:solidFill>
                   <a:srgbClr val="5F6F63"/>
                 </a:solidFill>
-                <a:latin typeface="Arial"/>
+                <a:latin typeface="Roboto"/>
               </a:rPr>
               <a:t>Sample Community Services Ltd</a:t>
             </a:r>
@@ -3714,12 +3744,17 @@
           </a:bodyPr>
           <a:lstStyle/>
           <a:p>
+            <a:pPr>
+              <a:defRPr>
+                <a:latin typeface="Roboto"/>
+              </a:defRPr>
+            </a:pPr>
             <a:r>
               <a:rPr sz="1400" b="0">
                 <a:solidFill>
                   <a:srgbClr val="25342A"/>
                 </a:solidFill>
-                <a:latin typeface="Arial"/>
+                <a:latin typeface="Roboto"/>
               </a:rPr>
               <a:t>Period: February 2026. What fundraising costs (grant writing, donor campaigns, events) for every dollar it brings in. Pick a source and every number, chart and note follows it.</a:t>
             </a:r>
@@ -3748,45 +3783,65 @@
           </a:bodyPr>
           <a:lstStyle/>
           <a:p>
+            <a:pPr>
+              <a:defRPr>
+                <a:latin typeface="Roboto"/>
+              </a:defRPr>
+            </a:pPr>
             <a:r>
               <a:rPr sz="1100" b="0">
                 <a:solidFill>
                   <a:srgbClr val="5F6F63"/>
                 </a:solidFill>
-                <a:latin typeface="Arial"/>
+                <a:latin typeface="Roboto"/>
               </a:rPr>
               <a:t>How final is this data?</a:t>
             </a:r>
           </a:p>
           <a:p>
+            <a:pPr>
+              <a:defRPr>
+                <a:latin typeface="Roboto"/>
+              </a:defRPr>
+            </a:pPr>
             <a:r>
               <a:rPr sz="1100" b="0">
                 <a:solidFill>
                   <a:srgbClr val="5F6F63"/>
                 </a:solidFill>
-                <a:latin typeface="Arial"/>
+                <a:latin typeface="Roboto"/>
               </a:rPr>
               <a:t>January 2026: Locked. January 2026 is locked (closed 3 Feb 2026). These numbers won't change.</a:t>
             </a:r>
           </a:p>
           <a:p>
+            <a:pPr>
+              <a:defRPr>
+                <a:latin typeface="Roboto"/>
+              </a:defRPr>
+            </a:pPr>
             <a:r>
               <a:rPr sz="1100" b="0">
                 <a:solidFill>
                   <a:srgbClr val="5F6F63"/>
                 </a:solidFill>
-                <a:latin typeface="Arial"/>
+                <a:latin typeface="Roboto"/>
               </a:rPr>
               <a:t>February 2026: Locked. February 2026 is locked (closed 3 Mar 2026). These numbers won't change.</a:t>
             </a:r>
           </a:p>
           <a:p>
+            <a:pPr>
+              <a:defRPr>
+                <a:latin typeface="Roboto"/>
+              </a:defRPr>
+            </a:pPr>
             <a:r>
               <a:rPr sz="1100" b="0">
                 <a:solidFill>
                   <a:srgbClr val="5F6F63"/>
                 </a:solidFill>
-                <a:latin typeface="Arial"/>
+                <a:latin typeface="Roboto"/>
               </a:rPr>
               <a:t>October 2026: Incomplete. October 2026 is still in progress: figures to 6 Oct only.</a:t>
             </a:r>
@@ -3815,12 +3870,17 @@
           </a:bodyPr>
           <a:lstStyle/>
           <a:p>
+            <a:pPr>
+              <a:defRPr>
+                <a:latin typeface="Roboto"/>
+              </a:defRPr>
+            </a:pPr>
             <a:r>
               <a:rPr sz="900" b="0">
                 <a:solidFill>
                   <a:srgbClr val="5F6F63"/>
                 </a:solidFill>
-                <a:latin typeface="Arial"/>
+                <a:latin typeface="Roboto"/>
               </a:rPr>
               <a:t>cost-to-raise.pptx</a:t>
             </a:r>
@@ -3849,13 +3909,17 @@
           </a:bodyPr>
           <a:lstStyle/>
           <a:p>
-            <a:pPr algn="ctr"/>
+            <a:pPr algn="ctr">
+              <a:defRPr>
+                <a:latin typeface="Roboto"/>
+              </a:defRPr>
+            </a:pPr>
             <a:r>
               <a:rPr sz="900" b="0">
                 <a:solidFill>
                   <a:srgbClr val="5F6F63"/>
                 </a:solidFill>
-                <a:latin typeface="Arial"/>
+                <a:latin typeface="Roboto"/>
               </a:rPr>
               <a:t>Data retrieved 2pm, Tue 6 Oct 2026 · Sample data</a:t>
             </a:r>
@@ -3884,13 +3948,17 @@
           </a:bodyPr>
           <a:lstStyle/>
           <a:p>
-            <a:pPr algn="r"/>
+            <a:pPr algn="r">
+              <a:defRPr>
+                <a:latin typeface="Roboto"/>
+              </a:defRPr>
+            </a:pPr>
             <a:r>
               <a:rPr sz="900" b="0">
                 <a:solidFill>
                   <a:srgbClr val="5F6F63"/>
                 </a:solidFill>
-                <a:latin typeface="Arial"/>
+                <a:latin typeface="Roboto"/>
               </a:rPr>
               <a:t>Slide 1 of 11</a:t>
             </a:r>
@@ -3954,7 +4022,11 @@
           <a:bodyPr rtlCol="0" anchor="ctr"/>
           <a:lstStyle/>
           <a:p>
-            <a:pPr algn="ctr"/>
+            <a:pPr algn="ctr">
+              <a:defRPr>
+                <a:latin typeface="Roboto"/>
+              </a:defRPr>
+            </a:pPr>
           </a:p>
         </p:txBody>
       </p:sp>
@@ -3980,12 +4052,17 @@
           </a:bodyPr>
           <a:lstStyle/>
           <a:p>
+            <a:pPr>
+              <a:defRPr>
+                <a:latin typeface="Roboto"/>
+              </a:defRPr>
+            </a:pPr>
             <a:r>
               <a:rPr sz="1000" b="0">
                 <a:solidFill>
                   <a:srgbClr val="5F6F63"/>
                 </a:solidFill>
-                <a:latin typeface="Arial"/>
+                <a:latin typeface="Roboto"/>
               </a:rPr>
               <a:t>Sample Community Services Ltd · What does it cost to raise a dollar?</a:t>
             </a:r>
@@ -4014,12 +4091,17 @@
           </a:bodyPr>
           <a:lstStyle/>
           <a:p>
+            <a:pPr>
+              <a:defRPr>
+                <a:latin typeface="Roboto"/>
+              </a:defRPr>
+            </a:pPr>
             <a:r>
               <a:rPr sz="2400" b="1">
                 <a:solidFill>
                   <a:srgbClr val="25342A"/>
                 </a:solidFill>
-                <a:latin typeface="Arial"/>
+                <a:latin typeface="Roboto"/>
               </a:rPr>
               <a:t>What it shows · Source: Fundraising events</a:t>
             </a:r>
@@ -4067,7 +4149,11 @@
           <a:bodyPr rtlCol="0" anchor="ctr"/>
           <a:lstStyle/>
           <a:p>
-            <a:pPr algn="ctr"/>
+            <a:pPr algn="ctr">
+              <a:defRPr>
+                <a:latin typeface="Roboto"/>
+              </a:defRPr>
+            </a:pPr>
           </a:p>
         </p:txBody>
       </p:sp>
@@ -4093,12 +4179,17 @@
           </a:bodyPr>
           <a:lstStyle/>
           <a:p>
+            <a:pPr>
+              <a:defRPr>
+                <a:latin typeface="Roboto"/>
+              </a:defRPr>
+            </a:pPr>
             <a:r>
               <a:rPr sz="1100" b="1">
                 <a:solidFill>
                   <a:srgbClr val="5F6F63"/>
                 </a:solidFill>
-                <a:latin typeface="Arial"/>
+                <a:latin typeface="Roboto"/>
               </a:rPr>
               <a:t>WHAT IT SHOWS</a:t>
             </a:r>
@@ -4127,12 +4218,17 @@
           </a:bodyPr>
           <a:lstStyle/>
           <a:p>
+            <a:pPr>
+              <a:defRPr>
+                <a:latin typeface="Roboto"/>
+              </a:defRPr>
+            </a:pPr>
             <a:r>
               <a:rPr sz="1600" b="0">
                 <a:solidFill>
                   <a:srgbClr val="25342A"/>
                 </a:solidFill>
-                <a:latin typeface="Arial"/>
+                <a:latin typeface="Roboto"/>
               </a:rPr>
               <a:t>Fundraising events cost 41¢ to raise each dollar this financial year to date ($17,800 of event costs for $43,000).</a:t>
             </a:r>
@@ -4180,7 +4276,11 @@
           <a:bodyPr rtlCol="0" anchor="ctr"/>
           <a:lstStyle/>
           <a:p>
-            <a:pPr algn="ctr"/>
+            <a:pPr algn="ctr">
+              <a:defRPr>
+                <a:latin typeface="Roboto"/>
+              </a:defRPr>
+            </a:pPr>
           </a:p>
         </p:txBody>
       </p:sp>
@@ -4206,12 +4306,17 @@
           </a:bodyPr>
           <a:lstStyle/>
           <a:p>
+            <a:pPr>
+              <a:defRPr>
+                <a:latin typeface="Roboto"/>
+              </a:defRPr>
+            </a:pPr>
             <a:r>
               <a:rPr sz="1100" b="1">
                 <a:solidFill>
                   <a:srgbClr val="5F6F63"/>
                 </a:solidFill>
-                <a:latin typeface="Arial"/>
+                <a:latin typeface="Roboto"/>
               </a:rPr>
               <a:t>WHAT YOU'D DO ABOUT IT</a:t>
             </a:r>
@@ -4240,12 +4345,17 @@
           </a:bodyPr>
           <a:lstStyle/>
           <a:p>
+            <a:pPr>
+              <a:defRPr>
+                <a:latin typeface="Roboto"/>
+              </a:defRPr>
+            </a:pPr>
             <a:r>
               <a:rPr sz="1600" b="0">
                 <a:solidFill>
                   <a:srgbClr val="25342A"/>
                 </a:solidFill>
-                <a:latin typeface="Arial"/>
+                <a:latin typeface="Roboto"/>
               </a:rPr>
               <a:t>Usually the dearest money to raise: events are worth counting for what else they bring too (new donors, profile).</a:t>
             </a:r>
@@ -4274,12 +4384,17 @@
           </a:bodyPr>
           <a:lstStyle/>
           <a:p>
+            <a:pPr>
+              <a:defRPr>
+                <a:latin typeface="Roboto"/>
+              </a:defRPr>
+            </a:pPr>
             <a:r>
               <a:rPr sz="900" b="0">
                 <a:solidFill>
                   <a:srgbClr val="5F6F63"/>
                 </a:solidFill>
-                <a:latin typeface="Arial"/>
+                <a:latin typeface="Roboto"/>
               </a:rPr>
               <a:t>cost-to-raise.pptx</a:t>
             </a:r>
@@ -4308,13 +4423,17 @@
           </a:bodyPr>
           <a:lstStyle/>
           <a:p>
-            <a:pPr algn="ctr"/>
+            <a:pPr algn="ctr">
+              <a:defRPr>
+                <a:latin typeface="Roboto"/>
+              </a:defRPr>
+            </a:pPr>
             <a:r>
               <a:rPr sz="900" b="0">
                 <a:solidFill>
                   <a:srgbClr val="5F6F63"/>
                 </a:solidFill>
-                <a:latin typeface="Arial"/>
+                <a:latin typeface="Roboto"/>
               </a:rPr>
               <a:t>Data retrieved 2pm, Tue 6 Oct 2026 · Sample data</a:t>
             </a:r>
@@ -4343,13 +4462,17 @@
           </a:bodyPr>
           <a:lstStyle/>
           <a:p>
-            <a:pPr algn="r"/>
+            <a:pPr algn="r">
+              <a:defRPr>
+                <a:latin typeface="Roboto"/>
+              </a:defRPr>
+            </a:pPr>
             <a:r>
               <a:rPr sz="900" b="0">
                 <a:solidFill>
                   <a:srgbClr val="5F6F63"/>
                 </a:solidFill>
-                <a:latin typeface="Arial"/>
+                <a:latin typeface="Roboto"/>
               </a:rPr>
               <a:t>Slide 10 of 11</a:t>
             </a:r>
@@ -4413,7 +4536,11 @@
           <a:bodyPr rtlCol="0" anchor="ctr"/>
           <a:lstStyle/>
           <a:p>
-            <a:pPr algn="ctr"/>
+            <a:pPr algn="ctr">
+              <a:defRPr>
+                <a:latin typeface="Roboto"/>
+              </a:defRPr>
+            </a:pPr>
           </a:p>
         </p:txBody>
       </p:sp>
@@ -4439,12 +4566,17 @@
           </a:bodyPr>
           <a:lstStyle/>
           <a:p>
+            <a:pPr>
+              <a:defRPr>
+                <a:latin typeface="Roboto"/>
+              </a:defRPr>
+            </a:pPr>
             <a:r>
               <a:rPr sz="1000" b="0">
                 <a:solidFill>
                   <a:srgbClr val="5F6F63"/>
                 </a:solidFill>
-                <a:latin typeface="Arial"/>
+                <a:latin typeface="Roboto"/>
               </a:rPr>
               <a:t>Sample Community Services Ltd · What does it cost to raise a dollar?</a:t>
             </a:r>
@@ -4473,12 +4605,17 @@
           </a:bodyPr>
           <a:lstStyle/>
           <a:p>
+            <a:pPr>
+              <a:defRPr>
+                <a:latin typeface="Roboto"/>
+              </a:defRPr>
+            </a:pPr>
             <a:r>
               <a:rPr sz="2400" b="1">
                 <a:solidFill>
                   <a:srgbClr val="25342A"/>
                 </a:solidFill>
-                <a:latin typeface="Arial"/>
+                <a:latin typeface="Roboto"/>
               </a:rPr>
               <a:t>Cost to raise a dollar, by month (cents) · Cents per $1 · Every source at once</a:t>
             </a:r>
@@ -4507,12 +4644,17 @@
           </a:bodyPr>
           <a:lstStyle/>
           <a:p>
+            <a:pPr>
+              <a:defRPr>
+                <a:latin typeface="Roboto"/>
+              </a:defRPr>
+            </a:pPr>
             <a:r>
               <a:rPr sz="1200" b="0">
                 <a:solidFill>
                   <a:srgbClr val="5F6F63"/>
                 </a:solidFill>
-                <a:latin typeface="Arial"/>
+                <a:latin typeface="Roboto"/>
               </a:rPr>
               <a:t>Months with an event (the gala, the Christmas appeal) jump. A gap means nothing was raised that month.</a:t>
             </a:r>
@@ -4559,12 +4701,17 @@
           </a:bodyPr>
           <a:lstStyle/>
           <a:p>
+            <a:pPr>
+              <a:defRPr>
+                <a:latin typeface="Roboto"/>
+              </a:defRPr>
+            </a:pPr>
             <a:r>
               <a:rPr sz="900" b="0">
                 <a:solidFill>
                   <a:srgbClr val="5F6F63"/>
                 </a:solidFill>
-                <a:latin typeface="Arial"/>
+                <a:latin typeface="Roboto"/>
               </a:rPr>
               <a:t>cost-to-raise.pptx</a:t>
             </a:r>
@@ -4593,13 +4740,17 @@
           </a:bodyPr>
           <a:lstStyle/>
           <a:p>
-            <a:pPr algn="ctr"/>
+            <a:pPr algn="ctr">
+              <a:defRPr>
+                <a:latin typeface="Roboto"/>
+              </a:defRPr>
+            </a:pPr>
             <a:r>
               <a:rPr sz="900" b="0">
                 <a:solidFill>
                   <a:srgbClr val="5F6F63"/>
                 </a:solidFill>
-                <a:latin typeface="Arial"/>
+                <a:latin typeface="Roboto"/>
               </a:rPr>
               <a:t>Data retrieved 2pm, Tue 6 Oct 2026 · Sample data</a:t>
             </a:r>
@@ -4628,13 +4779,17 @@
           </a:bodyPr>
           <a:lstStyle/>
           <a:p>
-            <a:pPr algn="r"/>
+            <a:pPr algn="r">
+              <a:defRPr>
+                <a:latin typeface="Roboto"/>
+              </a:defRPr>
+            </a:pPr>
             <a:r>
               <a:rPr sz="900" b="0">
                 <a:solidFill>
                   <a:srgbClr val="5F6F63"/>
                 </a:solidFill>
-                <a:latin typeface="Arial"/>
+                <a:latin typeface="Roboto"/>
               </a:rPr>
               <a:t>Slide 11 of 11</a:t>
             </a:r>
@@ -4698,7 +4853,11 @@
           <a:bodyPr rtlCol="0" anchor="ctr"/>
           <a:lstStyle/>
           <a:p>
-            <a:pPr algn="ctr"/>
+            <a:pPr algn="ctr">
+              <a:defRPr>
+                <a:latin typeface="Roboto"/>
+              </a:defRPr>
+            </a:pPr>
           </a:p>
         </p:txBody>
       </p:sp>
@@ -4724,12 +4883,17 @@
           </a:bodyPr>
           <a:lstStyle/>
           <a:p>
+            <a:pPr>
+              <a:defRPr>
+                <a:latin typeface="Roboto"/>
+              </a:defRPr>
+            </a:pPr>
             <a:r>
               <a:rPr sz="1000" b="0">
                 <a:solidFill>
                   <a:srgbClr val="5F6F63"/>
                 </a:solidFill>
-                <a:latin typeface="Arial"/>
+                <a:latin typeface="Roboto"/>
               </a:rPr>
               <a:t>Sample Community Services Ltd · What does it cost to raise a dollar?</a:t>
             </a:r>
@@ -4758,12 +4922,17 @@
           </a:bodyPr>
           <a:lstStyle/>
           <a:p>
+            <a:pPr>
+              <a:defRPr>
+                <a:latin typeface="Roboto"/>
+              </a:defRPr>
+            </a:pPr>
             <a:r>
               <a:rPr sz="2400" b="1">
                 <a:solidFill>
                   <a:srgbClr val="25342A"/>
                 </a:solidFill>
-                <a:latin typeface="Arial"/>
+                <a:latin typeface="Roboto"/>
               </a:rPr>
               <a:t>Headline numbers · Source: All fundraising</a:t>
             </a:r>
@@ -4811,7 +4980,11 @@
           <a:bodyPr rtlCol="0" anchor="ctr"/>
           <a:lstStyle/>
           <a:p>
-            <a:pPr algn="ctr"/>
+            <a:pPr algn="ctr">
+              <a:defRPr>
+                <a:latin typeface="Roboto"/>
+              </a:defRPr>
+            </a:pPr>
           </a:p>
         </p:txBody>
       </p:sp>
@@ -4837,12 +5010,17 @@
           </a:bodyPr>
           <a:lstStyle/>
           <a:p>
+            <a:pPr>
+              <a:defRPr>
+                <a:latin typeface="Roboto"/>
+              </a:defRPr>
+            </a:pPr>
             <a:r>
               <a:rPr sz="1200" b="0">
                 <a:solidFill>
                   <a:srgbClr val="5F6F63"/>
                 </a:solidFill>
-                <a:latin typeface="Arial"/>
+                <a:latin typeface="Roboto"/>
               </a:rPr>
               <a:t>February · all fundraising</a:t>
             </a:r>
@@ -4871,12 +5049,17 @@
           </a:bodyPr>
           <a:lstStyle/>
           <a:p>
+            <a:pPr>
+              <a:defRPr>
+                <a:latin typeface="Roboto"/>
+              </a:defRPr>
+            </a:pPr>
             <a:r>
               <a:rPr sz="3000" b="1">
                 <a:solidFill>
                   <a:srgbClr val="2F7A5D"/>
                 </a:solidFill>
-                <a:latin typeface="Arial"/>
+                <a:latin typeface="Roboto"/>
               </a:rPr>
               <a:t>13¢</a:t>
             </a:r>
@@ -4905,12 +5088,17 @@
           </a:bodyPr>
           <a:lstStyle/>
           <a:p>
+            <a:pPr>
+              <a:defRPr>
+                <a:latin typeface="Roboto"/>
+              </a:defRPr>
+            </a:pPr>
             <a:r>
               <a:rPr sz="1100" b="0">
                 <a:solidFill>
                   <a:srgbClr val="5F6F63"/>
                 </a:solidFill>
-                <a:latin typeface="Arial"/>
+                <a:latin typeface="Roboto"/>
               </a:rPr>
               <a:t>January 13¢</a:t>
             </a:r>
@@ -4958,7 +5146,11 @@
           <a:bodyPr rtlCol="0" anchor="ctr"/>
           <a:lstStyle/>
           <a:p>
-            <a:pPr algn="ctr"/>
+            <a:pPr algn="ctr">
+              <a:defRPr>
+                <a:latin typeface="Roboto"/>
+              </a:defRPr>
+            </a:pPr>
           </a:p>
         </p:txBody>
       </p:sp>
@@ -4984,12 +5176,17 @@
           </a:bodyPr>
           <a:lstStyle/>
           <a:p>
+            <a:pPr>
+              <a:defRPr>
+                <a:latin typeface="Roboto"/>
+              </a:defRPr>
+            </a:pPr>
             <a:r>
               <a:rPr sz="1200" b="0">
                 <a:solidFill>
                   <a:srgbClr val="5F6F63"/>
                 </a:solidFill>
-                <a:latin typeface="Arial"/>
+                <a:latin typeface="Roboto"/>
               </a:rPr>
               <a:t>Year to date (Jul to Feb 2026)</a:t>
             </a:r>
@@ -5018,12 +5215,17 @@
           </a:bodyPr>
           <a:lstStyle/>
           <a:p>
+            <a:pPr>
+              <a:defRPr>
+                <a:latin typeface="Roboto"/>
+              </a:defRPr>
+            </a:pPr>
             <a:r>
               <a:rPr sz="3000" b="1">
                 <a:solidFill>
                   <a:srgbClr val="2F7A5D"/>
                 </a:solidFill>
-                <a:latin typeface="Arial"/>
+                <a:latin typeface="Roboto"/>
               </a:rPr>
               <a:t>14¢</a:t>
             </a:r>
@@ -5052,12 +5254,17 @@
           </a:bodyPr>
           <a:lstStyle/>
           <a:p>
+            <a:pPr>
+              <a:defRPr>
+                <a:latin typeface="Roboto"/>
+              </a:defRPr>
+            </a:pPr>
             <a:r>
               <a:rPr sz="1100" b="0">
                 <a:solidFill>
                   <a:srgbClr val="5F6F63"/>
                 </a:solidFill>
-                <a:latin typeface="Arial"/>
+                <a:latin typeface="Roboto"/>
               </a:rPr>
               <a:t>same period last year: not in the data</a:t>
             </a:r>
@@ -5086,12 +5293,17 @@
           </a:bodyPr>
           <a:lstStyle/>
           <a:p>
+            <a:pPr>
+              <a:defRPr>
+                <a:latin typeface="Roboto"/>
+              </a:defRPr>
+            </a:pPr>
             <a:r>
               <a:rPr sz="900" b="0">
                 <a:solidFill>
                   <a:srgbClr val="5F6F63"/>
                 </a:solidFill>
-                <a:latin typeface="Arial"/>
+                <a:latin typeface="Roboto"/>
               </a:rPr>
               <a:t>cost-to-raise.pptx</a:t>
             </a:r>
@@ -5120,13 +5332,17 @@
           </a:bodyPr>
           <a:lstStyle/>
           <a:p>
-            <a:pPr algn="ctr"/>
+            <a:pPr algn="ctr">
+              <a:defRPr>
+                <a:latin typeface="Roboto"/>
+              </a:defRPr>
+            </a:pPr>
             <a:r>
               <a:rPr sz="900" b="0">
                 <a:solidFill>
                   <a:srgbClr val="5F6F63"/>
                 </a:solidFill>
-                <a:latin typeface="Arial"/>
+                <a:latin typeface="Roboto"/>
               </a:rPr>
               <a:t>Data retrieved 2pm, Tue 6 Oct 2026 · Sample data</a:t>
             </a:r>
@@ -5155,13 +5371,17 @@
           </a:bodyPr>
           <a:lstStyle/>
           <a:p>
-            <a:pPr algn="r"/>
+            <a:pPr algn="r">
+              <a:defRPr>
+                <a:latin typeface="Roboto"/>
+              </a:defRPr>
+            </a:pPr>
             <a:r>
               <a:rPr sz="900" b="0">
                 <a:solidFill>
                   <a:srgbClr val="5F6F63"/>
                 </a:solidFill>
-                <a:latin typeface="Arial"/>
+                <a:latin typeface="Roboto"/>
               </a:rPr>
               <a:t>Slide 2 of 11</a:t>
             </a:r>
@@ -5225,7 +5445,11 @@
           <a:bodyPr rtlCol="0" anchor="ctr"/>
           <a:lstStyle/>
           <a:p>
-            <a:pPr algn="ctr"/>
+            <a:pPr algn="ctr">
+              <a:defRPr>
+                <a:latin typeface="Roboto"/>
+              </a:defRPr>
+            </a:pPr>
           </a:p>
         </p:txBody>
       </p:sp>
@@ -5251,12 +5475,17 @@
           </a:bodyPr>
           <a:lstStyle/>
           <a:p>
+            <a:pPr>
+              <a:defRPr>
+                <a:latin typeface="Roboto"/>
+              </a:defRPr>
+            </a:pPr>
             <a:r>
               <a:rPr sz="1000" b="0">
                 <a:solidFill>
                   <a:srgbClr val="5F6F63"/>
                 </a:solidFill>
-                <a:latin typeface="Arial"/>
+                <a:latin typeface="Roboto"/>
               </a:rPr>
               <a:t>Sample Community Services Ltd · What does it cost to raise a dollar?</a:t>
             </a:r>
@@ -5285,12 +5514,17 @@
           </a:bodyPr>
           <a:lstStyle/>
           <a:p>
+            <a:pPr>
+              <a:defRPr>
+                <a:latin typeface="Roboto"/>
+              </a:defRPr>
+            </a:pPr>
             <a:r>
               <a:rPr sz="2400" b="1">
                 <a:solidFill>
                   <a:srgbClr val="25342A"/>
                 </a:solidFill>
-                <a:latin typeface="Arial"/>
+                <a:latin typeface="Roboto"/>
               </a:rPr>
               <a:t>Cost to raise a dollar, by source, February 2026 (cents) · Source: All fundraising</a:t>
             </a:r>
@@ -5337,12 +5571,17 @@
           </a:bodyPr>
           <a:lstStyle/>
           <a:p>
+            <a:pPr>
+              <a:defRPr>
+                <a:latin typeface="Roboto"/>
+              </a:defRPr>
+            </a:pPr>
             <a:r>
               <a:rPr sz="900" b="0">
                 <a:solidFill>
                   <a:srgbClr val="5F6F63"/>
                 </a:solidFill>
-                <a:latin typeface="Arial"/>
+                <a:latin typeface="Roboto"/>
               </a:rPr>
               <a:t>cost-to-raise.pptx</a:t>
             </a:r>
@@ -5371,13 +5610,17 @@
           </a:bodyPr>
           <a:lstStyle/>
           <a:p>
-            <a:pPr algn="ctr"/>
+            <a:pPr algn="ctr">
+              <a:defRPr>
+                <a:latin typeface="Roboto"/>
+              </a:defRPr>
+            </a:pPr>
             <a:r>
               <a:rPr sz="900" b="0">
                 <a:solidFill>
                   <a:srgbClr val="5F6F63"/>
                 </a:solidFill>
-                <a:latin typeface="Arial"/>
+                <a:latin typeface="Roboto"/>
               </a:rPr>
               <a:t>Data retrieved 2pm, Tue 6 Oct 2026 · Sample data</a:t>
             </a:r>
@@ -5406,13 +5649,17 @@
           </a:bodyPr>
           <a:lstStyle/>
           <a:p>
-            <a:pPr algn="r"/>
+            <a:pPr algn="r">
+              <a:defRPr>
+                <a:latin typeface="Roboto"/>
+              </a:defRPr>
+            </a:pPr>
             <a:r>
               <a:rPr sz="900" b="0">
                 <a:solidFill>
                   <a:srgbClr val="5F6F63"/>
                 </a:solidFill>
-                <a:latin typeface="Arial"/>
+                <a:latin typeface="Roboto"/>
               </a:rPr>
               <a:t>Slide 3 of 11</a:t>
             </a:r>
@@ -5476,7 +5723,11 @@
           <a:bodyPr rtlCol="0" anchor="ctr"/>
           <a:lstStyle/>
           <a:p>
-            <a:pPr algn="ctr"/>
+            <a:pPr algn="ctr">
+              <a:defRPr>
+                <a:latin typeface="Roboto"/>
+              </a:defRPr>
+            </a:pPr>
           </a:p>
         </p:txBody>
       </p:sp>
@@ -5502,12 +5753,17 @@
           </a:bodyPr>
           <a:lstStyle/>
           <a:p>
+            <a:pPr>
+              <a:defRPr>
+                <a:latin typeface="Roboto"/>
+              </a:defRPr>
+            </a:pPr>
             <a:r>
               <a:rPr sz="1000" b="0">
                 <a:solidFill>
                   <a:srgbClr val="5F6F63"/>
                 </a:solidFill>
-                <a:latin typeface="Arial"/>
+                <a:latin typeface="Roboto"/>
               </a:rPr>
               <a:t>Sample Community Services Ltd · What does it cost to raise a dollar?</a:t>
             </a:r>
@@ -5536,12 +5792,17 @@
           </a:bodyPr>
           <a:lstStyle/>
           <a:p>
+            <a:pPr>
+              <a:defRPr>
+                <a:latin typeface="Roboto"/>
+              </a:defRPr>
+            </a:pPr>
             <a:r>
               <a:rPr sz="2400" b="1">
                 <a:solidFill>
                   <a:srgbClr val="25342A"/>
                 </a:solidFill>
-                <a:latin typeface="Arial"/>
+                <a:latin typeface="Roboto"/>
               </a:rPr>
               <a:t>What it shows · Source: All fundraising</a:t>
             </a:r>
@@ -5589,7 +5850,11 @@
           <a:bodyPr rtlCol="0" anchor="ctr"/>
           <a:lstStyle/>
           <a:p>
-            <a:pPr algn="ctr"/>
+            <a:pPr algn="ctr">
+              <a:defRPr>
+                <a:latin typeface="Roboto"/>
+              </a:defRPr>
+            </a:pPr>
           </a:p>
         </p:txBody>
       </p:sp>
@@ -5615,12 +5880,17 @@
           </a:bodyPr>
           <a:lstStyle/>
           <a:p>
+            <a:pPr>
+              <a:defRPr>
+                <a:latin typeface="Roboto"/>
+              </a:defRPr>
+            </a:pPr>
             <a:r>
               <a:rPr sz="1100" b="1">
                 <a:solidFill>
                   <a:srgbClr val="5F6F63"/>
                 </a:solidFill>
-                <a:latin typeface="Arial"/>
+                <a:latin typeface="Roboto"/>
               </a:rPr>
               <a:t>WHAT IT SHOWS</a:t>
             </a:r>
@@ -5649,12 +5919,17 @@
           </a:bodyPr>
           <a:lstStyle/>
           <a:p>
+            <a:pPr>
+              <a:defRPr>
+                <a:latin typeface="Roboto"/>
+              </a:defRPr>
+            </a:pPr>
             <a:r>
               <a:rPr sz="1600" b="0">
                 <a:solidFill>
                   <a:srgbClr val="25342A"/>
                 </a:solidFill>
-                <a:latin typeface="Arial"/>
+                <a:latin typeface="Roboto"/>
               </a:rPr>
               <a:t>February cost 13¢ to raise each dollar, against 13¢ in January. This financial year to date it has cost 14¢ a dollar.</a:t>
             </a:r>
@@ -5702,7 +5977,11 @@
           <a:bodyPr rtlCol="0" anchor="ctr"/>
           <a:lstStyle/>
           <a:p>
-            <a:pPr algn="ctr"/>
+            <a:pPr algn="ctr">
+              <a:defRPr>
+                <a:latin typeface="Roboto"/>
+              </a:defRPr>
+            </a:pPr>
           </a:p>
         </p:txBody>
       </p:sp>
@@ -5728,12 +6007,17 @@
           </a:bodyPr>
           <a:lstStyle/>
           <a:p>
+            <a:pPr>
+              <a:defRPr>
+                <a:latin typeface="Roboto"/>
+              </a:defRPr>
+            </a:pPr>
             <a:r>
               <a:rPr sz="1100" b="1">
                 <a:solidFill>
                   <a:srgbClr val="5F6F63"/>
                 </a:solidFill>
-                <a:latin typeface="Arial"/>
+                <a:latin typeface="Roboto"/>
               </a:rPr>
               <a:t>WHAT YOU'D DO ABOUT IT</a:t>
             </a:r>
@@ -5762,12 +6046,17 @@
           </a:bodyPr>
           <a:lstStyle/>
           <a:p>
+            <a:pPr>
+              <a:defRPr>
+                <a:latin typeface="Roboto"/>
+              </a:defRPr>
+            </a:pPr>
             <a:r>
               <a:rPr sz="1600" b="0">
                 <a:solidFill>
                   <a:srgbClr val="25342A"/>
                 </a:solidFill>
-                <a:latin typeface="Arial"/>
+                <a:latin typeface="Roboto"/>
               </a:rPr>
               <a:t>The year-to-date figure is steadier than single months: events make some months jump. Pick a source above to see which one moves it.</a:t>
             </a:r>
@@ -5796,12 +6085,17 @@
           </a:bodyPr>
           <a:lstStyle/>
           <a:p>
+            <a:pPr>
+              <a:defRPr>
+                <a:latin typeface="Roboto"/>
+              </a:defRPr>
+            </a:pPr>
             <a:r>
               <a:rPr sz="900" b="0">
                 <a:solidFill>
                   <a:srgbClr val="5F6F63"/>
                 </a:solidFill>
-                <a:latin typeface="Arial"/>
+                <a:latin typeface="Roboto"/>
               </a:rPr>
               <a:t>cost-to-raise.pptx</a:t>
             </a:r>
@@ -5830,13 +6124,17 @@
           </a:bodyPr>
           <a:lstStyle/>
           <a:p>
-            <a:pPr algn="ctr"/>
+            <a:pPr algn="ctr">
+              <a:defRPr>
+                <a:latin typeface="Roboto"/>
+              </a:defRPr>
+            </a:pPr>
             <a:r>
               <a:rPr sz="900" b="0">
                 <a:solidFill>
                   <a:srgbClr val="5F6F63"/>
                 </a:solidFill>
-                <a:latin typeface="Arial"/>
+                <a:latin typeface="Roboto"/>
               </a:rPr>
               <a:t>Data retrieved 2pm, Tue 6 Oct 2026 · Sample data</a:t>
             </a:r>
@@ -5865,13 +6163,17 @@
           </a:bodyPr>
           <a:lstStyle/>
           <a:p>
-            <a:pPr algn="r"/>
+            <a:pPr algn="r">
+              <a:defRPr>
+                <a:latin typeface="Roboto"/>
+              </a:defRPr>
+            </a:pPr>
             <a:r>
               <a:rPr sz="900" b="0">
                 <a:solidFill>
                   <a:srgbClr val="5F6F63"/>
                 </a:solidFill>
-                <a:latin typeface="Arial"/>
+                <a:latin typeface="Roboto"/>
               </a:rPr>
               <a:t>Slide 4 of 11</a:t>
             </a:r>
@@ -5935,7 +6237,11 @@
           <a:bodyPr rtlCol="0" anchor="ctr"/>
           <a:lstStyle/>
           <a:p>
-            <a:pPr algn="ctr"/>
+            <a:pPr algn="ctr">
+              <a:defRPr>
+                <a:latin typeface="Roboto"/>
+              </a:defRPr>
+            </a:pPr>
           </a:p>
         </p:txBody>
       </p:sp>
@@ -5961,12 +6267,17 @@
           </a:bodyPr>
           <a:lstStyle/>
           <a:p>
+            <a:pPr>
+              <a:defRPr>
+                <a:latin typeface="Roboto"/>
+              </a:defRPr>
+            </a:pPr>
             <a:r>
               <a:rPr sz="1000" b="0">
                 <a:solidFill>
                   <a:srgbClr val="5F6F63"/>
                 </a:solidFill>
-                <a:latin typeface="Arial"/>
+                <a:latin typeface="Roboto"/>
               </a:rPr>
               <a:t>Sample Community Services Ltd · What does it cost to raise a dollar?</a:t>
             </a:r>
@@ -5995,12 +6306,17 @@
           </a:bodyPr>
           <a:lstStyle/>
           <a:p>
+            <a:pPr>
+              <a:defRPr>
+                <a:latin typeface="Roboto"/>
+              </a:defRPr>
+            </a:pPr>
             <a:r>
               <a:rPr sz="2400" b="1">
                 <a:solidFill>
                   <a:srgbClr val="25342A"/>
                 </a:solidFill>
-                <a:latin typeface="Arial"/>
+                <a:latin typeface="Roboto"/>
               </a:rPr>
               <a:t>Headline numbers · Source: Grants</a:t>
             </a:r>
@@ -6048,7 +6364,11 @@
           <a:bodyPr rtlCol="0" anchor="ctr"/>
           <a:lstStyle/>
           <a:p>
-            <a:pPr algn="ctr"/>
+            <a:pPr algn="ctr">
+              <a:defRPr>
+                <a:latin typeface="Roboto"/>
+              </a:defRPr>
+            </a:pPr>
           </a:p>
         </p:txBody>
       </p:sp>
@@ -6074,12 +6394,17 @@
           </a:bodyPr>
           <a:lstStyle/>
           <a:p>
+            <a:pPr>
+              <a:defRPr>
+                <a:latin typeface="Roboto"/>
+              </a:defRPr>
+            </a:pPr>
             <a:r>
               <a:rPr sz="1200" b="0">
                 <a:solidFill>
                   <a:srgbClr val="5F6F63"/>
                 </a:solidFill>
-                <a:latin typeface="Arial"/>
+                <a:latin typeface="Roboto"/>
               </a:rPr>
               <a:t>February · Grants</a:t>
             </a:r>
@@ -6108,12 +6433,17 @@
           </a:bodyPr>
           <a:lstStyle/>
           <a:p>
+            <a:pPr>
+              <a:defRPr>
+                <a:latin typeface="Roboto"/>
+              </a:defRPr>
+            </a:pPr>
             <a:r>
               <a:rPr sz="3000" b="1">
                 <a:solidFill>
                   <a:srgbClr val="2F7A5D"/>
                 </a:solidFill>
-                <a:latin typeface="Arial"/>
+                <a:latin typeface="Roboto"/>
               </a:rPr>
               <a:t>13¢</a:t>
             </a:r>
@@ -6142,12 +6472,17 @@
           </a:bodyPr>
           <a:lstStyle/>
           <a:p>
+            <a:pPr>
+              <a:defRPr>
+                <a:latin typeface="Roboto"/>
+              </a:defRPr>
+            </a:pPr>
             <a:r>
               <a:rPr sz="1100" b="0">
                 <a:solidFill>
                   <a:srgbClr val="5F6F63"/>
                 </a:solidFill>
-                <a:latin typeface="Arial"/>
+                <a:latin typeface="Roboto"/>
               </a:rPr>
               <a:t>January 12¢</a:t>
             </a:r>
@@ -6195,7 +6530,11 @@
           <a:bodyPr rtlCol="0" anchor="ctr"/>
           <a:lstStyle/>
           <a:p>
-            <a:pPr algn="ctr"/>
+            <a:pPr algn="ctr">
+              <a:defRPr>
+                <a:latin typeface="Roboto"/>
+              </a:defRPr>
+            </a:pPr>
           </a:p>
         </p:txBody>
       </p:sp>
@@ -6221,12 +6560,17 @@
           </a:bodyPr>
           <a:lstStyle/>
           <a:p>
+            <a:pPr>
+              <a:defRPr>
+                <a:latin typeface="Roboto"/>
+              </a:defRPr>
+            </a:pPr>
             <a:r>
               <a:rPr sz="1200" b="0">
                 <a:solidFill>
                   <a:srgbClr val="5F6F63"/>
                 </a:solidFill>
-                <a:latin typeface="Arial"/>
+                <a:latin typeface="Roboto"/>
               </a:rPr>
               <a:t>Year to date (Jul to Feb 2026)</a:t>
             </a:r>
@@ -6255,12 +6599,17 @@
           </a:bodyPr>
           <a:lstStyle/>
           <a:p>
+            <a:pPr>
+              <a:defRPr>
+                <a:latin typeface="Roboto"/>
+              </a:defRPr>
+            </a:pPr>
             <a:r>
               <a:rPr sz="3000" b="1">
                 <a:solidFill>
                   <a:srgbClr val="2F7A5D"/>
                 </a:solidFill>
-                <a:latin typeface="Arial"/>
+                <a:latin typeface="Roboto"/>
               </a:rPr>
               <a:t>11¢</a:t>
             </a:r>
@@ -6289,12 +6638,17 @@
           </a:bodyPr>
           <a:lstStyle/>
           <a:p>
+            <a:pPr>
+              <a:defRPr>
+                <a:latin typeface="Roboto"/>
+              </a:defRPr>
+            </a:pPr>
             <a:r>
               <a:rPr sz="1100" b="0">
                 <a:solidFill>
                   <a:srgbClr val="5F6F63"/>
                 </a:solidFill>
-                <a:latin typeface="Arial"/>
+                <a:latin typeface="Roboto"/>
               </a:rPr>
               <a:t>same period last year: not in the data</a:t>
             </a:r>
@@ -6323,12 +6677,17 @@
           </a:bodyPr>
           <a:lstStyle/>
           <a:p>
+            <a:pPr>
+              <a:defRPr>
+                <a:latin typeface="Roboto"/>
+              </a:defRPr>
+            </a:pPr>
             <a:r>
               <a:rPr sz="900" b="0">
                 <a:solidFill>
                   <a:srgbClr val="5F6F63"/>
                 </a:solidFill>
-                <a:latin typeface="Arial"/>
+                <a:latin typeface="Roboto"/>
               </a:rPr>
               <a:t>cost-to-raise.pptx</a:t>
             </a:r>
@@ -6357,13 +6716,17 @@
           </a:bodyPr>
           <a:lstStyle/>
           <a:p>
-            <a:pPr algn="ctr"/>
+            <a:pPr algn="ctr">
+              <a:defRPr>
+                <a:latin typeface="Roboto"/>
+              </a:defRPr>
+            </a:pPr>
             <a:r>
               <a:rPr sz="900" b="0">
                 <a:solidFill>
                   <a:srgbClr val="5F6F63"/>
                 </a:solidFill>
-                <a:latin typeface="Arial"/>
+                <a:latin typeface="Roboto"/>
               </a:rPr>
               <a:t>Data retrieved 2pm, Tue 6 Oct 2026 · Sample data</a:t>
             </a:r>
@@ -6392,13 +6755,17 @@
           </a:bodyPr>
           <a:lstStyle/>
           <a:p>
-            <a:pPr algn="r"/>
+            <a:pPr algn="r">
+              <a:defRPr>
+                <a:latin typeface="Roboto"/>
+              </a:defRPr>
+            </a:pPr>
             <a:r>
               <a:rPr sz="900" b="0">
                 <a:solidFill>
                   <a:srgbClr val="5F6F63"/>
                 </a:solidFill>
-                <a:latin typeface="Arial"/>
+                <a:latin typeface="Roboto"/>
               </a:rPr>
               <a:t>Slide 5 of 11</a:t>
             </a:r>
@@ -6462,7 +6829,11 @@
           <a:bodyPr rtlCol="0" anchor="ctr"/>
           <a:lstStyle/>
           <a:p>
-            <a:pPr algn="ctr"/>
+            <a:pPr algn="ctr">
+              <a:defRPr>
+                <a:latin typeface="Roboto"/>
+              </a:defRPr>
+            </a:pPr>
           </a:p>
         </p:txBody>
       </p:sp>
@@ -6488,12 +6859,17 @@
           </a:bodyPr>
           <a:lstStyle/>
           <a:p>
+            <a:pPr>
+              <a:defRPr>
+                <a:latin typeface="Roboto"/>
+              </a:defRPr>
+            </a:pPr>
             <a:r>
               <a:rPr sz="1000" b="0">
                 <a:solidFill>
                   <a:srgbClr val="5F6F63"/>
                 </a:solidFill>
-                <a:latin typeface="Arial"/>
+                <a:latin typeface="Roboto"/>
               </a:rPr>
               <a:t>Sample Community Services Ltd · What does it cost to raise a dollar?</a:t>
             </a:r>
@@ -6522,12 +6898,17 @@
           </a:bodyPr>
           <a:lstStyle/>
           <a:p>
+            <a:pPr>
+              <a:defRPr>
+                <a:latin typeface="Roboto"/>
+              </a:defRPr>
+            </a:pPr>
             <a:r>
               <a:rPr sz="2400" b="1">
                 <a:solidFill>
                   <a:srgbClr val="25342A"/>
                 </a:solidFill>
-                <a:latin typeface="Arial"/>
+                <a:latin typeface="Roboto"/>
               </a:rPr>
               <a:t>What it shows · Source: Grants</a:t>
             </a:r>
@@ -6575,7 +6956,11 @@
           <a:bodyPr rtlCol="0" anchor="ctr"/>
           <a:lstStyle/>
           <a:p>
-            <a:pPr algn="ctr"/>
+            <a:pPr algn="ctr">
+              <a:defRPr>
+                <a:latin typeface="Roboto"/>
+              </a:defRPr>
+            </a:pPr>
           </a:p>
         </p:txBody>
       </p:sp>
@@ -6601,12 +6986,17 @@
           </a:bodyPr>
           <a:lstStyle/>
           <a:p>
+            <a:pPr>
+              <a:defRPr>
+                <a:latin typeface="Roboto"/>
+              </a:defRPr>
+            </a:pPr>
             <a:r>
               <a:rPr sz="1100" b="1">
                 <a:solidFill>
                   <a:srgbClr val="5F6F63"/>
                 </a:solidFill>
-                <a:latin typeface="Arial"/>
+                <a:latin typeface="Roboto"/>
               </a:rPr>
               <a:t>WHAT IT SHOWS</a:t>
             </a:r>
@@ -6635,12 +7025,17 @@
           </a:bodyPr>
           <a:lstStyle/>
           <a:p>
+            <a:pPr>
+              <a:defRPr>
+                <a:latin typeface="Roboto"/>
+              </a:defRPr>
+            </a:pPr>
             <a:r>
               <a:rPr sz="1600" b="0">
                 <a:solidFill>
                   <a:srgbClr val="25342A"/>
                 </a:solidFill>
-                <a:latin typeface="Arial"/>
+                <a:latin typeface="Roboto"/>
               </a:rPr>
               <a:t>Grants cost 11¢ to raise each dollar this financial year to date ($56,800 of grant writing and reporting for $506,430).</a:t>
             </a:r>
@@ -6688,7 +7083,11 @@
           <a:bodyPr rtlCol="0" anchor="ctr"/>
           <a:lstStyle/>
           <a:p>
-            <a:pPr algn="ctr"/>
+            <a:pPr algn="ctr">
+              <a:defRPr>
+                <a:latin typeface="Roboto"/>
+              </a:defRPr>
+            </a:pPr>
           </a:p>
         </p:txBody>
       </p:sp>
@@ -6714,12 +7113,17 @@
           </a:bodyPr>
           <a:lstStyle/>
           <a:p>
+            <a:pPr>
+              <a:defRPr>
+                <a:latin typeface="Roboto"/>
+              </a:defRPr>
+            </a:pPr>
             <a:r>
               <a:rPr sz="1100" b="1">
                 <a:solidFill>
                   <a:srgbClr val="5F6F63"/>
                 </a:solidFill>
-                <a:latin typeface="Arial"/>
+                <a:latin typeface="Roboto"/>
               </a:rPr>
               <a:t>WHAT YOU'D DO ABOUT IT</a:t>
             </a:r>
@@ -6748,12 +7152,17 @@
           </a:bodyPr>
           <a:lstStyle/>
           <a:p>
+            <a:pPr>
+              <a:defRPr>
+                <a:latin typeface="Roboto"/>
+              </a:defRPr>
+            </a:pPr>
             <a:r>
               <a:rPr sz="1600" b="0">
                 <a:solidFill>
                   <a:srgbClr val="25342A"/>
                 </a:solidFill>
-                <a:latin typeface="Arial"/>
+                <a:latin typeface="Roboto"/>
               </a:rPr>
               <a:t>Usually the cheapest money to raise, as long as the time that goes into applications and acquittals is protected.</a:t>
             </a:r>
@@ -6782,12 +7191,17 @@
           </a:bodyPr>
           <a:lstStyle/>
           <a:p>
+            <a:pPr>
+              <a:defRPr>
+                <a:latin typeface="Roboto"/>
+              </a:defRPr>
+            </a:pPr>
             <a:r>
               <a:rPr sz="900" b="0">
                 <a:solidFill>
                   <a:srgbClr val="5F6F63"/>
                 </a:solidFill>
-                <a:latin typeface="Arial"/>
+                <a:latin typeface="Roboto"/>
               </a:rPr>
               <a:t>cost-to-raise.pptx</a:t>
             </a:r>
@@ -6816,13 +7230,17 @@
           </a:bodyPr>
           <a:lstStyle/>
           <a:p>
-            <a:pPr algn="ctr"/>
+            <a:pPr algn="ctr">
+              <a:defRPr>
+                <a:latin typeface="Roboto"/>
+              </a:defRPr>
+            </a:pPr>
             <a:r>
               <a:rPr sz="900" b="0">
                 <a:solidFill>
                   <a:srgbClr val="5F6F63"/>
                 </a:solidFill>
-                <a:latin typeface="Arial"/>
+                <a:latin typeface="Roboto"/>
               </a:rPr>
               <a:t>Data retrieved 2pm, Tue 6 Oct 2026 · Sample data</a:t>
             </a:r>
@@ -6851,13 +7269,17 @@
           </a:bodyPr>
           <a:lstStyle/>
           <a:p>
-            <a:pPr algn="r"/>
+            <a:pPr algn="r">
+              <a:defRPr>
+                <a:latin typeface="Roboto"/>
+              </a:defRPr>
+            </a:pPr>
             <a:r>
               <a:rPr sz="900" b="0">
                 <a:solidFill>
                   <a:srgbClr val="5F6F63"/>
                 </a:solidFill>
-                <a:latin typeface="Arial"/>
+                <a:latin typeface="Roboto"/>
               </a:rPr>
               <a:t>Slide 6 of 11</a:t>
             </a:r>
@@ -6921,7 +7343,11 @@
           <a:bodyPr rtlCol="0" anchor="ctr"/>
           <a:lstStyle/>
           <a:p>
-            <a:pPr algn="ctr"/>
+            <a:pPr algn="ctr">
+              <a:defRPr>
+                <a:latin typeface="Roboto"/>
+              </a:defRPr>
+            </a:pPr>
           </a:p>
         </p:txBody>
       </p:sp>
@@ -6947,12 +7373,17 @@
           </a:bodyPr>
           <a:lstStyle/>
           <a:p>
+            <a:pPr>
+              <a:defRPr>
+                <a:latin typeface="Roboto"/>
+              </a:defRPr>
+            </a:pPr>
             <a:r>
               <a:rPr sz="1000" b="0">
                 <a:solidFill>
                   <a:srgbClr val="5F6F63"/>
                 </a:solidFill>
-                <a:latin typeface="Arial"/>
+                <a:latin typeface="Roboto"/>
               </a:rPr>
               <a:t>Sample Community Services Ltd · What does it cost to raise a dollar?</a:t>
             </a:r>
@@ -6981,12 +7412,17 @@
           </a:bodyPr>
           <a:lstStyle/>
           <a:p>
+            <a:pPr>
+              <a:defRPr>
+                <a:latin typeface="Roboto"/>
+              </a:defRPr>
+            </a:pPr>
             <a:r>
               <a:rPr sz="2400" b="1">
                 <a:solidFill>
                   <a:srgbClr val="25342A"/>
                 </a:solidFill>
-                <a:latin typeface="Arial"/>
+                <a:latin typeface="Roboto"/>
               </a:rPr>
               <a:t>Headline numbers · Source: Donations</a:t>
             </a:r>
@@ -7034,7 +7470,11 @@
           <a:bodyPr rtlCol="0" anchor="ctr"/>
           <a:lstStyle/>
           <a:p>
-            <a:pPr algn="ctr"/>
+            <a:pPr algn="ctr">
+              <a:defRPr>
+                <a:latin typeface="Roboto"/>
+              </a:defRPr>
+            </a:pPr>
           </a:p>
         </p:txBody>
       </p:sp>
@@ -7060,12 +7500,17 @@
           </a:bodyPr>
           <a:lstStyle/>
           <a:p>
+            <a:pPr>
+              <a:defRPr>
+                <a:latin typeface="Roboto"/>
+              </a:defRPr>
+            </a:pPr>
             <a:r>
               <a:rPr sz="1200" b="0">
                 <a:solidFill>
                   <a:srgbClr val="5F6F63"/>
                 </a:solidFill>
-                <a:latin typeface="Arial"/>
+                <a:latin typeface="Roboto"/>
               </a:rPr>
               <a:t>February · Donations</a:t>
             </a:r>
@@ -7094,12 +7539,17 @@
           </a:bodyPr>
           <a:lstStyle/>
           <a:p>
+            <a:pPr>
+              <a:defRPr>
+                <a:latin typeface="Roboto"/>
+              </a:defRPr>
+            </a:pPr>
             <a:r>
               <a:rPr sz="3000" b="1">
                 <a:solidFill>
                   <a:srgbClr val="2F7A5D"/>
                 </a:solidFill>
-                <a:latin typeface="Arial"/>
+                <a:latin typeface="Roboto"/>
               </a:rPr>
               <a:t>13¢</a:t>
             </a:r>
@@ -7128,12 +7578,17 @@
           </a:bodyPr>
           <a:lstStyle/>
           <a:p>
+            <a:pPr>
+              <a:defRPr>
+                <a:latin typeface="Roboto"/>
+              </a:defRPr>
+            </a:pPr>
             <a:r>
               <a:rPr sz="1100" b="0">
                 <a:solidFill>
                   <a:srgbClr val="5F6F63"/>
                 </a:solidFill>
-                <a:latin typeface="Arial"/>
+                <a:latin typeface="Roboto"/>
               </a:rPr>
               <a:t>January 17¢</a:t>
             </a:r>
@@ -7181,7 +7636,11 @@
           <a:bodyPr rtlCol="0" anchor="ctr"/>
           <a:lstStyle/>
           <a:p>
-            <a:pPr algn="ctr"/>
+            <a:pPr algn="ctr">
+              <a:defRPr>
+                <a:latin typeface="Roboto"/>
+              </a:defRPr>
+            </a:pPr>
           </a:p>
         </p:txBody>
       </p:sp>
@@ -7207,12 +7666,17 @@
           </a:bodyPr>
           <a:lstStyle/>
           <a:p>
+            <a:pPr>
+              <a:defRPr>
+                <a:latin typeface="Roboto"/>
+              </a:defRPr>
+            </a:pPr>
             <a:r>
               <a:rPr sz="1200" b="0">
                 <a:solidFill>
                   <a:srgbClr val="5F6F63"/>
                 </a:solidFill>
-                <a:latin typeface="Arial"/>
+                <a:latin typeface="Roboto"/>
               </a:rPr>
               <a:t>Year to date (Jul to Feb 2026)</a:t>
             </a:r>
@@ -7241,12 +7705,17 @@
           </a:bodyPr>
           <a:lstStyle/>
           <a:p>
+            <a:pPr>
+              <a:defRPr>
+                <a:latin typeface="Roboto"/>
+              </a:defRPr>
+            </a:pPr>
             <a:r>
               <a:rPr sz="3000" b="1">
                 <a:solidFill>
                   <a:srgbClr val="2F7A5D"/>
                 </a:solidFill>
-                <a:latin typeface="Arial"/>
+                <a:latin typeface="Roboto"/>
               </a:rPr>
               <a:t>15¢</a:t>
             </a:r>
@@ -7275,12 +7744,17 @@
           </a:bodyPr>
           <a:lstStyle/>
           <a:p>
+            <a:pPr>
+              <a:defRPr>
+                <a:latin typeface="Roboto"/>
+              </a:defRPr>
+            </a:pPr>
             <a:r>
               <a:rPr sz="1100" b="0">
                 <a:solidFill>
                   <a:srgbClr val="5F6F63"/>
                 </a:solidFill>
-                <a:latin typeface="Arial"/>
+                <a:latin typeface="Roboto"/>
               </a:rPr>
               <a:t>same period last year: not in the data</a:t>
             </a:r>
@@ -7309,12 +7783,17 @@
           </a:bodyPr>
           <a:lstStyle/>
           <a:p>
+            <a:pPr>
+              <a:defRPr>
+                <a:latin typeface="Roboto"/>
+              </a:defRPr>
+            </a:pPr>
             <a:r>
               <a:rPr sz="900" b="0">
                 <a:solidFill>
                   <a:srgbClr val="5F6F63"/>
                 </a:solidFill>
-                <a:latin typeface="Arial"/>
+                <a:latin typeface="Roboto"/>
               </a:rPr>
               <a:t>cost-to-raise.pptx</a:t>
             </a:r>
@@ -7343,13 +7822,17 @@
           </a:bodyPr>
           <a:lstStyle/>
           <a:p>
-            <a:pPr algn="ctr"/>
+            <a:pPr algn="ctr">
+              <a:defRPr>
+                <a:latin typeface="Roboto"/>
+              </a:defRPr>
+            </a:pPr>
             <a:r>
               <a:rPr sz="900" b="0">
                 <a:solidFill>
                   <a:srgbClr val="5F6F63"/>
                 </a:solidFill>
-                <a:latin typeface="Arial"/>
+                <a:latin typeface="Roboto"/>
               </a:rPr>
               <a:t>Data retrieved 2pm, Tue 6 Oct 2026 · Sample data</a:t>
             </a:r>
@@ -7378,13 +7861,17 @@
           </a:bodyPr>
           <a:lstStyle/>
           <a:p>
-            <a:pPr algn="r"/>
+            <a:pPr algn="r">
+              <a:defRPr>
+                <a:latin typeface="Roboto"/>
+              </a:defRPr>
+            </a:pPr>
             <a:r>
               <a:rPr sz="900" b="0">
                 <a:solidFill>
                   <a:srgbClr val="5F6F63"/>
                 </a:solidFill>
-                <a:latin typeface="Arial"/>
+                <a:latin typeface="Roboto"/>
               </a:rPr>
               <a:t>Slide 7 of 11</a:t>
             </a:r>
@@ -7448,7 +7935,11 @@
           <a:bodyPr rtlCol="0" anchor="ctr"/>
           <a:lstStyle/>
           <a:p>
-            <a:pPr algn="ctr"/>
+            <a:pPr algn="ctr">
+              <a:defRPr>
+                <a:latin typeface="Roboto"/>
+              </a:defRPr>
+            </a:pPr>
           </a:p>
         </p:txBody>
       </p:sp>
@@ -7474,12 +7965,17 @@
           </a:bodyPr>
           <a:lstStyle/>
           <a:p>
+            <a:pPr>
+              <a:defRPr>
+                <a:latin typeface="Roboto"/>
+              </a:defRPr>
+            </a:pPr>
             <a:r>
               <a:rPr sz="1000" b="0">
                 <a:solidFill>
                   <a:srgbClr val="5F6F63"/>
                 </a:solidFill>
-                <a:latin typeface="Arial"/>
+                <a:latin typeface="Roboto"/>
               </a:rPr>
               <a:t>Sample Community Services Ltd · What does it cost to raise a dollar?</a:t>
             </a:r>
@@ -7508,12 +8004,17 @@
           </a:bodyPr>
           <a:lstStyle/>
           <a:p>
+            <a:pPr>
+              <a:defRPr>
+                <a:latin typeface="Roboto"/>
+              </a:defRPr>
+            </a:pPr>
             <a:r>
               <a:rPr sz="2400" b="1">
                 <a:solidFill>
                   <a:srgbClr val="25342A"/>
                 </a:solidFill>
-                <a:latin typeface="Arial"/>
+                <a:latin typeface="Roboto"/>
               </a:rPr>
               <a:t>What it shows · Source: Donations</a:t>
             </a:r>
@@ -7561,7 +8062,11 @@
           <a:bodyPr rtlCol="0" anchor="ctr"/>
           <a:lstStyle/>
           <a:p>
-            <a:pPr algn="ctr"/>
+            <a:pPr algn="ctr">
+              <a:defRPr>
+                <a:latin typeface="Roboto"/>
+              </a:defRPr>
+            </a:pPr>
           </a:p>
         </p:txBody>
       </p:sp>
@@ -7587,12 +8092,17 @@
           </a:bodyPr>
           <a:lstStyle/>
           <a:p>
+            <a:pPr>
+              <a:defRPr>
+                <a:latin typeface="Roboto"/>
+              </a:defRPr>
+            </a:pPr>
             <a:r>
               <a:rPr sz="1100" b="1">
                 <a:solidFill>
                   <a:srgbClr val="5F6F63"/>
                 </a:solidFill>
-                <a:latin typeface="Arial"/>
+                <a:latin typeface="Roboto"/>
               </a:rPr>
               <a:t>WHAT IT SHOWS</a:t>
             </a:r>
@@ -7621,12 +8131,17 @@
           </a:bodyPr>
           <a:lstStyle/>
           <a:p>
+            <a:pPr>
+              <a:defRPr>
+                <a:latin typeface="Roboto"/>
+              </a:defRPr>
+            </a:pPr>
             <a:r>
               <a:rPr sz="1600" b="0">
                 <a:solidFill>
                   <a:srgbClr val="25342A"/>
                 </a:solidFill>
-                <a:latin typeface="Arial"/>
+                <a:latin typeface="Roboto"/>
               </a:rPr>
               <a:t>Donations cost 15¢ to raise each dollar this financial year to date ($20,700 of donor campaigns for $136,100).</a:t>
             </a:r>
@@ -7674,7 +8189,11 @@
           <a:bodyPr rtlCol="0" anchor="ctr"/>
           <a:lstStyle/>
           <a:p>
-            <a:pPr algn="ctr"/>
+            <a:pPr algn="ctr">
+              <a:defRPr>
+                <a:latin typeface="Roboto"/>
+              </a:defRPr>
+            </a:pPr>
           </a:p>
         </p:txBody>
       </p:sp>
@@ -7700,12 +8219,17 @@
           </a:bodyPr>
           <a:lstStyle/>
           <a:p>
+            <a:pPr>
+              <a:defRPr>
+                <a:latin typeface="Roboto"/>
+              </a:defRPr>
+            </a:pPr>
             <a:r>
               <a:rPr sz="1100" b="1">
                 <a:solidFill>
                   <a:srgbClr val="5F6F63"/>
                 </a:solidFill>
-                <a:latin typeface="Arial"/>
+                <a:latin typeface="Roboto"/>
               </a:rPr>
               <a:t>WHAT YOU'D DO ABOUT IT</a:t>
             </a:r>
@@ -7734,12 +8258,17 @@
           </a:bodyPr>
           <a:lstStyle/>
           <a:p>
+            <a:pPr>
+              <a:defRPr>
+                <a:latin typeface="Roboto"/>
+              </a:defRPr>
+            </a:pPr>
             <a:r>
               <a:rPr sz="1600" b="0">
                 <a:solidFill>
                   <a:srgbClr val="25342A"/>
                 </a:solidFill>
-                <a:latin typeface="Arial"/>
+                <a:latin typeface="Roboto"/>
               </a:rPr>
               <a:t>Steady and cheap, and untied: the money that builds reserves.</a:t>
             </a:r>
@@ -7768,12 +8297,17 @@
           </a:bodyPr>
           <a:lstStyle/>
           <a:p>
+            <a:pPr>
+              <a:defRPr>
+                <a:latin typeface="Roboto"/>
+              </a:defRPr>
+            </a:pPr>
             <a:r>
               <a:rPr sz="900" b="0">
                 <a:solidFill>
                   <a:srgbClr val="5F6F63"/>
                 </a:solidFill>
-                <a:latin typeface="Arial"/>
+                <a:latin typeface="Roboto"/>
               </a:rPr>
               <a:t>cost-to-raise.pptx</a:t>
             </a:r>
@@ -7802,13 +8336,17 @@
           </a:bodyPr>
           <a:lstStyle/>
           <a:p>
-            <a:pPr algn="ctr"/>
+            <a:pPr algn="ctr">
+              <a:defRPr>
+                <a:latin typeface="Roboto"/>
+              </a:defRPr>
+            </a:pPr>
             <a:r>
               <a:rPr sz="900" b="0">
                 <a:solidFill>
                   <a:srgbClr val="5F6F63"/>
                 </a:solidFill>
-                <a:latin typeface="Arial"/>
+                <a:latin typeface="Roboto"/>
               </a:rPr>
               <a:t>Data retrieved 2pm, Tue 6 Oct 2026 · Sample data</a:t>
             </a:r>
@@ -7837,13 +8375,17 @@
           </a:bodyPr>
           <a:lstStyle/>
           <a:p>
-            <a:pPr algn="r"/>
+            <a:pPr algn="r">
+              <a:defRPr>
+                <a:latin typeface="Roboto"/>
+              </a:defRPr>
+            </a:pPr>
             <a:r>
               <a:rPr sz="900" b="0">
                 <a:solidFill>
                   <a:srgbClr val="5F6F63"/>
                 </a:solidFill>
-                <a:latin typeface="Arial"/>
+                <a:latin typeface="Roboto"/>
               </a:rPr>
               <a:t>Slide 8 of 11</a:t>
             </a:r>
@@ -7907,7 +8449,11 @@
           <a:bodyPr rtlCol="0" anchor="ctr"/>
           <a:lstStyle/>
           <a:p>
-            <a:pPr algn="ctr"/>
+            <a:pPr algn="ctr">
+              <a:defRPr>
+                <a:latin typeface="Roboto"/>
+              </a:defRPr>
+            </a:pPr>
           </a:p>
         </p:txBody>
       </p:sp>
@@ -7933,12 +8479,17 @@
           </a:bodyPr>
           <a:lstStyle/>
           <a:p>
+            <a:pPr>
+              <a:defRPr>
+                <a:latin typeface="Roboto"/>
+              </a:defRPr>
+            </a:pPr>
             <a:r>
               <a:rPr sz="1000" b="0">
                 <a:solidFill>
                   <a:srgbClr val="5F6F63"/>
                 </a:solidFill>
-                <a:latin typeface="Arial"/>
+                <a:latin typeface="Roboto"/>
               </a:rPr>
               <a:t>Sample Community Services Ltd · What does it cost to raise a dollar?</a:t>
             </a:r>
@@ -7967,12 +8518,17 @@
           </a:bodyPr>
           <a:lstStyle/>
           <a:p>
+            <a:pPr>
+              <a:defRPr>
+                <a:latin typeface="Roboto"/>
+              </a:defRPr>
+            </a:pPr>
             <a:r>
               <a:rPr sz="2400" b="1">
                 <a:solidFill>
                   <a:srgbClr val="25342A"/>
                 </a:solidFill>
-                <a:latin typeface="Arial"/>
+                <a:latin typeface="Roboto"/>
               </a:rPr>
               <a:t>Headline numbers · Source: Fundraising events</a:t>
             </a:r>
@@ -8020,7 +8576,11 @@
           <a:bodyPr rtlCol="0" anchor="ctr"/>
           <a:lstStyle/>
           <a:p>
-            <a:pPr algn="ctr"/>
+            <a:pPr algn="ctr">
+              <a:defRPr>
+                <a:latin typeface="Roboto"/>
+              </a:defRPr>
+            </a:pPr>
           </a:p>
         </p:txBody>
       </p:sp>
@@ -8046,12 +8606,17 @@
           </a:bodyPr>
           <a:lstStyle/>
           <a:p>
+            <a:pPr>
+              <a:defRPr>
+                <a:latin typeface="Roboto"/>
+              </a:defRPr>
+            </a:pPr>
             <a:r>
               <a:rPr sz="1200" b="0">
                 <a:solidFill>
                   <a:srgbClr val="5F6F63"/>
                 </a:solidFill>
-                <a:latin typeface="Arial"/>
+                <a:latin typeface="Roboto"/>
               </a:rPr>
               <a:t>February · Fundraising events</a:t>
             </a:r>
@@ -8080,12 +8645,17 @@
           </a:bodyPr>
           <a:lstStyle/>
           <a:p>
+            <a:pPr>
+              <a:defRPr>
+                <a:latin typeface="Roboto"/>
+              </a:defRPr>
+            </a:pPr>
             <a:r>
               <a:rPr sz="3000" b="1">
                 <a:solidFill>
                   <a:srgbClr val="2F7A5D"/>
                 </a:solidFill>
-                <a:latin typeface="Arial"/>
+                <a:latin typeface="Roboto"/>
               </a:rPr>
               <a:t>–</a:t>
             </a:r>
@@ -8114,12 +8684,17 @@
           </a:bodyPr>
           <a:lstStyle/>
           <a:p>
+            <a:pPr>
+              <a:defRPr>
+                <a:latin typeface="Roboto"/>
+              </a:defRPr>
+            </a:pPr>
             <a:r>
               <a:rPr sz="1100" b="0">
                 <a:solidFill>
                   <a:srgbClr val="5F6F63"/>
                 </a:solidFill>
-                <a:latin typeface="Arial"/>
+                <a:latin typeface="Roboto"/>
               </a:rPr>
               <a:t>January none raised</a:t>
             </a:r>
@@ -8167,7 +8742,11 @@
           <a:bodyPr rtlCol="0" anchor="ctr"/>
           <a:lstStyle/>
           <a:p>
-            <a:pPr algn="ctr"/>
+            <a:pPr algn="ctr">
+              <a:defRPr>
+                <a:latin typeface="Roboto"/>
+              </a:defRPr>
+            </a:pPr>
           </a:p>
         </p:txBody>
       </p:sp>
@@ -8193,12 +8772,17 @@
           </a:bodyPr>
           <a:lstStyle/>
           <a:p>
+            <a:pPr>
+              <a:defRPr>
+                <a:latin typeface="Roboto"/>
+              </a:defRPr>
+            </a:pPr>
             <a:r>
               <a:rPr sz="1200" b="0">
                 <a:solidFill>
                   <a:srgbClr val="5F6F63"/>
                 </a:solidFill>
-                <a:latin typeface="Arial"/>
+                <a:latin typeface="Roboto"/>
               </a:rPr>
               <a:t>Year to date (Jul to Feb 2026)</a:t>
             </a:r>
@@ -8227,12 +8811,17 @@
           </a:bodyPr>
           <a:lstStyle/>
           <a:p>
+            <a:pPr>
+              <a:defRPr>
+                <a:latin typeface="Roboto"/>
+              </a:defRPr>
+            </a:pPr>
             <a:r>
               <a:rPr sz="3000" b="1">
                 <a:solidFill>
                   <a:srgbClr val="2F7A5D"/>
                 </a:solidFill>
-                <a:latin typeface="Arial"/>
+                <a:latin typeface="Roboto"/>
               </a:rPr>
               <a:t>41¢</a:t>
             </a:r>
@@ -8261,12 +8850,17 @@
           </a:bodyPr>
           <a:lstStyle/>
           <a:p>
+            <a:pPr>
+              <a:defRPr>
+                <a:latin typeface="Roboto"/>
+              </a:defRPr>
+            </a:pPr>
             <a:r>
               <a:rPr sz="1100" b="0">
                 <a:solidFill>
                   <a:srgbClr val="5F6F63"/>
                 </a:solidFill>
-                <a:latin typeface="Arial"/>
+                <a:latin typeface="Roboto"/>
               </a:rPr>
               <a:t>same period last year: not in the data</a:t>
             </a:r>
@@ -8295,12 +8889,17 @@
           </a:bodyPr>
           <a:lstStyle/>
           <a:p>
+            <a:pPr>
+              <a:defRPr>
+                <a:latin typeface="Roboto"/>
+              </a:defRPr>
+            </a:pPr>
             <a:r>
               <a:rPr sz="900" b="0">
                 <a:solidFill>
                   <a:srgbClr val="5F6F63"/>
                 </a:solidFill>
-                <a:latin typeface="Arial"/>
+                <a:latin typeface="Roboto"/>
               </a:rPr>
               <a:t>cost-to-raise.pptx</a:t>
             </a:r>
@@ -8329,13 +8928,17 @@
           </a:bodyPr>
           <a:lstStyle/>
           <a:p>
-            <a:pPr algn="ctr"/>
+            <a:pPr algn="ctr">
+              <a:defRPr>
+                <a:latin typeface="Roboto"/>
+              </a:defRPr>
+            </a:pPr>
             <a:r>
               <a:rPr sz="900" b="0">
                 <a:solidFill>
                   <a:srgbClr val="5F6F63"/>
                 </a:solidFill>
-                <a:latin typeface="Arial"/>
+                <a:latin typeface="Roboto"/>
               </a:rPr>
               <a:t>Data retrieved 2pm, Tue 6 Oct 2026 · Sample data</a:t>
             </a:r>
@@ -8364,13 +8967,17 @@
           </a:bodyPr>
           <a:lstStyle/>
           <a:p>
-            <a:pPr algn="r"/>
+            <a:pPr algn="r">
+              <a:defRPr>
+                <a:latin typeface="Roboto"/>
+              </a:defRPr>
+            </a:pPr>
             <a:r>
               <a:rPr sz="900" b="0">
                 <a:solidFill>
                   <a:srgbClr val="5F6F63"/>
                 </a:solidFill>
-                <a:latin typeface="Arial"/>
+                <a:latin typeface="Roboto"/>
               </a:rPr>
               <a:t>Slide 9 of 11</a:t>
             </a:r>

--- a/media/exports/reports/2026-02/cost-to-raise.pptx
+++ b/media/exports/reports/2026-02/cost-to-raise.pptx
@@ -6,16 +6,10 @@
   </p:sldMasterIdLst>
   <p:sldIdLst>
     <p:sldId id="256" r:id="rId7"/>
-    <p:sldId id="257" r:id="rId8"/>
-    <p:sldId id="258" r:id="rId9"/>
-    <p:sldId id="259" r:id="rId10"/>
-    <p:sldId id="260" r:id="rId11"/>
-    <p:sldId id="261" r:id="rId12"/>
-    <p:sldId id="262" r:id="rId13"/>
-    <p:sldId id="263" r:id="rId14"/>
-    <p:sldId id="264" r:id="rId15"/>
-    <p:sldId id="265" r:id="rId16"/>
-    <p:sldId id="266" r:id="rId17"/>
+    <p:sldId id="257" r:id="rId9"/>
+    <p:sldId id="258" r:id="rId10"/>
+    <p:sldId id="259" r:id="rId11"/>
+    <p:sldId id="260" r:id="rId12"/>
   </p:sldIdLst>
   <p:sldSz cx="12191695" cy="6858000" type="screen4x3"/>
   <p:notesSz cx="6858000" cy="9144000"/>
@@ -121,8 +115,19 @@
 <c:chartSpace xmlns:c="http://schemas.openxmlformats.org/drawingml/2006/chart" xmlns:a="http://schemas.openxmlformats.org/drawingml/2006/main" xmlns:r="http://schemas.openxmlformats.org/officeDocument/2006/relationships">
   <c:date1904 val="0"/>
   <c:chart>
-    <c:autoTitleDeleted val="0"/>
+    <c:autoTitleDeleted val="1"/>
     <c:plotArea>
+      <c:layout>
+        <c:manualLayout>
+          <c:layoutTarget val="inner"/>
+          <c:xMode val="edge"/>
+          <c:yMode val="edge"/>
+          <c:x val="0.3"/>
+          <c:y val="0.03"/>
+          <c:w val="0.58"/>
+          <c:h val="0.88"/>
+        </c:manualLayout>
+      </c:layout>
       <c:barChart>
         <c:barDir val="bar"/>
         <c:grouping val="clustered"/>
@@ -135,7 +140,7 @@
               <c:strCache>
                 <c:ptCount val="1"/>
                 <c:pt idx="0">
-                  <c:v>Value</c:v>
+                  <c:v>Cost to raise a dollar</c:v>
                 </c:pt>
               </c:strCache>
             </c:strRef>
@@ -193,7 +198,7 @@
             <a:lstStyle/>
             <a:p>
               <a:pPr>
-                <a:defRPr sz="1100"/>
+                <a:defRPr sz="1000"/>
               </a:pPr>
             </a:p>
           </c:txPr>
@@ -230,7 +235,7 @@
           <a:lstStyle/>
           <a:p>
             <a:pPr>
-              <a:defRPr sz="1200"/>
+              <a:defRPr sz="1100"/>
             </a:pPr>
           </a:p>
         </c:txPr>
@@ -243,7 +248,10 @@
       </c:catAx>
       <c:valAx>
         <c:axId val="-2113994440"/>
-        <c:scaling/>
+        <c:scaling>
+          <c:max val="14.95"/>
+          <c:min val="0.0"/>
+        </c:scaling>
         <c:delete/>
         <c:axPos val="b"/>
         <c:majorTickMark val="out"/>
@@ -278,9 +286,19 @@
   <c:date1904 val="0"/>
   <c:roundedCorners val="0"/>
   <c:chart>
-    <c:autoTitleDeleted val="0"/>
+    <c:autoTitleDeleted val="1"/>
     <c:plotArea>
-      <c:layout/>
+      <c:layout>
+        <c:manualLayout>
+          <c:layoutTarget val="inner"/>
+          <c:xMode val="edge"/>
+          <c:yMode val="edge"/>
+          <c:x val="0.11"/>
+          <c:y val="0.05"/>
+          <c:w val="0.86"/>
+          <c:h val="0.8"/>
+        </c:manualLayout>
+      </c:layout>
       <c:areaChart>
         <c:grouping val="standard"/>
         <c:varyColors val="0"/>
@@ -293,7 +311,7 @@
               <c:strCache>
                 <c:ptCount val="1"/>
                 <c:pt idx="0">
-                  <c:v>Value</c:v>
+                  <c:v>Cents per $1</c:v>
                 </c:pt>
               </c:strCache>
             </c:strRef>
@@ -376,16 +394,16 @@
                 <c:formatCode>0"¢";[Red](0"¢")</c:formatCode>
                 <c:ptCount val="17"/>
                 <c:pt idx="0">
-                  <c:v>21</c:v>
+                  <c:v>24</c:v>
                 </c:pt>
                 <c:pt idx="1">
-                  <c:v>19</c:v>
+                  <c:v>20</c:v>
                 </c:pt>
                 <c:pt idx="2">
                   <c:v>22</c:v>
                 </c:pt>
                 <c:pt idx="3">
-                  <c:v>12</c:v>
+                  <c:v>10</c:v>
                 </c:pt>
                 <c:pt idx="4">
                   <c:v>11</c:v>
@@ -400,28 +418,28 @@
                   <c:v>11</c:v>
                 </c:pt>
                 <c:pt idx="8">
-                  <c:v>13</c:v>
+                  <c:v>12</c:v>
                 </c:pt>
                 <c:pt idx="9">
-                  <c:v>13</c:v>
+                  <c:v>12</c:v>
                 </c:pt>
                 <c:pt idx="10">
                   <c:v>12</c:v>
                 </c:pt>
                 <c:pt idx="11">
-                  <c:v>21</c:v>
+                  <c:v>11</c:v>
                 </c:pt>
                 <c:pt idx="12">
-                  <c:v>11</c:v>
+                  <c:v>10</c:v>
                 </c:pt>
                 <c:pt idx="13">
-                  <c:v>11</c:v>
+                  <c:v>10</c:v>
                 </c:pt>
                 <c:pt idx="14">
-                  <c:v>14</c:v>
+                  <c:v>10</c:v>
                 </c:pt>
                 <c:pt idx="15">
-                  <c:v>13</c:v>
+                  <c:v>12</c:v>
                 </c:pt>
                 <c:pt idx="16">
                   <c:v>13</c:v>
@@ -466,12 +484,15 @@
         <c:auto val="1"/>
         <c:lblAlgn val="ctr"/>
         <c:lblOffset val="100"/>
+        <c:tickLblSkip val="2"/>
         <c:noMultiLvlLbl val="0"/>
       </c:catAx>
       <c:valAx>
         <c:axId val="-2100718248"/>
         <c:scaling>
           <c:orientation val="minMax"/>
+          <c:max val="25.0"/>
+          <c:min val="0.0"/>
         </c:scaling>
         <c:delete val="0"/>
         <c:axPos val="l"/>
@@ -505,6 +526,7 @@
         <c:crossAx val="-2101159928"/>
         <c:crosses val="autoZero"/>
         <c:crossBetween val="midCat"/>
+        <c:majorUnit val="5.0"/>
       </c:valAx>
     </c:plotArea>
     <c:plotVisOnly val="1"/>
@@ -527,6 +549,1162 @@
     <c:autoUpdate val="0"/>
   </c:externalData>
 </c:chartSpace>
+</file>
+
+<file path=ppt/charts/chart3.xml><?xml version="1.0" encoding="utf-8"?>
+<c:chartSpace xmlns:c="http://schemas.openxmlformats.org/drawingml/2006/chart" xmlns:a="http://schemas.openxmlformats.org/drawingml/2006/main" xmlns:r="http://schemas.openxmlformats.org/officeDocument/2006/relationships">
+  <c:date1904 val="0"/>
+  <c:roundedCorners val="0"/>
+  <c:chart>
+    <c:autoTitleDeleted val="1"/>
+    <c:plotArea>
+      <c:layout>
+        <c:manualLayout>
+          <c:layoutTarget val="inner"/>
+          <c:xMode val="edge"/>
+          <c:yMode val="edge"/>
+          <c:x val="0.11"/>
+          <c:y val="0.05"/>
+          <c:w val="0.86"/>
+          <c:h val="0.8"/>
+        </c:manualLayout>
+      </c:layout>
+      <c:areaChart>
+        <c:grouping val="standard"/>
+        <c:varyColors val="0"/>
+        <c:ser>
+          <c:idx val="0"/>
+          <c:order val="0"/>
+          <c:tx>
+            <c:strRef>
+              <c:f>Sheet1!$B$1</c:f>
+              <c:strCache>
+                <c:ptCount val="1"/>
+                <c:pt idx="0">
+                  <c:v>Cents per $1</c:v>
+                </c:pt>
+              </c:strCache>
+            </c:strRef>
+          </c:tx>
+          <c:spPr>
+            <a:solidFill>
+              <a:srgbClr val="0E9F6E">
+                <a:alpha val="25000"/>
+              </a:srgbClr>
+            </a:solidFill>
+            <a:ln w="31750">
+              <a:solidFill>
+                <a:srgbClr val="0E9F6E"/>
+              </a:solidFill>
+            </a:ln>
+          </c:spPr>
+          <c:cat>
+            <c:strRef>
+              <c:f>Sheet1!$A$2:$A$18</c:f>
+              <c:strCache>
+                <c:ptCount val="17"/>
+                <c:pt idx="0">
+                  <c:v>Oct 24</c:v>
+                </c:pt>
+                <c:pt idx="1">
+                  <c:v>Nov 24</c:v>
+                </c:pt>
+                <c:pt idx="2">
+                  <c:v>Dec 24</c:v>
+                </c:pt>
+                <c:pt idx="3">
+                  <c:v>Jan 25</c:v>
+                </c:pt>
+                <c:pt idx="4">
+                  <c:v>Feb 25</c:v>
+                </c:pt>
+                <c:pt idx="5">
+                  <c:v>Mar 25</c:v>
+                </c:pt>
+                <c:pt idx="6">
+                  <c:v>Apr 25</c:v>
+                </c:pt>
+                <c:pt idx="7">
+                  <c:v>May 25</c:v>
+                </c:pt>
+                <c:pt idx="8">
+                  <c:v>Jun 25</c:v>
+                </c:pt>
+                <c:pt idx="9">
+                  <c:v>Jul 25</c:v>
+                </c:pt>
+                <c:pt idx="10">
+                  <c:v>Aug 25</c:v>
+                </c:pt>
+                <c:pt idx="11">
+                  <c:v>Sep 25</c:v>
+                </c:pt>
+                <c:pt idx="12">
+                  <c:v>Oct 25</c:v>
+                </c:pt>
+                <c:pt idx="13">
+                  <c:v>Nov 25</c:v>
+                </c:pt>
+                <c:pt idx="14">
+                  <c:v>Dec 25</c:v>
+                </c:pt>
+                <c:pt idx="15">
+                  <c:v>Jan 26</c:v>
+                </c:pt>
+                <c:pt idx="16">
+                  <c:v>Feb 26</c:v>
+                </c:pt>
+              </c:strCache>
+            </c:strRef>
+          </c:cat>
+          <c:val>
+            <c:numRef>
+              <c:f>Sheet1!$B$2:$B$18</c:f>
+              <c:numCache>
+                <c:formatCode>0"¢";[Red](0"¢")</c:formatCode>
+                <c:ptCount val="17"/>
+                <c:pt idx="0">
+                  <c:v>14</c:v>
+                </c:pt>
+                <c:pt idx="1">
+                  <c:v>18</c:v>
+                </c:pt>
+                <c:pt idx="2">
+                  <c:v>18</c:v>
+                </c:pt>
+                <c:pt idx="3">
+                  <c:v>18</c:v>
+                </c:pt>
+                <c:pt idx="4">
+                  <c:v>14</c:v>
+                </c:pt>
+                <c:pt idx="5">
+                  <c:v>14</c:v>
+                </c:pt>
+                <c:pt idx="6">
+                  <c:v>14</c:v>
+                </c:pt>
+                <c:pt idx="7">
+                  <c:v>14</c:v>
+                </c:pt>
+                <c:pt idx="8">
+                  <c:v>14</c:v>
+                </c:pt>
+                <c:pt idx="9">
+                  <c:v>16</c:v>
+                </c:pt>
+                <c:pt idx="10">
+                  <c:v>14</c:v>
+                </c:pt>
+                <c:pt idx="11">
+                  <c:v>14</c:v>
+                </c:pt>
+                <c:pt idx="12">
+                  <c:v>14</c:v>
+                </c:pt>
+                <c:pt idx="13">
+                  <c:v>17</c:v>
+                </c:pt>
+                <c:pt idx="14">
+                  <c:v>17</c:v>
+                </c:pt>
+                <c:pt idx="15">
+                  <c:v>17</c:v>
+                </c:pt>
+                <c:pt idx="16">
+                  <c:v>13</c:v>
+                </c:pt>
+              </c:numCache>
+            </c:numRef>
+          </c:val>
+        </c:ser>
+        <c:dLbls>
+          <c:showLegendKey val="0"/>
+          <c:showVal val="0"/>
+          <c:showCatName val="0"/>
+          <c:showSerName val="0"/>
+          <c:showPercent val="0"/>
+          <c:showBubbleSize val="0"/>
+        </c:dLbls>
+        <c:axId val="-2101159928"/>
+        <c:axId val="-2100718248"/>
+      </c:areaChart>
+      <c:catAx>
+        <c:axId val="-2101159928"/>
+        <c:scaling>
+          <c:orientation val="minMax"/>
+        </c:scaling>
+        <c:delete val="0"/>
+        <c:axPos val="b"/>
+        <c:numFmt formatCode="General" sourceLinked="1"/>
+        <c:majorTickMark val="out"/>
+        <c:minorTickMark val="none"/>
+        <c:tickLblPos val="nextTo"/>
+        <c:txPr>
+          <a:bodyPr/>
+          <a:lstStyle/>
+          <a:p>
+            <a:pPr>
+              <a:defRPr sz="1000"/>
+            </a:pPr>
+          </a:p>
+        </c:txPr>
+        <c:crossAx val="-2100718248"/>
+        <c:crosses val="autoZero"/>
+        <c:auto val="1"/>
+        <c:lblAlgn val="ctr"/>
+        <c:lblOffset val="100"/>
+        <c:tickLblSkip val="2"/>
+        <c:noMultiLvlLbl val="0"/>
+      </c:catAx>
+      <c:valAx>
+        <c:axId val="-2100718248"/>
+        <c:scaling>
+          <c:orientation val="minMax"/>
+          <c:max val="20.0"/>
+          <c:min val="0.0"/>
+        </c:scaling>
+        <c:delete val="0"/>
+        <c:axPos val="l"/>
+        <c:majorGridlines>
+          <c:spPr>
+            <a:ln>
+              <a:solidFill>
+                <a:srgbClr val="E6EAE7"/>
+              </a:solidFill>
+            </a:ln>
+          </c:spPr>
+        </c:majorGridlines>
+        <c:numFmt formatCode="0&quot;¢&quot;;[Red](0&quot;¢&quot;)" sourceLinked="0"/>
+        <c:majorTickMark val="out"/>
+        <c:minorTickMark val="none"/>
+        <c:tickLblPos val="nextTo"/>
+        <c:spPr>
+          <a:ln>
+            <a:noFill/>
+          </a:ln>
+        </c:spPr>
+        <c:txPr>
+          <a:bodyPr/>
+          <a:lstStyle/>
+          <a:p>
+            <a:pPr>
+              <a:defRPr sz="1000"/>
+            </a:pPr>
+          </a:p>
+        </c:txPr>
+        <c:crossAx val="-2101159928"/>
+        <c:crosses val="autoZero"/>
+        <c:crossBetween val="midCat"/>
+        <c:majorUnit val="5.0"/>
+      </c:valAx>
+    </c:plotArea>
+    <c:plotVisOnly val="1"/>
+    <c:dispBlanksAs val="zero"/>
+    <c:showDLblsOverMax val="0"/>
+  </c:chart>
+  <c:txPr>
+    <a:bodyPr/>
+    <a:lstStyle/>
+    <a:p>
+      <a:pPr>
+        <a:defRPr sz="1800">
+          <a:latin typeface="Roboto"/>
+        </a:defRPr>
+      </a:pPr>
+      <a:endParaRPr/>
+    </a:p>
+  </c:txPr>
+  <c:externalData r:id="rId1">
+    <c:autoUpdate val="0"/>
+  </c:externalData>
+</c:chartSpace>
+</file>
+
+<file path=ppt/charts/chart4.xml><?xml version="1.0" encoding="utf-8"?>
+<c:chartSpace xmlns:c="http://schemas.openxmlformats.org/drawingml/2006/chart" xmlns:a="http://schemas.openxmlformats.org/drawingml/2006/main" xmlns:r="http://schemas.openxmlformats.org/officeDocument/2006/relationships">
+  <c:date1904 val="0"/>
+  <c:roundedCorners val="0"/>
+  <c:chart>
+    <c:autoTitleDeleted val="1"/>
+    <c:plotArea>
+      <c:layout>
+        <c:manualLayout>
+          <c:layoutTarget val="inner"/>
+          <c:xMode val="edge"/>
+          <c:yMode val="edge"/>
+          <c:x val="0.11"/>
+          <c:y val="0.05"/>
+          <c:w val="0.86"/>
+          <c:h val="0.8"/>
+        </c:manualLayout>
+      </c:layout>
+      <c:areaChart>
+        <c:grouping val="standard"/>
+        <c:varyColors val="0"/>
+        <c:ser>
+          <c:idx val="0"/>
+          <c:order val="0"/>
+          <c:tx>
+            <c:strRef>
+              <c:f>Sheet1!$B$1</c:f>
+              <c:strCache>
+                <c:ptCount val="1"/>
+                <c:pt idx="0">
+                  <c:v>Cents per $1</c:v>
+                </c:pt>
+              </c:strCache>
+            </c:strRef>
+          </c:tx>
+          <c:spPr>
+            <a:solidFill>
+              <a:srgbClr val="0E9F6E">
+                <a:alpha val="25000"/>
+              </a:srgbClr>
+            </a:solidFill>
+            <a:ln w="31750">
+              <a:solidFill>
+                <a:srgbClr val="0E9F6E"/>
+              </a:solidFill>
+            </a:ln>
+          </c:spPr>
+          <c:cat>
+            <c:strRef>
+              <c:f>Sheet1!$A$2:$A$4</c:f>
+              <c:strCache>
+                <c:ptCount val="3"/>
+                <c:pt idx="0">
+                  <c:v>Dec 24</c:v>
+                </c:pt>
+                <c:pt idx="1">
+                  <c:v>Sep 25</c:v>
+                </c:pt>
+                <c:pt idx="2">
+                  <c:v>Dec 25</c:v>
+                </c:pt>
+              </c:strCache>
+            </c:strRef>
+          </c:cat>
+          <c:val>
+            <c:numRef>
+              <c:f>Sheet1!$B$2:$B$4</c:f>
+              <c:numCache>
+                <c:formatCode>0"¢";[Red](0"¢")</c:formatCode>
+                <c:ptCount val="3"/>
+                <c:pt idx="0">
+                  <c:v>42</c:v>
+                </c:pt>
+                <c:pt idx="1">
+                  <c:v>41</c:v>
+                </c:pt>
+                <c:pt idx="2">
+                  <c:v>42</c:v>
+                </c:pt>
+              </c:numCache>
+            </c:numRef>
+          </c:val>
+        </c:ser>
+        <c:dLbls>
+          <c:showLegendKey val="0"/>
+          <c:showVal val="0"/>
+          <c:showCatName val="0"/>
+          <c:showSerName val="0"/>
+          <c:showPercent val="0"/>
+          <c:showBubbleSize val="0"/>
+        </c:dLbls>
+        <c:axId val="-2101159928"/>
+        <c:axId val="-2100718248"/>
+      </c:areaChart>
+      <c:catAx>
+        <c:axId val="-2101159928"/>
+        <c:scaling>
+          <c:orientation val="minMax"/>
+        </c:scaling>
+        <c:delete val="0"/>
+        <c:axPos val="b"/>
+        <c:numFmt formatCode="General" sourceLinked="1"/>
+        <c:majorTickMark val="out"/>
+        <c:minorTickMark val="none"/>
+        <c:tickLblPos val="nextTo"/>
+        <c:txPr>
+          <a:bodyPr/>
+          <a:lstStyle/>
+          <a:p>
+            <a:pPr>
+              <a:defRPr sz="1000"/>
+            </a:pPr>
+          </a:p>
+        </c:txPr>
+        <c:crossAx val="-2100718248"/>
+        <c:crosses val="autoZero"/>
+        <c:auto val="1"/>
+        <c:lblAlgn val="ctr"/>
+        <c:lblOffset val="100"/>
+        <c:tickLblSkip val="1"/>
+        <c:noMultiLvlLbl val="0"/>
+      </c:catAx>
+      <c:valAx>
+        <c:axId val="-2100718248"/>
+        <c:scaling>
+          <c:orientation val="minMax"/>
+          <c:max val="50.0"/>
+          <c:min val="0.0"/>
+        </c:scaling>
+        <c:delete val="0"/>
+        <c:axPos val="l"/>
+        <c:majorGridlines>
+          <c:spPr>
+            <a:ln>
+              <a:solidFill>
+                <a:srgbClr val="E6EAE7"/>
+              </a:solidFill>
+            </a:ln>
+          </c:spPr>
+        </c:majorGridlines>
+        <c:numFmt formatCode="0&quot;¢&quot;;[Red](0&quot;¢&quot;)" sourceLinked="0"/>
+        <c:majorTickMark val="out"/>
+        <c:minorTickMark val="none"/>
+        <c:tickLblPos val="nextTo"/>
+        <c:spPr>
+          <a:ln>
+            <a:noFill/>
+          </a:ln>
+        </c:spPr>
+        <c:txPr>
+          <a:bodyPr/>
+          <a:lstStyle/>
+          <a:p>
+            <a:pPr>
+              <a:defRPr sz="1000"/>
+            </a:pPr>
+          </a:p>
+        </c:txPr>
+        <c:crossAx val="-2101159928"/>
+        <c:crosses val="autoZero"/>
+        <c:crossBetween val="midCat"/>
+        <c:majorUnit val="10.0"/>
+      </c:valAx>
+    </c:plotArea>
+    <c:plotVisOnly val="1"/>
+    <c:dispBlanksAs val="zero"/>
+    <c:showDLblsOverMax val="0"/>
+  </c:chart>
+  <c:txPr>
+    <a:bodyPr/>
+    <a:lstStyle/>
+    <a:p>
+      <a:pPr>
+        <a:defRPr sz="1800">
+          <a:latin typeface="Roboto"/>
+        </a:defRPr>
+      </a:pPr>
+      <a:endParaRPr/>
+    </a:p>
+  </c:txPr>
+  <c:externalData r:id="rId1">
+    <c:autoUpdate val="0"/>
+  </c:externalData>
+</c:chartSpace>
+</file>
+
+<file path=ppt/notesMasters/notesMaster1.xml><?xml version="1.0" encoding="utf-8"?>
+<p:notesMaster xmlns:a="http://schemas.openxmlformats.org/drawingml/2006/main" xmlns:p="http://schemas.openxmlformats.org/presentationml/2006/main" xmlns:r="http://schemas.openxmlformats.org/officeDocument/2006/relationships">
+  <p:cSld>
+    <p:bg>
+      <p:bgRef idx="1001">
+        <a:schemeClr val="bg1"/>
+      </p:bgRef>
+    </p:bg>
+    <p:spTree>
+      <p:nvGrpSpPr>
+        <p:cNvPr id="1" name=""/>
+        <p:cNvGrpSpPr/>
+        <p:nvPr/>
+      </p:nvGrpSpPr>
+      <p:grpSpPr>
+        <a:xfrm>
+          <a:off x="0" y="0"/>
+          <a:ext cx="0" cy="0"/>
+          <a:chOff x="0" y="0"/>
+          <a:chExt cx="0" cy="0"/>
+        </a:xfrm>
+      </p:grpSpPr>
+      <p:sp>
+        <p:nvSpPr>
+          <p:cNvPr id="2" name="Header Placeholder 1"/>
+          <p:cNvSpPr>
+            <a:spLocks noGrp="1"/>
+          </p:cNvSpPr>
+          <p:nvPr>
+            <p:ph type="hdr" sz="quarter"/>
+          </p:nvPr>
+        </p:nvSpPr>
+        <p:spPr>
+          <a:xfrm>
+            <a:off x="0" y="0"/>
+            <a:ext cx="2971800" cy="457200"/>
+          </a:xfrm>
+          <a:prstGeom prst="rect">
+            <a:avLst/>
+          </a:prstGeom>
+        </p:spPr>
+        <p:txBody>
+          <a:bodyPr vert="horz" lIns="91440" tIns="45720" rIns="91440" bIns="45720" rtlCol="0"/>
+          <a:lstStyle>
+            <a:lvl1pPr algn="l">
+              <a:defRPr sz="1200"/>
+            </a:lvl1pPr>
+          </a:lstStyle>
+          <a:p>
+            <a:endParaRPr lang="en-US"/>
+          </a:p>
+        </p:txBody>
+      </p:sp>
+      <p:sp>
+        <p:nvSpPr>
+          <p:cNvPr id="3" name="Date Placeholder 2"/>
+          <p:cNvSpPr>
+            <a:spLocks noGrp="1"/>
+          </p:cNvSpPr>
+          <p:nvPr>
+            <p:ph type="dt" idx="1"/>
+          </p:nvPr>
+        </p:nvSpPr>
+        <p:spPr>
+          <a:xfrm>
+            <a:off x="3884613" y="0"/>
+            <a:ext cx="2971800" cy="457200"/>
+          </a:xfrm>
+          <a:prstGeom prst="rect">
+            <a:avLst/>
+          </a:prstGeom>
+        </p:spPr>
+        <p:txBody>
+          <a:bodyPr vert="horz" lIns="91440" tIns="45720" rIns="91440" bIns="45720" rtlCol="0"/>
+          <a:lstStyle>
+            <a:lvl1pPr algn="r">
+              <a:defRPr sz="1200"/>
+            </a:lvl1pPr>
+          </a:lstStyle>
+          <a:p>
+            <a:fld id="{0F89C1C7-3DCD-1040-A9CF-14679D8B5DDD}" type="datetimeFigureOut">
+              <a:rPr lang="en-US" smtClean="0"/>
+              <a:t>10/17/16</a:t>
+            </a:fld>
+            <a:endParaRPr lang="en-US"/>
+          </a:p>
+        </p:txBody>
+      </p:sp>
+      <p:sp>
+        <p:nvSpPr>
+          <p:cNvPr id="4" name="Slide Image Placeholder 3"/>
+          <p:cNvSpPr>
+            <a:spLocks noGrp="1" noRot="1" noChangeAspect="1"/>
+          </p:cNvSpPr>
+          <p:nvPr>
+            <p:ph type="sldImg" idx="2"/>
+          </p:nvPr>
+        </p:nvSpPr>
+        <p:spPr>
+          <a:xfrm>
+            <a:off x="1143000" y="685800"/>
+            <a:ext cx="4572000" cy="3429000"/>
+          </a:xfrm>
+          <a:prstGeom prst="rect">
+            <a:avLst/>
+          </a:prstGeom>
+          <a:noFill/>
+          <a:ln w="12700">
+            <a:solidFill>
+              <a:prstClr val="black"/>
+            </a:solidFill>
+          </a:ln>
+        </p:spPr>
+        <p:txBody>
+          <a:bodyPr vert="horz" lIns="91440" tIns="45720" rIns="91440" bIns="45720" rtlCol="0" anchor="ctr"/>
+          <a:lstStyle/>
+          <a:p>
+            <a:endParaRPr lang="en-US"/>
+          </a:p>
+        </p:txBody>
+      </p:sp>
+      <p:sp>
+        <p:nvSpPr>
+          <p:cNvPr id="5" name="Notes Placeholder 4"/>
+          <p:cNvSpPr>
+            <a:spLocks noGrp="1"/>
+          </p:cNvSpPr>
+          <p:nvPr>
+            <p:ph type="body" sz="quarter" idx="3"/>
+          </p:nvPr>
+        </p:nvSpPr>
+        <p:spPr>
+          <a:xfrm>
+            <a:off x="685800" y="4343400"/>
+            <a:ext cx="5486400" cy="4114800"/>
+          </a:xfrm>
+          <a:prstGeom prst="rect">
+            <a:avLst/>
+          </a:prstGeom>
+        </p:spPr>
+        <p:txBody>
+          <a:bodyPr vert="horz" lIns="91440" tIns="45720" rIns="91440" bIns="45720" rtlCol="0"/>
+          <a:lstStyle/>
+          <a:p>
+            <a:pPr lvl="0"/>
+            <a:r>
+              <a:rPr lang="en-US" smtClean="0"/>
+              <a:t>Click to edit Master text styles</a:t>
+            </a:r>
+          </a:p>
+          <a:p>
+            <a:pPr lvl="1"/>
+            <a:r>
+              <a:rPr lang="en-US" smtClean="0"/>
+              <a:t>Second level</a:t>
+            </a:r>
+          </a:p>
+          <a:p>
+            <a:pPr lvl="2"/>
+            <a:r>
+              <a:rPr lang="en-US" smtClean="0"/>
+              <a:t>Third level</a:t>
+            </a:r>
+          </a:p>
+          <a:p>
+            <a:pPr lvl="3"/>
+            <a:r>
+              <a:rPr lang="en-US" smtClean="0"/>
+              <a:t>Fourth level</a:t>
+            </a:r>
+          </a:p>
+          <a:p>
+            <a:pPr lvl="4"/>
+            <a:r>
+              <a:rPr lang="en-US" smtClean="0"/>
+              <a:t>Fifth level</a:t>
+            </a:r>
+            <a:endParaRPr lang="en-US"/>
+          </a:p>
+        </p:txBody>
+      </p:sp>
+      <p:sp>
+        <p:nvSpPr>
+          <p:cNvPr id="6" name="Footer Placeholder 5"/>
+          <p:cNvSpPr>
+            <a:spLocks noGrp="1"/>
+          </p:cNvSpPr>
+          <p:nvPr>
+            <p:ph type="ftr" sz="quarter" idx="4"/>
+          </p:nvPr>
+        </p:nvSpPr>
+        <p:spPr>
+          <a:xfrm>
+            <a:off x="0" y="8685213"/>
+            <a:ext cx="2971800" cy="457200"/>
+          </a:xfrm>
+          <a:prstGeom prst="rect">
+            <a:avLst/>
+          </a:prstGeom>
+        </p:spPr>
+        <p:txBody>
+          <a:bodyPr vert="horz" lIns="91440" tIns="45720" rIns="91440" bIns="45720" rtlCol="0" anchor="b"/>
+          <a:lstStyle>
+            <a:lvl1pPr algn="l">
+              <a:defRPr sz="1200"/>
+            </a:lvl1pPr>
+          </a:lstStyle>
+          <a:p>
+            <a:endParaRPr lang="en-US"/>
+          </a:p>
+        </p:txBody>
+      </p:sp>
+      <p:sp>
+        <p:nvSpPr>
+          <p:cNvPr id="7" name="Slide Number Placeholder 6"/>
+          <p:cNvSpPr>
+            <a:spLocks noGrp="1"/>
+          </p:cNvSpPr>
+          <p:nvPr>
+            <p:ph type="sldNum" sz="quarter" idx="5"/>
+          </p:nvPr>
+        </p:nvSpPr>
+        <p:spPr>
+          <a:xfrm>
+            <a:off x="3884613" y="8685213"/>
+            <a:ext cx="2971800" cy="457200"/>
+          </a:xfrm>
+          <a:prstGeom prst="rect">
+            <a:avLst/>
+          </a:prstGeom>
+        </p:spPr>
+        <p:txBody>
+          <a:bodyPr vert="horz" lIns="91440" tIns="45720" rIns="91440" bIns="45720" rtlCol="0" anchor="b"/>
+          <a:lstStyle>
+            <a:lvl1pPr algn="r">
+              <a:defRPr sz="1200"/>
+            </a:lvl1pPr>
+          </a:lstStyle>
+          <a:p>
+            <a:fld id="{BB5E49A5-4136-284D-997B-48E1D791AD67}" type="slidenum">
+              <a:rPr lang="en-US" smtClean="0"/>
+              <a:t>‹#›</a:t>
+            </a:fld>
+            <a:endParaRPr lang="en-US"/>
+          </a:p>
+        </p:txBody>
+      </p:sp>
+    </p:spTree>
+    <p:extLst>
+      <p:ext uri="{BB962C8B-B14F-4D97-AF65-F5344CB8AC3E}">
+        <p14:creationId xmlns:p14="http://schemas.microsoft.com/office/powerpoint/2010/main" val="2623252185"/>
+      </p:ext>
+    </p:extLst>
+  </p:cSld>
+  <p:clrMap bg1="lt1" tx1="dk1" bg2="lt2" tx2="dk2" accent1="accent1" accent2="accent2" accent3="accent3" accent4="accent4" accent5="accent5" accent6="accent6" hlink="hlink" folHlink="folHlink"/>
+  <p:notesStyle>
+    <a:lvl1pPr marL="0" algn="l" defTabSz="457200" rtl="0" eaLnBrk="1" latinLnBrk="0" hangingPunct="1">
+      <a:defRPr sz="1200" kern="1200">
+        <a:solidFill>
+          <a:schemeClr val="tx1"/>
+        </a:solidFill>
+        <a:latin typeface="+mn-lt"/>
+        <a:ea typeface="+mn-ea"/>
+        <a:cs typeface="+mn-cs"/>
+      </a:defRPr>
+    </a:lvl1pPr>
+    <a:lvl2pPr marL="457200" algn="l" defTabSz="457200" rtl="0" eaLnBrk="1" latinLnBrk="0" hangingPunct="1">
+      <a:defRPr sz="1200" kern="1200">
+        <a:solidFill>
+          <a:schemeClr val="tx1"/>
+        </a:solidFill>
+        <a:latin typeface="+mn-lt"/>
+        <a:ea typeface="+mn-ea"/>
+        <a:cs typeface="+mn-cs"/>
+      </a:defRPr>
+    </a:lvl2pPr>
+    <a:lvl3pPr marL="914400" algn="l" defTabSz="457200" rtl="0" eaLnBrk="1" latinLnBrk="0" hangingPunct="1">
+      <a:defRPr sz="1200" kern="1200">
+        <a:solidFill>
+          <a:schemeClr val="tx1"/>
+        </a:solidFill>
+        <a:latin typeface="+mn-lt"/>
+        <a:ea typeface="+mn-ea"/>
+        <a:cs typeface="+mn-cs"/>
+      </a:defRPr>
+    </a:lvl3pPr>
+    <a:lvl4pPr marL="1371600" algn="l" defTabSz="457200" rtl="0" eaLnBrk="1" latinLnBrk="0" hangingPunct="1">
+      <a:defRPr sz="1200" kern="1200">
+        <a:solidFill>
+          <a:schemeClr val="tx1"/>
+        </a:solidFill>
+        <a:latin typeface="+mn-lt"/>
+        <a:ea typeface="+mn-ea"/>
+        <a:cs typeface="+mn-cs"/>
+      </a:defRPr>
+    </a:lvl4pPr>
+    <a:lvl5pPr marL="1828800" algn="l" defTabSz="457200" rtl="0" eaLnBrk="1" latinLnBrk="0" hangingPunct="1">
+      <a:defRPr sz="1200" kern="1200">
+        <a:solidFill>
+          <a:schemeClr val="tx1"/>
+        </a:solidFill>
+        <a:latin typeface="+mn-lt"/>
+        <a:ea typeface="+mn-ea"/>
+        <a:cs typeface="+mn-cs"/>
+      </a:defRPr>
+    </a:lvl5pPr>
+    <a:lvl6pPr marL="2286000" algn="l" defTabSz="457200" rtl="0" eaLnBrk="1" latinLnBrk="0" hangingPunct="1">
+      <a:defRPr sz="1200" kern="1200">
+        <a:solidFill>
+          <a:schemeClr val="tx1"/>
+        </a:solidFill>
+        <a:latin typeface="+mn-lt"/>
+        <a:ea typeface="+mn-ea"/>
+        <a:cs typeface="+mn-cs"/>
+      </a:defRPr>
+    </a:lvl6pPr>
+    <a:lvl7pPr marL="2743200" algn="l" defTabSz="457200" rtl="0" eaLnBrk="1" latinLnBrk="0" hangingPunct="1">
+      <a:defRPr sz="1200" kern="1200">
+        <a:solidFill>
+          <a:schemeClr val="tx1"/>
+        </a:solidFill>
+        <a:latin typeface="+mn-lt"/>
+        <a:ea typeface="+mn-ea"/>
+        <a:cs typeface="+mn-cs"/>
+      </a:defRPr>
+    </a:lvl7pPr>
+    <a:lvl8pPr marL="3200400" algn="l" defTabSz="457200" rtl="0" eaLnBrk="1" latinLnBrk="0" hangingPunct="1">
+      <a:defRPr sz="1200" kern="1200">
+        <a:solidFill>
+          <a:schemeClr val="tx1"/>
+        </a:solidFill>
+        <a:latin typeface="+mn-lt"/>
+        <a:ea typeface="+mn-ea"/>
+        <a:cs typeface="+mn-cs"/>
+      </a:defRPr>
+    </a:lvl8pPr>
+    <a:lvl9pPr marL="3657600" algn="l" defTabSz="457200" rtl="0" eaLnBrk="1" latinLnBrk="0" hangingPunct="1">
+      <a:defRPr sz="1200" kern="1200">
+        <a:solidFill>
+          <a:schemeClr val="tx1"/>
+        </a:solidFill>
+        <a:latin typeface="+mn-lt"/>
+        <a:ea typeface="+mn-ea"/>
+        <a:cs typeface="+mn-cs"/>
+      </a:defRPr>
+    </a:lvl9pPr>
+  </p:notesStyle>
+</p:notesMaster>
+</file>
+
+<file path=ppt/notesSlides/notesSlide1.xml><?xml version="1.0" encoding="utf-8"?>
+<p:notes xmlns:a="http://schemas.openxmlformats.org/drawingml/2006/main" xmlns:p="http://schemas.openxmlformats.org/presentationml/2006/main" xmlns:r="http://schemas.openxmlformats.org/officeDocument/2006/relationships">
+  <p:cSld>
+    <p:spTree>
+      <p:nvGrpSpPr>
+        <p:cNvPr id="1" name=""/>
+        <p:cNvGrpSpPr/>
+        <p:nvPr/>
+      </p:nvGrpSpPr>
+      <p:grpSpPr>
+        <a:xfrm>
+          <a:off x="0" y="0"/>
+          <a:ext cx="0" cy="0"/>
+          <a:chOff x="0" y="0"/>
+          <a:chExt cx="0" cy="0"/>
+        </a:xfrm>
+      </p:grpSpPr>
+      <p:sp>
+        <p:nvSpPr>
+          <p:cNvPr id="2" name="Slide Image Placeholder 1"/>
+          <p:cNvSpPr>
+            <a:spLocks noGrp="1"/>
+          </p:cNvSpPr>
+          <p:nvPr>
+            <p:ph type="sldImg" idx="2"/>
+          </p:nvPr>
+        </p:nvSpPr>
+        <p:spPr/>
+      </p:sp>
+      <p:sp>
+        <p:nvSpPr>
+          <p:cNvPr id="3" name="Notes Placeholder 2"/>
+          <p:cNvSpPr>
+            <a:spLocks noGrp="1"/>
+          </p:cNvSpPr>
+          <p:nvPr>
+            <p:ph type="body" idx="3" sz="quarter"/>
+          </p:nvPr>
+        </p:nvSpPr>
+        <p:spPr/>
+        <p:txBody>
+          <a:bodyPr/>
+          <a:lstStyle/>
+          <a:p>
+            <a:r>
+              <a:t>What does it cost to raise a dollar?. Sample Community Services Ltd. Period: February 2026. What fundraising costs (grant writing, donor campaigns, events) for every dollar it brings in. Pick a source and every number, chart and note follows it.</a:t>
+            </a:r>
+          </a:p>
+        </p:txBody>
+      </p:sp>
+      <p:sp>
+        <p:nvSpPr>
+          <p:cNvPr id="4" name="Slide Number Placeholder 3"/>
+          <p:cNvSpPr>
+            <a:spLocks noGrp="1"/>
+          </p:cNvSpPr>
+          <p:nvPr>
+            <p:ph type="sldNum" idx="5" sz="quarter"/>
+          </p:nvPr>
+        </p:nvSpPr>
+        <p:spPr/>
+      </p:sp>
+    </p:spTree>
+  </p:cSld>
+  <p:clrMapOvr>
+    <a:masterClrMapping/>
+  </p:clrMapOvr>
+</p:notes>
+</file>
+
+<file path=ppt/notesSlides/notesSlide2.xml><?xml version="1.0" encoding="utf-8"?>
+<p:notes xmlns:a="http://schemas.openxmlformats.org/drawingml/2006/main" xmlns:p="http://schemas.openxmlformats.org/presentationml/2006/main" xmlns:r="http://schemas.openxmlformats.org/officeDocument/2006/relationships">
+  <p:cSld>
+    <p:spTree>
+      <p:nvGrpSpPr>
+        <p:cNvPr id="1" name=""/>
+        <p:cNvGrpSpPr/>
+        <p:nvPr/>
+      </p:nvGrpSpPr>
+      <p:grpSpPr>
+        <a:xfrm>
+          <a:off x="0" y="0"/>
+          <a:ext cx="0" cy="0"/>
+          <a:chOff x="0" y="0"/>
+          <a:chExt cx="0" cy="0"/>
+        </a:xfrm>
+      </p:grpSpPr>
+      <p:sp>
+        <p:nvSpPr>
+          <p:cNvPr id="2" name="Slide Image Placeholder 1"/>
+          <p:cNvSpPr>
+            <a:spLocks noGrp="1"/>
+          </p:cNvSpPr>
+          <p:nvPr>
+            <p:ph type="sldImg" idx="2"/>
+          </p:nvPr>
+        </p:nvSpPr>
+        <p:spPr/>
+      </p:sp>
+      <p:sp>
+        <p:nvSpPr>
+          <p:cNvPr id="3" name="Notes Placeholder 2"/>
+          <p:cNvSpPr>
+            <a:spLocks noGrp="1"/>
+          </p:cNvSpPr>
+          <p:nvPr>
+            <p:ph type="body" idx="3" sz="quarter"/>
+          </p:nvPr>
+        </p:nvSpPr>
+        <p:spPr/>
+        <p:txBody>
+          <a:bodyPr/>
+          <a:lstStyle/>
+          <a:p>
+            <a:r>
+              <a:t>All fundraising. February · all fundraising: 13¢; Year to date (Jul to Feb 2026): 14¢. February cost 13¢ to raise each dollar, against 13¢ in January. This financial year to date it has cost 14¢ a dollar. The year-to-date figure is steadier than single months: events make some months jump. Pick a source above to see which one moves it.</a:t>
+            </a:r>
+          </a:p>
+        </p:txBody>
+      </p:sp>
+      <p:sp>
+        <p:nvSpPr>
+          <p:cNvPr id="4" name="Slide Number Placeholder 3"/>
+          <p:cNvSpPr>
+            <a:spLocks noGrp="1"/>
+          </p:cNvSpPr>
+          <p:nvPr>
+            <p:ph type="sldNum" idx="5" sz="quarter"/>
+          </p:nvPr>
+        </p:nvSpPr>
+        <p:spPr/>
+      </p:sp>
+    </p:spTree>
+  </p:cSld>
+  <p:clrMapOvr>
+    <a:masterClrMapping/>
+  </p:clrMapOvr>
+</p:notes>
+</file>
+
+<file path=ppt/notesSlides/notesSlide3.xml><?xml version="1.0" encoding="utf-8"?>
+<p:notes xmlns:a="http://schemas.openxmlformats.org/drawingml/2006/main" xmlns:p="http://schemas.openxmlformats.org/presentationml/2006/main" xmlns:r="http://schemas.openxmlformats.org/officeDocument/2006/relationships">
+  <p:cSld>
+    <p:spTree>
+      <p:nvGrpSpPr>
+        <p:cNvPr id="1" name=""/>
+        <p:cNvGrpSpPr/>
+        <p:nvPr/>
+      </p:nvGrpSpPr>
+      <p:grpSpPr>
+        <a:xfrm>
+          <a:off x="0" y="0"/>
+          <a:ext cx="0" cy="0"/>
+          <a:chOff x="0" y="0"/>
+          <a:chExt cx="0" cy="0"/>
+        </a:xfrm>
+      </p:grpSpPr>
+      <p:sp>
+        <p:nvSpPr>
+          <p:cNvPr id="2" name="Slide Image Placeholder 1"/>
+          <p:cNvSpPr>
+            <a:spLocks noGrp="1"/>
+          </p:cNvSpPr>
+          <p:nvPr>
+            <p:ph type="sldImg" idx="2"/>
+          </p:nvPr>
+        </p:nvSpPr>
+        <p:spPr/>
+      </p:sp>
+      <p:sp>
+        <p:nvSpPr>
+          <p:cNvPr id="3" name="Notes Placeholder 2"/>
+          <p:cNvSpPr>
+            <a:spLocks noGrp="1"/>
+          </p:cNvSpPr>
+          <p:nvPr>
+            <p:ph type="body" idx="3" sz="quarter"/>
+          </p:nvPr>
+        </p:nvSpPr>
+        <p:spPr/>
+        <p:txBody>
+          <a:bodyPr/>
+          <a:lstStyle/>
+          <a:p>
+            <a:r>
+              <a:t>Grants. February · Grants: 13¢; Year to date (Jul to Feb 2026): 11¢. Grants cost 11¢ to raise each dollar this financial year to date ($56,800 of grant writing and reporting for $506,430). Usually the cheapest money to raise, as long as the time that goes into applications and acquittals is protected.</a:t>
+            </a:r>
+          </a:p>
+        </p:txBody>
+      </p:sp>
+      <p:sp>
+        <p:nvSpPr>
+          <p:cNvPr id="4" name="Slide Number Placeholder 3"/>
+          <p:cNvSpPr>
+            <a:spLocks noGrp="1"/>
+          </p:cNvSpPr>
+          <p:nvPr>
+            <p:ph type="sldNum" idx="5" sz="quarter"/>
+          </p:nvPr>
+        </p:nvSpPr>
+        <p:spPr/>
+      </p:sp>
+    </p:spTree>
+  </p:cSld>
+  <p:clrMapOvr>
+    <a:masterClrMapping/>
+  </p:clrMapOvr>
+</p:notes>
+</file>
+
+<file path=ppt/notesSlides/notesSlide4.xml><?xml version="1.0" encoding="utf-8"?>
+<p:notes xmlns:a="http://schemas.openxmlformats.org/drawingml/2006/main" xmlns:p="http://schemas.openxmlformats.org/presentationml/2006/main" xmlns:r="http://schemas.openxmlformats.org/officeDocument/2006/relationships">
+  <p:cSld>
+    <p:spTree>
+      <p:nvGrpSpPr>
+        <p:cNvPr id="1" name=""/>
+        <p:cNvGrpSpPr/>
+        <p:nvPr/>
+      </p:nvGrpSpPr>
+      <p:grpSpPr>
+        <a:xfrm>
+          <a:off x="0" y="0"/>
+          <a:ext cx="0" cy="0"/>
+          <a:chOff x="0" y="0"/>
+          <a:chExt cx="0" cy="0"/>
+        </a:xfrm>
+      </p:grpSpPr>
+      <p:sp>
+        <p:nvSpPr>
+          <p:cNvPr id="2" name="Slide Image Placeholder 1"/>
+          <p:cNvSpPr>
+            <a:spLocks noGrp="1"/>
+          </p:cNvSpPr>
+          <p:nvPr>
+            <p:ph type="sldImg" idx="2"/>
+          </p:nvPr>
+        </p:nvSpPr>
+        <p:spPr/>
+      </p:sp>
+      <p:sp>
+        <p:nvSpPr>
+          <p:cNvPr id="3" name="Notes Placeholder 2"/>
+          <p:cNvSpPr>
+            <a:spLocks noGrp="1"/>
+          </p:cNvSpPr>
+          <p:nvPr>
+            <p:ph type="body" idx="3" sz="quarter"/>
+          </p:nvPr>
+        </p:nvSpPr>
+        <p:spPr/>
+        <p:txBody>
+          <a:bodyPr/>
+          <a:lstStyle/>
+          <a:p>
+            <a:r>
+              <a:t>Donations. February · Donations: 13¢; Year to date (Jul to Feb 2026): 15¢. Donations cost 15¢ to raise each dollar this financial year to date ($20,700 of donor campaigns for $136,100). Steady and cheap, and untied: the money that builds reserves.</a:t>
+            </a:r>
+          </a:p>
+        </p:txBody>
+      </p:sp>
+      <p:sp>
+        <p:nvSpPr>
+          <p:cNvPr id="4" name="Slide Number Placeholder 3"/>
+          <p:cNvSpPr>
+            <a:spLocks noGrp="1"/>
+          </p:cNvSpPr>
+          <p:nvPr>
+            <p:ph type="sldNum" idx="5" sz="quarter"/>
+          </p:nvPr>
+        </p:nvSpPr>
+        <p:spPr/>
+      </p:sp>
+    </p:spTree>
+  </p:cSld>
+  <p:clrMapOvr>
+    <a:masterClrMapping/>
+  </p:clrMapOvr>
+</p:notes>
+</file>
+
+<file path=ppt/notesSlides/notesSlide5.xml><?xml version="1.0" encoding="utf-8"?>
+<p:notes xmlns:a="http://schemas.openxmlformats.org/drawingml/2006/main" xmlns:p="http://schemas.openxmlformats.org/presentationml/2006/main" xmlns:r="http://schemas.openxmlformats.org/officeDocument/2006/relationships">
+  <p:cSld>
+    <p:spTree>
+      <p:nvGrpSpPr>
+        <p:cNvPr id="1" name=""/>
+        <p:cNvGrpSpPr/>
+        <p:nvPr/>
+      </p:nvGrpSpPr>
+      <p:grpSpPr>
+        <a:xfrm>
+          <a:off x="0" y="0"/>
+          <a:ext cx="0" cy="0"/>
+          <a:chOff x="0" y="0"/>
+          <a:chExt cx="0" cy="0"/>
+        </a:xfrm>
+      </p:grpSpPr>
+      <p:sp>
+        <p:nvSpPr>
+          <p:cNvPr id="2" name="Slide Image Placeholder 1"/>
+          <p:cNvSpPr>
+            <a:spLocks noGrp="1"/>
+          </p:cNvSpPr>
+          <p:nvPr>
+            <p:ph type="sldImg" idx="2"/>
+          </p:nvPr>
+        </p:nvSpPr>
+        <p:spPr/>
+      </p:sp>
+      <p:sp>
+        <p:nvSpPr>
+          <p:cNvPr id="3" name="Notes Placeholder 2"/>
+          <p:cNvSpPr>
+            <a:spLocks noGrp="1"/>
+          </p:cNvSpPr>
+          <p:nvPr>
+            <p:ph type="body" idx="3" sz="quarter"/>
+          </p:nvPr>
+        </p:nvSpPr>
+        <p:spPr/>
+        <p:txBody>
+          <a:bodyPr/>
+          <a:lstStyle/>
+          <a:p>
+            <a:r>
+              <a:t>Fundraising events. February · Fundraising events: –; Year to date (Jul to Feb 2026): 41¢. Fundraising events cost 41¢ to raise each dollar this financial year to date ($17,800 of event costs for $43,000). Usually the dearest money to raise: events are worth counting for what else they bring too (new donors, profile).</a:t>
+            </a:r>
+          </a:p>
+        </p:txBody>
+      </p:sp>
+      <p:sp>
+        <p:nvSpPr>
+          <p:cNvPr id="4" name="Slide Number Placeholder 3"/>
+          <p:cNvSpPr>
+            <a:spLocks noGrp="1"/>
+          </p:cNvSpPr>
+          <p:nvPr>
+            <p:ph type="sldNum" idx="5" sz="quarter"/>
+          </p:nvPr>
+        </p:nvSpPr>
+        <p:spPr/>
+      </p:sp>
+    </p:spTree>
+  </p:cSld>
+  <p:clrMapOvr>
+    <a:masterClrMapping/>
+  </p:clrMapOvr>
+</p:notes>
 </file>
 
 <file path=ppt/slideLayouts/slideLayout1.xml><?xml version="1.0" encoding="utf-8"?>
@@ -3512,7 +4690,44 @@
       <p:grpSpPr/>
       <p:sp>
         <p:nvSpPr>
-          <p:cNvPr id="2" name="Rectangle 1"/>
+          <p:cNvPr id="2" name="Title 1"/>
+          <p:cNvSpPr>
+            <a:spLocks noGrp="1"/>
+          </p:cNvSpPr>
+          <p:nvPr>
+            <p:ph type="ctrTitle"/>
+          </p:nvPr>
+        </p:nvSpPr>
+        <p:spPr>
+          <a:xfrm>
+            <a:off x="457200" y="1965960"/>
+            <a:ext cx="11277295" cy="1097280"/>
+          </a:xfrm>
+        </p:spPr>
+        <p:txBody>
+          <a:bodyPr wrap="square"/>
+          <a:lstStyle/>
+          <a:p>
+            <a:pPr algn="l">
+              <a:defRPr>
+                <a:latin typeface="Roboto"/>
+              </a:defRPr>
+            </a:pPr>
+            <a:r>
+              <a:rPr sz="3400" b="1">
+                <a:solidFill>
+                  <a:srgbClr val="25342A"/>
+                </a:solidFill>
+                <a:latin typeface="Roboto"/>
+              </a:rPr>
+              <a:t>What does it cost to raise a dollar?</a:t>
+            </a:r>
+          </a:p>
+        </p:txBody>
+      </p:sp>
+      <p:sp>
+        <p:nvSpPr>
+          <p:cNvPr id="3" name="Rectangle 2"/>
           <p:cNvSpPr/>
           <p:nvPr/>
         </p:nvSpPr>
@@ -3568,53 +4783,14 @@
       </p:sp>
       <p:sp>
         <p:nvSpPr>
-          <p:cNvPr id="3" name="TextBox 2"/>
-          <p:cNvSpPr txBox="1"/>
-          <p:nvPr/>
-        </p:nvSpPr>
-        <p:spPr>
-          <a:xfrm>
-            <a:off x="1234440" y="658368"/>
-            <a:ext cx="5486400" cy="457200"/>
-          </a:xfrm>
-          <a:prstGeom prst="rect">
-            <a:avLst/>
-          </a:prstGeom>
-          <a:noFill/>
-        </p:spPr>
-        <p:txBody>
-          <a:bodyPr wrap="square">
-            <a:spAutoFit/>
-          </a:bodyPr>
-          <a:lstStyle/>
-          <a:p>
-            <a:pPr>
-              <a:defRPr>
-                <a:latin typeface="Roboto"/>
-              </a:defRPr>
-            </a:pPr>
-            <a:r>
-              <a:rPr sz="1800" b="1">
-                <a:solidFill>
-                  <a:srgbClr val="25342A"/>
-                </a:solidFill>
-                <a:latin typeface="Roboto"/>
-              </a:rPr>
-              <a:t>The Fourth Sheet</a:t>
-            </a:r>
-          </a:p>
-        </p:txBody>
-      </p:sp>
-      <p:sp>
-        <p:nvSpPr>
           <p:cNvPr id="4" name="TextBox 3"/>
           <p:cNvSpPr txBox="1"/>
           <p:nvPr/>
         </p:nvSpPr>
         <p:spPr>
           <a:xfrm>
-            <a:off x="457200" y="1554480"/>
-            <a:ext cx="10972800" cy="365760"/>
+            <a:off x="1234440" y="658368"/>
+            <a:ext cx="5486400" cy="457200"/>
           </a:xfrm>
           <a:prstGeom prst="rect">
             <a:avLst/>
@@ -3622,7 +4798,7 @@
           <a:noFill/>
         </p:spPr>
         <p:txBody>
-          <a:bodyPr wrap="square">
+          <a:bodyPr wrap="square" lIns="45720" rIns="45720">
             <a:spAutoFit/>
           </a:bodyPr>
           <a:lstStyle/>
@@ -3633,13 +4809,13 @@
               </a:defRPr>
             </a:pPr>
             <a:r>
-              <a:rPr sz="1100" b="1">
-                <a:solidFill>
-                  <a:srgbClr val="8A7A52"/>
+              <a:rPr sz="1800" b="1">
+                <a:solidFill>
+                  <a:srgbClr val="25342A"/>
                 </a:solidFill>
                 <a:latin typeface="Roboto"/>
               </a:rPr>
-              <a:t>SAMPLE DATA · invented figures for demonstration</a:t>
+              <a:t>The Fourth Sheet</a:t>
             </a:r>
           </a:p>
         </p:txBody>
@@ -3652,8 +4828,8 @@
         </p:nvSpPr>
         <p:spPr>
           <a:xfrm>
-            <a:off x="457200" y="2011680"/>
-            <a:ext cx="11247120" cy="1097280"/>
+            <a:off x="457200" y="1554480"/>
+            <a:ext cx="10972800" cy="365760"/>
           </a:xfrm>
           <a:prstGeom prst="rect">
             <a:avLst/>
@@ -3661,7 +4837,7 @@
           <a:noFill/>
         </p:spPr>
         <p:txBody>
-          <a:bodyPr wrap="square">
+          <a:bodyPr wrap="square" lIns="45720" rIns="45720">
             <a:spAutoFit/>
           </a:bodyPr>
           <a:lstStyle/>
@@ -3672,13 +4848,13 @@
               </a:defRPr>
             </a:pPr>
             <a:r>
-              <a:rPr sz="3400" b="1">
-                <a:solidFill>
-                  <a:srgbClr val="25342A"/>
+              <a:rPr sz="1100" b="1">
+                <a:solidFill>
+                  <a:srgbClr val="8A7A52"/>
                 </a:solidFill>
                 <a:latin typeface="Roboto"/>
               </a:rPr>
-              <a:t>What does it cost to raise a dollar?</a:t>
+              <a:t>SAMPLE DATA · invented figures for demonstration</a:t>
             </a:r>
           </a:p>
         </p:txBody>
@@ -3692,7 +4868,7 @@
         <p:spPr>
           <a:xfrm>
             <a:off x="457200" y="3154680"/>
-            <a:ext cx="11247120" cy="457200"/>
+            <a:ext cx="11277295" cy="457200"/>
           </a:xfrm>
           <a:prstGeom prst="rect">
             <a:avLst/>
@@ -3700,7 +4876,7 @@
           <a:noFill/>
         </p:spPr>
         <p:txBody>
-          <a:bodyPr wrap="square">
+          <a:bodyPr wrap="square" lIns="45720" rIns="45720">
             <a:spAutoFit/>
           </a:bodyPr>
           <a:lstStyle/>
@@ -3731,7 +4907,7 @@
         <p:spPr>
           <a:xfrm>
             <a:off x="457200" y="3703320"/>
-            <a:ext cx="11247120" cy="1097280"/>
+            <a:ext cx="11277295" cy="535940"/>
           </a:xfrm>
           <a:prstGeom prst="rect">
             <a:avLst/>
@@ -3739,7 +4915,7 @@
           <a:noFill/>
         </p:spPr>
         <p:txBody>
-          <a:bodyPr wrap="square">
+          <a:bodyPr wrap="square" lIns="45720" rIns="45720">
             <a:spAutoFit/>
           </a:bodyPr>
           <a:lstStyle/>
@@ -3769,8 +4945,8 @@
         </p:nvSpPr>
         <p:spPr>
           <a:xfrm>
-            <a:off x="457200" y="4937760"/>
-            <a:ext cx="11247120" cy="1097280"/>
+            <a:off x="457200" y="4330700"/>
+            <a:ext cx="11277295" cy="1097280"/>
           </a:xfrm>
           <a:prstGeom prst="rect">
             <a:avLst/>
@@ -3778,7 +4954,7 @@
           <a:noFill/>
         </p:spPr>
         <p:txBody>
-          <a:bodyPr wrap="square">
+          <a:bodyPr wrap="square" lIns="45720" rIns="45720">
             <a:spAutoFit/>
           </a:bodyPr>
           <a:lstStyle/>
@@ -3857,7 +5033,7 @@
         <p:spPr>
           <a:xfrm>
             <a:off x="457200" y="6492240"/>
-            <a:ext cx="3657600" cy="274320"/>
+            <a:ext cx="2926080" cy="274320"/>
           </a:xfrm>
           <a:prstGeom prst="rect">
             <a:avLst/>
@@ -3865,7 +5041,7 @@
           <a:noFill/>
         </p:spPr>
         <p:txBody>
-          <a:bodyPr wrap="square">
+          <a:bodyPr wrap="square" lIns="45720" rIns="45720">
             <a:spAutoFit/>
           </a:bodyPr>
           <a:lstStyle/>
@@ -3895,8 +5071,8 @@
         </p:nvSpPr>
         <p:spPr>
           <a:xfrm>
-            <a:off x="4297680" y="6492240"/>
-            <a:ext cx="3657600" cy="274320"/>
+            <a:off x="3108960" y="6492240"/>
+            <a:ext cx="5943600" cy="274320"/>
           </a:xfrm>
           <a:prstGeom prst="rect">
             <a:avLst/>
@@ -3904,7 +5080,7 @@
           <a:noFill/>
         </p:spPr>
         <p:txBody>
-          <a:bodyPr wrap="square">
+          <a:bodyPr wrap="square" lIns="45720" rIns="45720">
             <a:spAutoFit/>
           </a:bodyPr>
           <a:lstStyle/>
@@ -3921,7 +5097,7 @@
                 </a:solidFill>
                 <a:latin typeface="Roboto"/>
               </a:rPr>
-              <a:t>Data retrieved 2pm, Tue 6 Oct 2026 · Sample data</a:t>
+              <a:t>Data retrieved 2pm, Tue 6 Oct 2026 · Generated 8 Oct 2026, 9:35am · Sample data · Made with Python (python-pptx)</a:t>
             </a:r>
           </a:p>
         </p:txBody>
@@ -3943,7 +5119,7 @@
           <a:noFill/>
         </p:spPr>
         <p:txBody>
-          <a:bodyPr wrap="square">
+          <a:bodyPr wrap="square" lIns="45720" rIns="45720">
             <a:spAutoFit/>
           </a:bodyPr>
           <a:lstStyle/>
@@ -3960,838 +5136,7 @@
                 </a:solidFill>
                 <a:latin typeface="Roboto"/>
               </a:rPr>
-              <a:t>Slide 1 of 11</a:t>
-            </a:r>
-          </a:p>
-        </p:txBody>
-      </p:sp>
-    </p:spTree>
-  </p:cSld>
-  <p:clrMapOvr>
-    <a:masterClrMapping/>
-  </p:clrMapOvr>
-</p:sld>
-</file>
-
-<file path=ppt/slides/slide10.xml><?xml version="1.0" encoding="utf-8"?>
-<p:sld xmlns:a="http://schemas.openxmlformats.org/drawingml/2006/main" xmlns:p="http://schemas.openxmlformats.org/presentationml/2006/main" xmlns:r="http://schemas.openxmlformats.org/officeDocument/2006/relationships">
-  <p:cSld>
-    <p:spTree>
-      <p:nvGrpSpPr>
-        <p:cNvPr id="1" name=""/>
-        <p:cNvGrpSpPr/>
-        <p:nvPr/>
-      </p:nvGrpSpPr>
-      <p:grpSpPr/>
-      <p:sp>
-        <p:nvSpPr>
-          <p:cNvPr id="2" name="Rectangle 1"/>
-          <p:cNvSpPr/>
-          <p:nvPr/>
-        </p:nvSpPr>
-        <p:spPr>
-          <a:xfrm>
-            <a:off x="0" y="0"/>
-            <a:ext cx="12191695" cy="73152"/>
-          </a:xfrm>
-          <a:prstGeom prst="rect">
-            <a:avLst/>
-          </a:prstGeom>
-          <a:solidFill>
-            <a:srgbClr val="2F7A5D"/>
-          </a:solidFill>
-          <a:ln>
-            <a:noFill/>
-          </a:ln>
-        </p:spPr>
-        <p:style>
-          <a:lnRef idx="1">
-            <a:schemeClr val="accent1"/>
-          </a:lnRef>
-          <a:fillRef idx="3">
-            <a:schemeClr val="accent1"/>
-          </a:fillRef>
-          <a:effectRef idx="2">
-            <a:schemeClr val="accent1"/>
-          </a:effectRef>
-          <a:fontRef idx="minor">
-            <a:schemeClr val="lt1"/>
-          </a:fontRef>
-        </p:style>
-        <p:txBody>
-          <a:bodyPr rtlCol="0" anchor="ctr"/>
-          <a:lstStyle/>
-          <a:p>
-            <a:pPr algn="ctr">
-              <a:defRPr>
-                <a:latin typeface="Roboto"/>
-              </a:defRPr>
-            </a:pPr>
-          </a:p>
-        </p:txBody>
-      </p:sp>
-      <p:sp>
-        <p:nvSpPr>
-          <p:cNvPr id="3" name="TextBox 2"/>
-          <p:cNvSpPr txBox="1"/>
-          <p:nvPr/>
-        </p:nvSpPr>
-        <p:spPr>
-          <a:xfrm>
-            <a:off x="457200" y="164592"/>
-            <a:ext cx="7315200" cy="274320"/>
-          </a:xfrm>
-          <a:prstGeom prst="rect">
-            <a:avLst/>
-          </a:prstGeom>
-          <a:noFill/>
-        </p:spPr>
-        <p:txBody>
-          <a:bodyPr wrap="square">
-            <a:spAutoFit/>
-          </a:bodyPr>
-          <a:lstStyle/>
-          <a:p>
-            <a:pPr>
-              <a:defRPr>
-                <a:latin typeface="Roboto"/>
-              </a:defRPr>
-            </a:pPr>
-            <a:r>
-              <a:rPr sz="1000" b="0">
-                <a:solidFill>
-                  <a:srgbClr val="5F6F63"/>
-                </a:solidFill>
-                <a:latin typeface="Roboto"/>
-              </a:rPr>
-              <a:t>Sample Community Services Ltd · What does it cost to raise a dollar?</a:t>
-            </a:r>
-          </a:p>
-        </p:txBody>
-      </p:sp>
-      <p:sp>
-        <p:nvSpPr>
-          <p:cNvPr id="4" name="TextBox 3"/>
-          <p:cNvSpPr txBox="1"/>
-          <p:nvPr/>
-        </p:nvSpPr>
-        <p:spPr>
-          <a:xfrm>
-            <a:off x="457200" y="411480"/>
-            <a:ext cx="11247120" cy="548640"/>
-          </a:xfrm>
-          <a:prstGeom prst="rect">
-            <a:avLst/>
-          </a:prstGeom>
-          <a:noFill/>
-        </p:spPr>
-        <p:txBody>
-          <a:bodyPr wrap="square">
-            <a:spAutoFit/>
-          </a:bodyPr>
-          <a:lstStyle/>
-          <a:p>
-            <a:pPr>
-              <a:defRPr>
-                <a:latin typeface="Roboto"/>
-              </a:defRPr>
-            </a:pPr>
-            <a:r>
-              <a:rPr sz="2400" b="1">
-                <a:solidFill>
-                  <a:srgbClr val="25342A"/>
-                </a:solidFill>
-                <a:latin typeface="Roboto"/>
-              </a:rPr>
-              <a:t>What it shows · Source: Fundraising events</a:t>
-            </a:r>
-          </a:p>
-        </p:txBody>
-      </p:sp>
-      <p:sp>
-        <p:nvSpPr>
-          <p:cNvPr id="5" name="Rectangle 4"/>
-          <p:cNvSpPr/>
-          <p:nvPr/>
-        </p:nvSpPr>
-        <p:spPr>
-          <a:xfrm>
-            <a:off x="457200" y="1554480"/>
-            <a:ext cx="5501487" cy="4389120"/>
-          </a:xfrm>
-          <a:prstGeom prst="rect">
-            <a:avLst/>
-          </a:prstGeom>
-          <a:solidFill>
-            <a:srgbClr val="FFFFFF"/>
-          </a:solidFill>
-          <a:ln>
-            <a:solidFill>
-              <a:srgbClr val="DCE8DC"/>
-            </a:solidFill>
-          </a:ln>
-        </p:spPr>
-        <p:style>
-          <a:lnRef idx="1">
-            <a:schemeClr val="accent1"/>
-          </a:lnRef>
-          <a:fillRef idx="3">
-            <a:schemeClr val="accent1"/>
-          </a:fillRef>
-          <a:effectRef idx="2">
-            <a:schemeClr val="accent1"/>
-          </a:effectRef>
-          <a:fontRef idx="minor">
-            <a:schemeClr val="lt1"/>
-          </a:fontRef>
-        </p:style>
-        <p:txBody>
-          <a:bodyPr rtlCol="0" anchor="ctr"/>
-          <a:lstStyle/>
-          <a:p>
-            <a:pPr algn="ctr">
-              <a:defRPr>
-                <a:latin typeface="Roboto"/>
-              </a:defRPr>
-            </a:pPr>
-          </a:p>
-        </p:txBody>
-      </p:sp>
-      <p:sp>
-        <p:nvSpPr>
-          <p:cNvPr id="6" name="TextBox 5"/>
-          <p:cNvSpPr txBox="1"/>
-          <p:nvPr/>
-        </p:nvSpPr>
-        <p:spPr>
-          <a:xfrm>
-            <a:off x="685800" y="1691640"/>
-            <a:ext cx="5044287" cy="365760"/>
-          </a:xfrm>
-          <a:prstGeom prst="rect">
-            <a:avLst/>
-          </a:prstGeom>
-          <a:noFill/>
-        </p:spPr>
-        <p:txBody>
-          <a:bodyPr wrap="square">
-            <a:spAutoFit/>
-          </a:bodyPr>
-          <a:lstStyle/>
-          <a:p>
-            <a:pPr>
-              <a:defRPr>
-                <a:latin typeface="Roboto"/>
-              </a:defRPr>
-            </a:pPr>
-            <a:r>
-              <a:rPr sz="1100" b="1">
-                <a:solidFill>
-                  <a:srgbClr val="5F6F63"/>
-                </a:solidFill>
-                <a:latin typeface="Roboto"/>
-              </a:rPr>
-              <a:t>WHAT IT SHOWS</a:t>
-            </a:r>
-          </a:p>
-        </p:txBody>
-      </p:sp>
-      <p:sp>
-        <p:nvSpPr>
-          <p:cNvPr id="7" name="TextBox 6"/>
-          <p:cNvSpPr txBox="1"/>
-          <p:nvPr/>
-        </p:nvSpPr>
-        <p:spPr>
-          <a:xfrm>
-            <a:off x="685800" y="2103120"/>
-            <a:ext cx="5044287" cy="3749039"/>
-          </a:xfrm>
-          <a:prstGeom prst="rect">
-            <a:avLst/>
-          </a:prstGeom>
-          <a:noFill/>
-        </p:spPr>
-        <p:txBody>
-          <a:bodyPr wrap="square">
-            <a:spAutoFit/>
-          </a:bodyPr>
-          <a:lstStyle/>
-          <a:p>
-            <a:pPr>
-              <a:defRPr>
-                <a:latin typeface="Roboto"/>
-              </a:defRPr>
-            </a:pPr>
-            <a:r>
-              <a:rPr sz="1600" b="0">
-                <a:solidFill>
-                  <a:srgbClr val="25342A"/>
-                </a:solidFill>
-                <a:latin typeface="Roboto"/>
-              </a:rPr>
-              <a:t>Fundraising events cost 41¢ to raise each dollar this financial year to date ($17,800 of event costs for $43,000).</a:t>
-            </a:r>
-          </a:p>
-        </p:txBody>
-      </p:sp>
-      <p:sp>
-        <p:nvSpPr>
-          <p:cNvPr id="8" name="Rectangle 7"/>
-          <p:cNvSpPr/>
-          <p:nvPr/>
-        </p:nvSpPr>
-        <p:spPr>
-          <a:xfrm>
-            <a:off x="6233007" y="1554480"/>
-            <a:ext cx="5501487" cy="4389120"/>
-          </a:xfrm>
-          <a:prstGeom prst="rect">
-            <a:avLst/>
-          </a:prstGeom>
-          <a:solidFill>
-            <a:srgbClr val="EEF5F0"/>
-          </a:solidFill>
-          <a:ln>
-            <a:solidFill>
-              <a:srgbClr val="DCE8DC"/>
-            </a:solidFill>
-          </a:ln>
-        </p:spPr>
-        <p:style>
-          <a:lnRef idx="1">
-            <a:schemeClr val="accent1"/>
-          </a:lnRef>
-          <a:fillRef idx="3">
-            <a:schemeClr val="accent1"/>
-          </a:fillRef>
-          <a:effectRef idx="2">
-            <a:schemeClr val="accent1"/>
-          </a:effectRef>
-          <a:fontRef idx="minor">
-            <a:schemeClr val="lt1"/>
-          </a:fontRef>
-        </p:style>
-        <p:txBody>
-          <a:bodyPr rtlCol="0" anchor="ctr"/>
-          <a:lstStyle/>
-          <a:p>
-            <a:pPr algn="ctr">
-              <a:defRPr>
-                <a:latin typeface="Roboto"/>
-              </a:defRPr>
-            </a:pPr>
-          </a:p>
-        </p:txBody>
-      </p:sp>
-      <p:sp>
-        <p:nvSpPr>
-          <p:cNvPr id="9" name="TextBox 8"/>
-          <p:cNvSpPr txBox="1"/>
-          <p:nvPr/>
-        </p:nvSpPr>
-        <p:spPr>
-          <a:xfrm>
-            <a:off x="6461607" y="1691640"/>
-            <a:ext cx="5044287" cy="365760"/>
-          </a:xfrm>
-          <a:prstGeom prst="rect">
-            <a:avLst/>
-          </a:prstGeom>
-          <a:noFill/>
-        </p:spPr>
-        <p:txBody>
-          <a:bodyPr wrap="square">
-            <a:spAutoFit/>
-          </a:bodyPr>
-          <a:lstStyle/>
-          <a:p>
-            <a:pPr>
-              <a:defRPr>
-                <a:latin typeface="Roboto"/>
-              </a:defRPr>
-            </a:pPr>
-            <a:r>
-              <a:rPr sz="1100" b="1">
-                <a:solidFill>
-                  <a:srgbClr val="5F6F63"/>
-                </a:solidFill>
-                <a:latin typeface="Roboto"/>
-              </a:rPr>
-              <a:t>WHAT YOU'D DO ABOUT IT</a:t>
-            </a:r>
-          </a:p>
-        </p:txBody>
-      </p:sp>
-      <p:sp>
-        <p:nvSpPr>
-          <p:cNvPr id="10" name="TextBox 9"/>
-          <p:cNvSpPr txBox="1"/>
-          <p:nvPr/>
-        </p:nvSpPr>
-        <p:spPr>
-          <a:xfrm>
-            <a:off x="6461607" y="2103120"/>
-            <a:ext cx="5044287" cy="3749039"/>
-          </a:xfrm>
-          <a:prstGeom prst="rect">
-            <a:avLst/>
-          </a:prstGeom>
-          <a:noFill/>
-        </p:spPr>
-        <p:txBody>
-          <a:bodyPr wrap="square">
-            <a:spAutoFit/>
-          </a:bodyPr>
-          <a:lstStyle/>
-          <a:p>
-            <a:pPr>
-              <a:defRPr>
-                <a:latin typeface="Roboto"/>
-              </a:defRPr>
-            </a:pPr>
-            <a:r>
-              <a:rPr sz="1600" b="0">
-                <a:solidFill>
-                  <a:srgbClr val="25342A"/>
-                </a:solidFill>
-                <a:latin typeface="Roboto"/>
-              </a:rPr>
-              <a:t>Usually the dearest money to raise: events are worth counting for what else they bring too (new donors, profile).</a:t>
-            </a:r>
-          </a:p>
-        </p:txBody>
-      </p:sp>
-      <p:sp>
-        <p:nvSpPr>
-          <p:cNvPr id="11" name="TextBox 10"/>
-          <p:cNvSpPr txBox="1"/>
-          <p:nvPr/>
-        </p:nvSpPr>
-        <p:spPr>
-          <a:xfrm>
-            <a:off x="457200" y="6492240"/>
-            <a:ext cx="3657600" cy="274320"/>
-          </a:xfrm>
-          <a:prstGeom prst="rect">
-            <a:avLst/>
-          </a:prstGeom>
-          <a:noFill/>
-        </p:spPr>
-        <p:txBody>
-          <a:bodyPr wrap="square">
-            <a:spAutoFit/>
-          </a:bodyPr>
-          <a:lstStyle/>
-          <a:p>
-            <a:pPr>
-              <a:defRPr>
-                <a:latin typeface="Roboto"/>
-              </a:defRPr>
-            </a:pPr>
-            <a:r>
-              <a:rPr sz="900" b="0">
-                <a:solidFill>
-                  <a:srgbClr val="5F6F63"/>
-                </a:solidFill>
-                <a:latin typeface="Roboto"/>
-              </a:rPr>
-              <a:t>cost-to-raise.pptx</a:t>
-            </a:r>
-          </a:p>
-        </p:txBody>
-      </p:sp>
-      <p:sp>
-        <p:nvSpPr>
-          <p:cNvPr id="12" name="TextBox 11"/>
-          <p:cNvSpPr txBox="1"/>
-          <p:nvPr/>
-        </p:nvSpPr>
-        <p:spPr>
-          <a:xfrm>
-            <a:off x="4297680" y="6492240"/>
-            <a:ext cx="3657600" cy="274320"/>
-          </a:xfrm>
-          <a:prstGeom prst="rect">
-            <a:avLst/>
-          </a:prstGeom>
-          <a:noFill/>
-        </p:spPr>
-        <p:txBody>
-          <a:bodyPr wrap="square">
-            <a:spAutoFit/>
-          </a:bodyPr>
-          <a:lstStyle/>
-          <a:p>
-            <a:pPr algn="ctr">
-              <a:defRPr>
-                <a:latin typeface="Roboto"/>
-              </a:defRPr>
-            </a:pPr>
-            <a:r>
-              <a:rPr sz="900" b="0">
-                <a:solidFill>
-                  <a:srgbClr val="5F6F63"/>
-                </a:solidFill>
-                <a:latin typeface="Roboto"/>
-              </a:rPr>
-              <a:t>Data retrieved 2pm, Tue 6 Oct 2026 · Sample data</a:t>
-            </a:r>
-          </a:p>
-        </p:txBody>
-      </p:sp>
-      <p:sp>
-        <p:nvSpPr>
-          <p:cNvPr id="13" name="TextBox 12"/>
-          <p:cNvSpPr txBox="1"/>
-          <p:nvPr/>
-        </p:nvSpPr>
-        <p:spPr>
-          <a:xfrm>
-            <a:off x="8503920" y="6492240"/>
-            <a:ext cx="3200400" cy="274320"/>
-          </a:xfrm>
-          <a:prstGeom prst="rect">
-            <a:avLst/>
-          </a:prstGeom>
-          <a:noFill/>
-        </p:spPr>
-        <p:txBody>
-          <a:bodyPr wrap="square">
-            <a:spAutoFit/>
-          </a:bodyPr>
-          <a:lstStyle/>
-          <a:p>
-            <a:pPr algn="r">
-              <a:defRPr>
-                <a:latin typeface="Roboto"/>
-              </a:defRPr>
-            </a:pPr>
-            <a:r>
-              <a:rPr sz="900" b="0">
-                <a:solidFill>
-                  <a:srgbClr val="5F6F63"/>
-                </a:solidFill>
-                <a:latin typeface="Roboto"/>
-              </a:rPr>
-              <a:t>Slide 10 of 11</a:t>
-            </a:r>
-          </a:p>
-        </p:txBody>
-      </p:sp>
-    </p:spTree>
-  </p:cSld>
-  <p:clrMapOvr>
-    <a:masterClrMapping/>
-  </p:clrMapOvr>
-</p:sld>
-</file>
-
-<file path=ppt/slides/slide11.xml><?xml version="1.0" encoding="utf-8"?>
-<p:sld xmlns:a="http://schemas.openxmlformats.org/drawingml/2006/main" xmlns:p="http://schemas.openxmlformats.org/presentationml/2006/main" xmlns:r="http://schemas.openxmlformats.org/officeDocument/2006/relationships">
-  <p:cSld>
-    <p:spTree>
-      <p:nvGrpSpPr>
-        <p:cNvPr id="1" name=""/>
-        <p:cNvGrpSpPr/>
-        <p:nvPr/>
-      </p:nvGrpSpPr>
-      <p:grpSpPr/>
-      <p:sp>
-        <p:nvSpPr>
-          <p:cNvPr id="2" name="Rectangle 1"/>
-          <p:cNvSpPr/>
-          <p:nvPr/>
-        </p:nvSpPr>
-        <p:spPr>
-          <a:xfrm>
-            <a:off x="0" y="0"/>
-            <a:ext cx="12191695" cy="73152"/>
-          </a:xfrm>
-          <a:prstGeom prst="rect">
-            <a:avLst/>
-          </a:prstGeom>
-          <a:solidFill>
-            <a:srgbClr val="2F7A5D"/>
-          </a:solidFill>
-          <a:ln>
-            <a:noFill/>
-          </a:ln>
-        </p:spPr>
-        <p:style>
-          <a:lnRef idx="1">
-            <a:schemeClr val="accent1"/>
-          </a:lnRef>
-          <a:fillRef idx="3">
-            <a:schemeClr val="accent1"/>
-          </a:fillRef>
-          <a:effectRef idx="2">
-            <a:schemeClr val="accent1"/>
-          </a:effectRef>
-          <a:fontRef idx="minor">
-            <a:schemeClr val="lt1"/>
-          </a:fontRef>
-        </p:style>
-        <p:txBody>
-          <a:bodyPr rtlCol="0" anchor="ctr"/>
-          <a:lstStyle/>
-          <a:p>
-            <a:pPr algn="ctr">
-              <a:defRPr>
-                <a:latin typeface="Roboto"/>
-              </a:defRPr>
-            </a:pPr>
-          </a:p>
-        </p:txBody>
-      </p:sp>
-      <p:sp>
-        <p:nvSpPr>
-          <p:cNvPr id="3" name="TextBox 2"/>
-          <p:cNvSpPr txBox="1"/>
-          <p:nvPr/>
-        </p:nvSpPr>
-        <p:spPr>
-          <a:xfrm>
-            <a:off x="457200" y="164592"/>
-            <a:ext cx="7315200" cy="274320"/>
-          </a:xfrm>
-          <a:prstGeom prst="rect">
-            <a:avLst/>
-          </a:prstGeom>
-          <a:noFill/>
-        </p:spPr>
-        <p:txBody>
-          <a:bodyPr wrap="square">
-            <a:spAutoFit/>
-          </a:bodyPr>
-          <a:lstStyle/>
-          <a:p>
-            <a:pPr>
-              <a:defRPr>
-                <a:latin typeface="Roboto"/>
-              </a:defRPr>
-            </a:pPr>
-            <a:r>
-              <a:rPr sz="1000" b="0">
-                <a:solidFill>
-                  <a:srgbClr val="5F6F63"/>
-                </a:solidFill>
-                <a:latin typeface="Roboto"/>
-              </a:rPr>
-              <a:t>Sample Community Services Ltd · What does it cost to raise a dollar?</a:t>
-            </a:r>
-          </a:p>
-        </p:txBody>
-      </p:sp>
-      <p:sp>
-        <p:nvSpPr>
-          <p:cNvPr id="4" name="TextBox 3"/>
-          <p:cNvSpPr txBox="1"/>
-          <p:nvPr/>
-        </p:nvSpPr>
-        <p:spPr>
-          <a:xfrm>
-            <a:off x="457200" y="411480"/>
-            <a:ext cx="11247120" cy="548640"/>
-          </a:xfrm>
-          <a:prstGeom prst="rect">
-            <a:avLst/>
-          </a:prstGeom>
-          <a:noFill/>
-        </p:spPr>
-        <p:txBody>
-          <a:bodyPr wrap="square">
-            <a:spAutoFit/>
-          </a:bodyPr>
-          <a:lstStyle/>
-          <a:p>
-            <a:pPr>
-              <a:defRPr>
-                <a:latin typeface="Roboto"/>
-              </a:defRPr>
-            </a:pPr>
-            <a:r>
-              <a:rPr sz="2400" b="1">
-                <a:solidFill>
-                  <a:srgbClr val="25342A"/>
-                </a:solidFill>
-                <a:latin typeface="Roboto"/>
-              </a:rPr>
-              <a:t>Cost to raise a dollar, by month (cents) · Cents per $1 · Every source at once</a:t>
-            </a:r>
-          </a:p>
-        </p:txBody>
-      </p:sp>
-      <p:sp>
-        <p:nvSpPr>
-          <p:cNvPr id="5" name="TextBox 4"/>
-          <p:cNvSpPr txBox="1"/>
-          <p:nvPr/>
-        </p:nvSpPr>
-        <p:spPr>
-          <a:xfrm>
-            <a:off x="457200" y="960120"/>
-            <a:ext cx="11247120" cy="457200"/>
-          </a:xfrm>
-          <a:prstGeom prst="rect">
-            <a:avLst/>
-          </a:prstGeom>
-          <a:noFill/>
-        </p:spPr>
-        <p:txBody>
-          <a:bodyPr wrap="square">
-            <a:spAutoFit/>
-          </a:bodyPr>
-          <a:lstStyle/>
-          <a:p>
-            <a:pPr>
-              <a:defRPr>
-                <a:latin typeface="Roboto"/>
-              </a:defRPr>
-            </a:pPr>
-            <a:r>
-              <a:rPr sz="1200" b="0">
-                <a:solidFill>
-                  <a:srgbClr val="5F6F63"/>
-                </a:solidFill>
-                <a:latin typeface="Roboto"/>
-              </a:rPr>
-              <a:t>Months with an event (the gala, the Christmas appeal) jump. A gap means nothing was raised that month.</a:t>
-            </a:r>
-          </a:p>
-        </p:txBody>
-      </p:sp>
-      <p:graphicFrame>
-        <p:nvGraphicFramePr>
-          <p:cNvPr id="6" name="Chart 5"/>
-          <p:cNvGraphicFramePr>
-            <a:graphicFrameLocks noGrp="1"/>
-          </p:cNvGraphicFramePr>
-          <p:nvPr/>
-        </p:nvGraphicFramePr>
-        <p:xfrm>
-          <a:off x="457200" y="1463040"/>
-          <a:ext cx="11247120" cy="4754880"/>
-        </p:xfrm>
-        <a:graphic>
-          <a:graphicData uri="http://schemas.openxmlformats.org/drawingml/2006/chart">
-            <c:chart xmlns:c="http://schemas.openxmlformats.org/drawingml/2006/chart" r:id="rId2"/>
-          </a:graphicData>
-        </a:graphic>
-      </p:graphicFrame>
-      <p:sp>
-        <p:nvSpPr>
-          <p:cNvPr id="7" name="TextBox 6"/>
-          <p:cNvSpPr txBox="1"/>
-          <p:nvPr/>
-        </p:nvSpPr>
-        <p:spPr>
-          <a:xfrm>
-            <a:off x="457200" y="6492240"/>
-            <a:ext cx="3657600" cy="274320"/>
-          </a:xfrm>
-          <a:prstGeom prst="rect">
-            <a:avLst/>
-          </a:prstGeom>
-          <a:noFill/>
-        </p:spPr>
-        <p:txBody>
-          <a:bodyPr wrap="square">
-            <a:spAutoFit/>
-          </a:bodyPr>
-          <a:lstStyle/>
-          <a:p>
-            <a:pPr>
-              <a:defRPr>
-                <a:latin typeface="Roboto"/>
-              </a:defRPr>
-            </a:pPr>
-            <a:r>
-              <a:rPr sz="900" b="0">
-                <a:solidFill>
-                  <a:srgbClr val="5F6F63"/>
-                </a:solidFill>
-                <a:latin typeface="Roboto"/>
-              </a:rPr>
-              <a:t>cost-to-raise.pptx</a:t>
-            </a:r>
-          </a:p>
-        </p:txBody>
-      </p:sp>
-      <p:sp>
-        <p:nvSpPr>
-          <p:cNvPr id="8" name="TextBox 7"/>
-          <p:cNvSpPr txBox="1"/>
-          <p:nvPr/>
-        </p:nvSpPr>
-        <p:spPr>
-          <a:xfrm>
-            <a:off x="4297680" y="6492240"/>
-            <a:ext cx="3657600" cy="274320"/>
-          </a:xfrm>
-          <a:prstGeom prst="rect">
-            <a:avLst/>
-          </a:prstGeom>
-          <a:noFill/>
-        </p:spPr>
-        <p:txBody>
-          <a:bodyPr wrap="square">
-            <a:spAutoFit/>
-          </a:bodyPr>
-          <a:lstStyle/>
-          <a:p>
-            <a:pPr algn="ctr">
-              <a:defRPr>
-                <a:latin typeface="Roboto"/>
-              </a:defRPr>
-            </a:pPr>
-            <a:r>
-              <a:rPr sz="900" b="0">
-                <a:solidFill>
-                  <a:srgbClr val="5F6F63"/>
-                </a:solidFill>
-                <a:latin typeface="Roboto"/>
-              </a:rPr>
-              <a:t>Data retrieved 2pm, Tue 6 Oct 2026 · Sample data</a:t>
-            </a:r>
-          </a:p>
-        </p:txBody>
-      </p:sp>
-      <p:sp>
-        <p:nvSpPr>
-          <p:cNvPr id="9" name="TextBox 8"/>
-          <p:cNvSpPr txBox="1"/>
-          <p:nvPr/>
-        </p:nvSpPr>
-        <p:spPr>
-          <a:xfrm>
-            <a:off x="8503920" y="6492240"/>
-            <a:ext cx="3200400" cy="274320"/>
-          </a:xfrm>
-          <a:prstGeom prst="rect">
-            <a:avLst/>
-          </a:prstGeom>
-          <a:noFill/>
-        </p:spPr>
-        <p:txBody>
-          <a:bodyPr wrap="square">
-            <a:spAutoFit/>
-          </a:bodyPr>
-          <a:lstStyle/>
-          <a:p>
-            <a:pPr algn="r">
-              <a:defRPr>
-                <a:latin typeface="Roboto"/>
-              </a:defRPr>
-            </a:pPr>
-            <a:r>
-              <a:rPr sz="900" b="0">
-                <a:solidFill>
-                  <a:srgbClr val="5F6F63"/>
-                </a:solidFill>
-                <a:latin typeface="Roboto"/>
-              </a:rPr>
-              <a:t>Slide 11 of 11</a:t>
+              <a:t>Slide 1 of 5</a:t>
             </a:r>
           </a:p>
         </p:txBody>
@@ -4816,7 +5161,44 @@
       <p:grpSpPr/>
       <p:sp>
         <p:nvSpPr>
-          <p:cNvPr id="2" name="Rectangle 1"/>
+          <p:cNvPr id="2" name="Title 1"/>
+          <p:cNvSpPr>
+            <a:spLocks noGrp="1"/>
+          </p:cNvSpPr>
+          <p:nvPr>
+            <p:ph type="title"/>
+          </p:nvPr>
+        </p:nvSpPr>
+        <p:spPr>
+          <a:xfrm>
+            <a:off x="457200" y="384048"/>
+            <a:ext cx="11277295" cy="475488"/>
+          </a:xfrm>
+        </p:spPr>
+        <p:txBody>
+          <a:bodyPr wrap="square" lIns="45720" rIns="45720" tIns="0" bIns="0" anchor="t"/>
+          <a:lstStyle/>
+          <a:p>
+            <a:pPr algn="l">
+              <a:defRPr>
+                <a:latin typeface="Roboto"/>
+              </a:defRPr>
+            </a:pPr>
+            <a:r>
+              <a:rPr sz="2400" b="1">
+                <a:solidFill>
+                  <a:srgbClr val="25342A"/>
+                </a:solidFill>
+                <a:latin typeface="Roboto"/>
+              </a:rPr>
+              <a:t>All fundraising</a:t>
+            </a:r>
+          </a:p>
+        </p:txBody>
+      </p:sp>
+      <p:sp>
+        <p:nvSpPr>
+          <p:cNvPr id="3" name="Rectangle 2"/>
           <p:cNvSpPr/>
           <p:nvPr/>
         </p:nvSpPr>
@@ -4863,53 +5245,14 @@
       </p:sp>
       <p:sp>
         <p:nvSpPr>
-          <p:cNvPr id="3" name="TextBox 2"/>
-          <p:cNvSpPr txBox="1"/>
-          <p:nvPr/>
-        </p:nvSpPr>
-        <p:spPr>
-          <a:xfrm>
-            <a:off x="457200" y="164592"/>
-            <a:ext cx="7315200" cy="274320"/>
-          </a:xfrm>
-          <a:prstGeom prst="rect">
-            <a:avLst/>
-          </a:prstGeom>
-          <a:noFill/>
-        </p:spPr>
-        <p:txBody>
-          <a:bodyPr wrap="square">
-            <a:spAutoFit/>
-          </a:bodyPr>
-          <a:lstStyle/>
-          <a:p>
-            <a:pPr>
-              <a:defRPr>
-                <a:latin typeface="Roboto"/>
-              </a:defRPr>
-            </a:pPr>
-            <a:r>
-              <a:rPr sz="1000" b="0">
-                <a:solidFill>
-                  <a:srgbClr val="5F6F63"/>
-                </a:solidFill>
-                <a:latin typeface="Roboto"/>
-              </a:rPr>
-              <a:t>Sample Community Services Ltd · What does it cost to raise a dollar?</a:t>
-            </a:r>
-          </a:p>
-        </p:txBody>
-      </p:sp>
-      <p:sp>
-        <p:nvSpPr>
           <p:cNvPr id="4" name="TextBox 3"/>
           <p:cNvSpPr txBox="1"/>
           <p:nvPr/>
         </p:nvSpPr>
         <p:spPr>
           <a:xfrm>
-            <a:off x="457200" y="411480"/>
-            <a:ext cx="11247120" cy="548640"/>
+            <a:off x="457200" y="146304"/>
+            <a:ext cx="8229600" cy="256032"/>
           </a:xfrm>
           <a:prstGeom prst="rect">
             <a:avLst/>
@@ -4917,7 +5260,7 @@
           <a:noFill/>
         </p:spPr>
         <p:txBody>
-          <a:bodyPr wrap="square">
+          <a:bodyPr wrap="square" lIns="45720" rIns="45720">
             <a:spAutoFit/>
           </a:bodyPr>
           <a:lstStyle/>
@@ -4928,27 +5271,66 @@
               </a:defRPr>
             </a:pPr>
             <a:r>
-              <a:rPr sz="2400" b="1">
-                <a:solidFill>
-                  <a:srgbClr val="25342A"/>
+              <a:rPr sz="1000" b="0">
+                <a:solidFill>
+                  <a:srgbClr val="5F6F63"/>
                 </a:solidFill>
                 <a:latin typeface="Roboto"/>
               </a:rPr>
-              <a:t>Headline numbers · Source: All fundraising</a:t>
-            </a:r>
-          </a:p>
-        </p:txBody>
-      </p:sp>
-      <p:sp>
-        <p:nvSpPr>
-          <p:cNvPr id="5" name="Rectangle 4"/>
+              <a:t>Sample Community Services Ltd · What does it cost to raise a dollar?</a:t>
+            </a:r>
+          </a:p>
+        </p:txBody>
+      </p:sp>
+      <p:sp>
+        <p:nvSpPr>
+          <p:cNvPr id="5" name="TextBox 4"/>
+          <p:cNvSpPr txBox="1"/>
+          <p:nvPr/>
+        </p:nvSpPr>
+        <p:spPr>
+          <a:xfrm>
+            <a:off x="457200" y="914400"/>
+            <a:ext cx="11277295" cy="263652"/>
+          </a:xfrm>
+          <a:prstGeom prst="rect">
+            <a:avLst/>
+          </a:prstGeom>
+          <a:noFill/>
+        </p:spPr>
+        <p:txBody>
+          <a:bodyPr wrap="square" lIns="45720" rIns="45720">
+            <a:spAutoFit/>
+          </a:bodyPr>
+          <a:lstStyle/>
+          <a:p>
+            <a:pPr>
+              <a:defRPr>
+                <a:latin typeface="Roboto"/>
+              </a:defRPr>
+            </a:pPr>
+            <a:r>
+              <a:rPr sz="1200" b="0">
+                <a:solidFill>
+                  <a:srgbClr val="5F6F63"/>
+                </a:solidFill>
+                <a:latin typeface="Roboto"/>
+              </a:rPr>
+              <a:t>Cost to raise a dollar, by source, February 2026 (cents)</a:t>
+            </a:r>
+          </a:p>
+        </p:txBody>
+      </p:sp>
+      <p:sp>
+        <p:nvSpPr>
+          <p:cNvPr id="6" name="Rectangle 5"/>
           <p:cNvSpPr/>
           <p:nvPr/>
         </p:nvSpPr>
         <p:spPr>
           <a:xfrm>
-            <a:off x="457200" y="1645920"/>
-            <a:ext cx="5501487" cy="2011680"/>
+            <a:off x="457200" y="1278636"/>
+            <a:ext cx="5524347" cy="1188720"/>
           </a:xfrm>
           <a:prstGeom prst="rect">
             <a:avLst/>
@@ -4990,53 +5372,14 @@
       </p:sp>
       <p:sp>
         <p:nvSpPr>
-          <p:cNvPr id="6" name="TextBox 5"/>
-          <p:cNvSpPr txBox="1"/>
-          <p:nvPr/>
-        </p:nvSpPr>
-        <p:spPr>
-          <a:xfrm>
-            <a:off x="640080" y="1783080"/>
-            <a:ext cx="5135727" cy="457200"/>
-          </a:xfrm>
-          <a:prstGeom prst="rect">
-            <a:avLst/>
-          </a:prstGeom>
-          <a:noFill/>
-        </p:spPr>
-        <p:txBody>
-          <a:bodyPr wrap="square">
-            <a:spAutoFit/>
-          </a:bodyPr>
-          <a:lstStyle/>
-          <a:p>
-            <a:pPr>
-              <a:defRPr>
-                <a:latin typeface="Roboto"/>
-              </a:defRPr>
-            </a:pPr>
-            <a:r>
-              <a:rPr sz="1200" b="0">
-                <a:solidFill>
-                  <a:srgbClr val="5F6F63"/>
-                </a:solidFill>
-                <a:latin typeface="Roboto"/>
-              </a:rPr>
-              <a:t>February · all fundraising</a:t>
-            </a:r>
-          </a:p>
-        </p:txBody>
-      </p:sp>
-      <p:sp>
-        <p:nvSpPr>
           <p:cNvPr id="7" name="TextBox 6"/>
           <p:cNvSpPr txBox="1"/>
           <p:nvPr/>
         </p:nvSpPr>
         <p:spPr>
           <a:xfrm>
-            <a:off x="640080" y="2240280"/>
-            <a:ext cx="5135727" cy="731520"/>
+            <a:off x="594360" y="1351788"/>
+            <a:ext cx="5250027" cy="384048"/>
           </a:xfrm>
           <a:prstGeom prst="rect">
             <a:avLst/>
@@ -5044,7 +5387,7 @@
           <a:noFill/>
         </p:spPr>
         <p:txBody>
-          <a:bodyPr wrap="square">
+          <a:bodyPr wrap="square" lIns="45720" rIns="45720">
             <a:spAutoFit/>
           </a:bodyPr>
           <a:lstStyle/>
@@ -5055,13 +5398,13 @@
               </a:defRPr>
             </a:pPr>
             <a:r>
-              <a:rPr sz="3000" b="1">
-                <a:solidFill>
-                  <a:srgbClr val="2F7A5D"/>
+              <a:rPr sz="1100" b="0">
+                <a:solidFill>
+                  <a:srgbClr val="5F6F63"/>
                 </a:solidFill>
                 <a:latin typeface="Roboto"/>
               </a:rPr>
-              <a:t>13¢</a:t>
+              <a:t>February · all fundraising</a:t>
             </a:r>
           </a:p>
         </p:txBody>
@@ -5074,8 +5417,8 @@
         </p:nvSpPr>
         <p:spPr>
           <a:xfrm>
-            <a:off x="640080" y="3017520"/>
-            <a:ext cx="5135727" cy="548640"/>
+            <a:off x="594360" y="1717548"/>
+            <a:ext cx="5250027" cy="502920"/>
           </a:xfrm>
           <a:prstGeom prst="rect">
             <a:avLst/>
@@ -5083,7 +5426,7 @@
           <a:noFill/>
         </p:spPr>
         <p:txBody>
-          <a:bodyPr wrap="square">
+          <a:bodyPr wrap="square" lIns="45720" rIns="45720">
             <a:spAutoFit/>
           </a:bodyPr>
           <a:lstStyle/>
@@ -5094,7 +5437,46 @@
               </a:defRPr>
             </a:pPr>
             <a:r>
-              <a:rPr sz="1100" b="0">
+              <a:rPr sz="2200" b="1">
+                <a:solidFill>
+                  <a:srgbClr val="2F7A5D"/>
+                </a:solidFill>
+                <a:latin typeface="Roboto"/>
+              </a:rPr>
+              <a:t>13¢</a:t>
+            </a:r>
+          </a:p>
+        </p:txBody>
+      </p:sp>
+      <p:sp>
+        <p:nvSpPr>
+          <p:cNvPr id="9" name="TextBox 8"/>
+          <p:cNvSpPr txBox="1"/>
+          <p:nvPr/>
+        </p:nvSpPr>
+        <p:spPr>
+          <a:xfrm>
+            <a:off x="594360" y="2083308"/>
+            <a:ext cx="5250027" cy="329184"/>
+          </a:xfrm>
+          <a:prstGeom prst="rect">
+            <a:avLst/>
+          </a:prstGeom>
+          <a:noFill/>
+        </p:spPr>
+        <p:txBody>
+          <a:bodyPr wrap="square" lIns="45720" rIns="45720">
+            <a:spAutoFit/>
+          </a:bodyPr>
+          <a:lstStyle/>
+          <a:p>
+            <a:pPr>
+              <a:defRPr>
+                <a:latin typeface="Roboto"/>
+              </a:defRPr>
+            </a:pPr>
+            <a:r>
+              <a:rPr sz="1000" b="0">
                 <a:solidFill>
                   <a:srgbClr val="5F6F63"/>
                 </a:solidFill>
@@ -5107,14 +5489,14 @@
       </p:sp>
       <p:sp>
         <p:nvSpPr>
-          <p:cNvPr id="9" name="Rectangle 8"/>
+          <p:cNvPr id="10" name="Rectangle 9"/>
           <p:cNvSpPr/>
           <p:nvPr/>
         </p:nvSpPr>
         <p:spPr>
           <a:xfrm>
-            <a:off x="6233007" y="1645920"/>
-            <a:ext cx="5501487" cy="2011680"/>
+            <a:off x="6210147" y="1278636"/>
+            <a:ext cx="5524347" cy="1188720"/>
           </a:xfrm>
           <a:prstGeom prst="rect">
             <a:avLst/>
@@ -5156,53 +5538,14 @@
       </p:sp>
       <p:sp>
         <p:nvSpPr>
-          <p:cNvPr id="10" name="TextBox 9"/>
-          <p:cNvSpPr txBox="1"/>
-          <p:nvPr/>
-        </p:nvSpPr>
-        <p:spPr>
-          <a:xfrm>
-            <a:off x="6415887" y="1783080"/>
-            <a:ext cx="5135727" cy="457200"/>
-          </a:xfrm>
-          <a:prstGeom prst="rect">
-            <a:avLst/>
-          </a:prstGeom>
-          <a:noFill/>
-        </p:spPr>
-        <p:txBody>
-          <a:bodyPr wrap="square">
-            <a:spAutoFit/>
-          </a:bodyPr>
-          <a:lstStyle/>
-          <a:p>
-            <a:pPr>
-              <a:defRPr>
-                <a:latin typeface="Roboto"/>
-              </a:defRPr>
-            </a:pPr>
-            <a:r>
-              <a:rPr sz="1200" b="0">
-                <a:solidFill>
-                  <a:srgbClr val="5F6F63"/>
-                </a:solidFill>
-                <a:latin typeface="Roboto"/>
-              </a:rPr>
-              <a:t>Year to date (Jul to Feb 2026)</a:t>
-            </a:r>
-          </a:p>
-        </p:txBody>
-      </p:sp>
-      <p:sp>
-        <p:nvSpPr>
           <p:cNvPr id="11" name="TextBox 10"/>
           <p:cNvSpPr txBox="1"/>
           <p:nvPr/>
         </p:nvSpPr>
         <p:spPr>
           <a:xfrm>
-            <a:off x="6415887" y="2240280"/>
-            <a:ext cx="5135727" cy="731520"/>
+            <a:off x="6347307" y="1351788"/>
+            <a:ext cx="5250027" cy="384048"/>
           </a:xfrm>
           <a:prstGeom prst="rect">
             <a:avLst/>
@@ -5210,7 +5553,7 @@
           <a:noFill/>
         </p:spPr>
         <p:txBody>
-          <a:bodyPr wrap="square">
+          <a:bodyPr wrap="square" lIns="45720" rIns="45720">
             <a:spAutoFit/>
           </a:bodyPr>
           <a:lstStyle/>
@@ -5221,13 +5564,13 @@
               </a:defRPr>
             </a:pPr>
             <a:r>
-              <a:rPr sz="3000" b="1">
-                <a:solidFill>
-                  <a:srgbClr val="2F7A5D"/>
+              <a:rPr sz="1100" b="0">
+                <a:solidFill>
+                  <a:srgbClr val="5F6F63"/>
                 </a:solidFill>
                 <a:latin typeface="Roboto"/>
               </a:rPr>
-              <a:t>14¢</a:t>
+              <a:t>Year to date (Jul to Feb 2026)</a:t>
             </a:r>
           </a:p>
         </p:txBody>
@@ -5240,8 +5583,8 @@
         </p:nvSpPr>
         <p:spPr>
           <a:xfrm>
-            <a:off x="6415887" y="3017520"/>
-            <a:ext cx="5135727" cy="548640"/>
+            <a:off x="6347307" y="1717548"/>
+            <a:ext cx="5250027" cy="502920"/>
           </a:xfrm>
           <a:prstGeom prst="rect">
             <a:avLst/>
@@ -5249,7 +5592,7 @@
           <a:noFill/>
         </p:spPr>
         <p:txBody>
-          <a:bodyPr wrap="square">
+          <a:bodyPr wrap="square" lIns="45720" rIns="45720">
             <a:spAutoFit/>
           </a:bodyPr>
           <a:lstStyle/>
@@ -5260,13 +5603,13 @@
               </a:defRPr>
             </a:pPr>
             <a:r>
-              <a:rPr sz="1100" b="0">
-                <a:solidFill>
-                  <a:srgbClr val="5F6F63"/>
+              <a:rPr sz="2200" b="1">
+                <a:solidFill>
+                  <a:srgbClr val="2F7A5D"/>
                 </a:solidFill>
                 <a:latin typeface="Roboto"/>
               </a:rPr>
-              <a:t>same period last year: not in the data</a:t>
+              <a:t>14¢</a:t>
             </a:r>
           </a:p>
         </p:txBody>
@@ -5279,8 +5622,8 @@
         </p:nvSpPr>
         <p:spPr>
           <a:xfrm>
-            <a:off x="457200" y="6492240"/>
-            <a:ext cx="3657600" cy="274320"/>
+            <a:off x="6347307" y="2083308"/>
+            <a:ext cx="5250027" cy="329184"/>
           </a:xfrm>
           <a:prstGeom prst="rect">
             <a:avLst/>
@@ -5288,7 +5631,7 @@
           <a:noFill/>
         </p:spPr>
         <p:txBody>
-          <a:bodyPr wrap="square">
+          <a:bodyPr wrap="square" lIns="45720" rIns="45720">
             <a:spAutoFit/>
           </a:bodyPr>
           <a:lstStyle/>
@@ -5299,6 +5642,317 @@
               </a:defRPr>
             </a:pPr>
             <a:r>
+              <a:rPr sz="1000" b="0">
+                <a:solidFill>
+                  <a:srgbClr val="5F6F63"/>
+                </a:solidFill>
+                <a:latin typeface="Roboto"/>
+              </a:rPr>
+              <a:t>same period last year: not in the data</a:t>
+            </a:r>
+          </a:p>
+        </p:txBody>
+      </p:sp>
+      <p:graphicFrame>
+        <p:nvGraphicFramePr>
+          <p:cNvPr id="14" name="Chart 13"/>
+          <p:cNvGraphicFramePr>
+            <a:graphicFrameLocks noGrp="1"/>
+          </p:cNvGraphicFramePr>
+          <p:nvPr/>
+        </p:nvGraphicFramePr>
+        <p:xfrm>
+          <a:off x="457200" y="2604516"/>
+          <a:ext cx="11277295" cy="1499616"/>
+        </p:xfrm>
+        <a:graphic>
+          <a:graphicData uri="http://schemas.openxmlformats.org/drawingml/2006/chart">
+            <c:chart xmlns:c="http://schemas.openxmlformats.org/drawingml/2006/chart" r:id="rId3"/>
+          </a:graphicData>
+        </a:graphic>
+      </p:graphicFrame>
+      <p:sp>
+        <p:nvSpPr>
+          <p:cNvPr id="15" name="Rectangle 14"/>
+          <p:cNvSpPr/>
+          <p:nvPr/>
+        </p:nvSpPr>
+        <p:spPr>
+          <a:xfrm>
+            <a:off x="457200" y="4195572"/>
+            <a:ext cx="5501487" cy="899160"/>
+          </a:xfrm>
+          <a:prstGeom prst="rect">
+            <a:avLst/>
+          </a:prstGeom>
+          <a:solidFill>
+            <a:srgbClr val="FFFFFF"/>
+          </a:solidFill>
+          <a:ln>
+            <a:solidFill>
+              <a:srgbClr val="DCE8DC"/>
+            </a:solidFill>
+          </a:ln>
+        </p:spPr>
+        <p:style>
+          <a:lnRef idx="1">
+            <a:schemeClr val="accent1"/>
+          </a:lnRef>
+          <a:fillRef idx="3">
+            <a:schemeClr val="accent1"/>
+          </a:fillRef>
+          <a:effectRef idx="2">
+            <a:schemeClr val="accent1"/>
+          </a:effectRef>
+          <a:fontRef idx="minor">
+            <a:schemeClr val="lt1"/>
+          </a:fontRef>
+        </p:style>
+        <p:txBody>
+          <a:bodyPr rtlCol="0" anchor="ctr"/>
+          <a:lstStyle/>
+          <a:p>
+            <a:pPr algn="ctr">
+              <a:defRPr>
+                <a:latin typeface="Roboto"/>
+              </a:defRPr>
+            </a:pPr>
+          </a:p>
+        </p:txBody>
+      </p:sp>
+      <p:sp>
+        <p:nvSpPr>
+          <p:cNvPr id="16" name="TextBox 15"/>
+          <p:cNvSpPr txBox="1"/>
+          <p:nvPr/>
+        </p:nvSpPr>
+        <p:spPr>
+          <a:xfrm>
+            <a:off x="594360" y="4250436"/>
+            <a:ext cx="5227167" cy="274320"/>
+          </a:xfrm>
+          <a:prstGeom prst="rect">
+            <a:avLst/>
+          </a:prstGeom>
+          <a:noFill/>
+        </p:spPr>
+        <p:txBody>
+          <a:bodyPr wrap="square" lIns="45720" rIns="45720">
+            <a:spAutoFit/>
+          </a:bodyPr>
+          <a:lstStyle/>
+          <a:p>
+            <a:pPr>
+              <a:defRPr>
+                <a:latin typeface="Roboto"/>
+              </a:defRPr>
+            </a:pPr>
+            <a:r>
+              <a:rPr sz="1000" b="1">
+                <a:solidFill>
+                  <a:srgbClr val="5F6F63"/>
+                </a:solidFill>
+                <a:latin typeface="Roboto"/>
+              </a:rPr>
+              <a:t>WHAT IT SHOWS</a:t>
+            </a:r>
+          </a:p>
+        </p:txBody>
+      </p:sp>
+      <p:sp>
+        <p:nvSpPr>
+          <p:cNvPr id="17" name="TextBox 16"/>
+          <p:cNvSpPr txBox="1"/>
+          <p:nvPr/>
+        </p:nvSpPr>
+        <p:spPr>
+          <a:xfrm>
+            <a:off x="594360" y="4524756"/>
+            <a:ext cx="5227167" cy="533400"/>
+          </a:xfrm>
+          <a:prstGeom prst="rect">
+            <a:avLst/>
+          </a:prstGeom>
+          <a:noFill/>
+        </p:spPr>
+        <p:txBody>
+          <a:bodyPr wrap="square" lIns="45720" rIns="45720">
+            <a:spAutoFit/>
+          </a:bodyPr>
+          <a:lstStyle/>
+          <a:p>
+            <a:pPr>
+              <a:defRPr>
+                <a:latin typeface="Roboto"/>
+              </a:defRPr>
+            </a:pPr>
+            <a:r>
+              <a:rPr sz="1200" b="0">
+                <a:solidFill>
+                  <a:srgbClr val="25342A"/>
+                </a:solidFill>
+                <a:latin typeface="Roboto"/>
+              </a:rPr>
+              <a:t>February cost 13¢ to raise each dollar, against 13¢ in January. This financial year to date it has cost 14¢ a dollar.</a:t>
+            </a:r>
+          </a:p>
+        </p:txBody>
+      </p:sp>
+      <p:sp>
+        <p:nvSpPr>
+          <p:cNvPr id="18" name="Rectangle 17"/>
+          <p:cNvSpPr/>
+          <p:nvPr/>
+        </p:nvSpPr>
+        <p:spPr>
+          <a:xfrm>
+            <a:off x="6233007" y="4195572"/>
+            <a:ext cx="5501487" cy="899160"/>
+          </a:xfrm>
+          <a:prstGeom prst="rect">
+            <a:avLst/>
+          </a:prstGeom>
+          <a:solidFill>
+            <a:srgbClr val="EEF5F0"/>
+          </a:solidFill>
+          <a:ln>
+            <a:solidFill>
+              <a:srgbClr val="DCE8DC"/>
+            </a:solidFill>
+          </a:ln>
+        </p:spPr>
+        <p:style>
+          <a:lnRef idx="1">
+            <a:schemeClr val="accent1"/>
+          </a:lnRef>
+          <a:fillRef idx="3">
+            <a:schemeClr val="accent1"/>
+          </a:fillRef>
+          <a:effectRef idx="2">
+            <a:schemeClr val="accent1"/>
+          </a:effectRef>
+          <a:fontRef idx="minor">
+            <a:schemeClr val="lt1"/>
+          </a:fontRef>
+        </p:style>
+        <p:txBody>
+          <a:bodyPr rtlCol="0" anchor="ctr"/>
+          <a:lstStyle/>
+          <a:p>
+            <a:pPr algn="ctr">
+              <a:defRPr>
+                <a:latin typeface="Roboto"/>
+              </a:defRPr>
+            </a:pPr>
+          </a:p>
+        </p:txBody>
+      </p:sp>
+      <p:sp>
+        <p:nvSpPr>
+          <p:cNvPr id="19" name="TextBox 18"/>
+          <p:cNvSpPr txBox="1"/>
+          <p:nvPr/>
+        </p:nvSpPr>
+        <p:spPr>
+          <a:xfrm>
+            <a:off x="6370167" y="4250436"/>
+            <a:ext cx="5227167" cy="274320"/>
+          </a:xfrm>
+          <a:prstGeom prst="rect">
+            <a:avLst/>
+          </a:prstGeom>
+          <a:noFill/>
+        </p:spPr>
+        <p:txBody>
+          <a:bodyPr wrap="square" lIns="45720" rIns="45720">
+            <a:spAutoFit/>
+          </a:bodyPr>
+          <a:lstStyle/>
+          <a:p>
+            <a:pPr>
+              <a:defRPr>
+                <a:latin typeface="Roboto"/>
+              </a:defRPr>
+            </a:pPr>
+            <a:r>
+              <a:rPr sz="1000" b="1">
+                <a:solidFill>
+                  <a:srgbClr val="5F6F63"/>
+                </a:solidFill>
+                <a:latin typeface="Roboto"/>
+              </a:rPr>
+              <a:t>WHAT YOU'D DO ABOUT IT</a:t>
+            </a:r>
+          </a:p>
+        </p:txBody>
+      </p:sp>
+      <p:sp>
+        <p:nvSpPr>
+          <p:cNvPr id="20" name="TextBox 19"/>
+          <p:cNvSpPr txBox="1"/>
+          <p:nvPr/>
+        </p:nvSpPr>
+        <p:spPr>
+          <a:xfrm>
+            <a:off x="6370167" y="4524756"/>
+            <a:ext cx="5227167" cy="533400"/>
+          </a:xfrm>
+          <a:prstGeom prst="rect">
+            <a:avLst/>
+          </a:prstGeom>
+          <a:noFill/>
+        </p:spPr>
+        <p:txBody>
+          <a:bodyPr wrap="square" lIns="45720" rIns="45720">
+            <a:spAutoFit/>
+          </a:bodyPr>
+          <a:lstStyle/>
+          <a:p>
+            <a:pPr>
+              <a:defRPr>
+                <a:latin typeface="Roboto"/>
+              </a:defRPr>
+            </a:pPr>
+            <a:r>
+              <a:rPr sz="1200" b="0">
+                <a:solidFill>
+                  <a:srgbClr val="25342A"/>
+                </a:solidFill>
+                <a:latin typeface="Roboto"/>
+              </a:rPr>
+              <a:t>The year-to-date figure is steadier than single months: events make some months jump. Pick a source above to see which one moves it.</a:t>
+            </a:r>
+          </a:p>
+        </p:txBody>
+      </p:sp>
+      <p:sp>
+        <p:nvSpPr>
+          <p:cNvPr id="21" name="TextBox 20"/>
+          <p:cNvSpPr txBox="1"/>
+          <p:nvPr/>
+        </p:nvSpPr>
+        <p:spPr>
+          <a:xfrm>
+            <a:off x="457200" y="6492240"/>
+            <a:ext cx="2926080" cy="274320"/>
+          </a:xfrm>
+          <a:prstGeom prst="rect">
+            <a:avLst/>
+          </a:prstGeom>
+          <a:noFill/>
+        </p:spPr>
+        <p:txBody>
+          <a:bodyPr wrap="square" lIns="45720" rIns="45720">
+            <a:spAutoFit/>
+          </a:bodyPr>
+          <a:lstStyle/>
+          <a:p>
+            <a:pPr>
+              <a:defRPr>
+                <a:latin typeface="Roboto"/>
+              </a:defRPr>
+            </a:pPr>
+            <a:r>
               <a:rPr sz="900" b="0">
                 <a:solidFill>
                   <a:srgbClr val="5F6F63"/>
@@ -5312,14 +5966,14 @@
       </p:sp>
       <p:sp>
         <p:nvSpPr>
-          <p:cNvPr id="14" name="TextBox 13"/>
+          <p:cNvPr id="22" name="TextBox 21"/>
           <p:cNvSpPr txBox="1"/>
           <p:nvPr/>
         </p:nvSpPr>
         <p:spPr>
           <a:xfrm>
-            <a:off x="4297680" y="6492240"/>
-            <a:ext cx="3657600" cy="274320"/>
+            <a:off x="3108960" y="6492240"/>
+            <a:ext cx="5943600" cy="274320"/>
           </a:xfrm>
           <a:prstGeom prst="rect">
             <a:avLst/>
@@ -5327,7 +5981,7 @@
           <a:noFill/>
         </p:spPr>
         <p:txBody>
-          <a:bodyPr wrap="square">
+          <a:bodyPr wrap="square" lIns="45720" rIns="45720">
             <a:spAutoFit/>
           </a:bodyPr>
           <a:lstStyle/>
@@ -5344,14 +5998,14 @@
                 </a:solidFill>
                 <a:latin typeface="Roboto"/>
               </a:rPr>
-              <a:t>Data retrieved 2pm, Tue 6 Oct 2026 · Sample data</a:t>
-            </a:r>
-          </a:p>
-        </p:txBody>
-      </p:sp>
-      <p:sp>
-        <p:nvSpPr>
-          <p:cNvPr id="15" name="TextBox 14"/>
+              <a:t>Data retrieved 2pm, Tue 6 Oct 2026 · Generated 8 Oct 2026, 9:35am · Sample data · Made with Python (python-pptx)</a:t>
+            </a:r>
+          </a:p>
+        </p:txBody>
+      </p:sp>
+      <p:sp>
+        <p:nvSpPr>
+          <p:cNvPr id="23" name="TextBox 22"/>
           <p:cNvSpPr txBox="1"/>
           <p:nvPr/>
         </p:nvSpPr>
@@ -5366,7 +6020,7 @@
           <a:noFill/>
         </p:spPr>
         <p:txBody>
-          <a:bodyPr wrap="square">
+          <a:bodyPr wrap="square" lIns="45720" rIns="45720">
             <a:spAutoFit/>
           </a:bodyPr>
           <a:lstStyle/>
@@ -5383,7 +6037,7 @@
                 </a:solidFill>
                 <a:latin typeface="Roboto"/>
               </a:rPr>
-              <a:t>Slide 2 of 11</a:t>
+              <a:t>Slide 2 of 5</a:t>
             </a:r>
           </a:p>
         </p:txBody>
@@ -5408,7 +6062,44 @@
       <p:grpSpPr/>
       <p:sp>
         <p:nvSpPr>
-          <p:cNvPr id="2" name="Rectangle 1"/>
+          <p:cNvPr id="2" name="Title 1"/>
+          <p:cNvSpPr>
+            <a:spLocks noGrp="1"/>
+          </p:cNvSpPr>
+          <p:nvPr>
+            <p:ph type="title"/>
+          </p:nvPr>
+        </p:nvSpPr>
+        <p:spPr>
+          <a:xfrm>
+            <a:off x="457200" y="384048"/>
+            <a:ext cx="11277295" cy="475488"/>
+          </a:xfrm>
+        </p:spPr>
+        <p:txBody>
+          <a:bodyPr wrap="square" lIns="45720" rIns="45720" tIns="0" bIns="0" anchor="t"/>
+          <a:lstStyle/>
+          <a:p>
+            <a:pPr algn="l">
+              <a:defRPr>
+                <a:latin typeface="Roboto"/>
+              </a:defRPr>
+            </a:pPr>
+            <a:r>
+              <a:rPr sz="2400" b="1">
+                <a:solidFill>
+                  <a:srgbClr val="25342A"/>
+                </a:solidFill>
+                <a:latin typeface="Roboto"/>
+              </a:rPr>
+              <a:t>Grants</a:t>
+            </a:r>
+          </a:p>
+        </p:txBody>
+      </p:sp>
+      <p:sp>
+        <p:nvSpPr>
+          <p:cNvPr id="3" name="Rectangle 2"/>
           <p:cNvSpPr/>
           <p:nvPr/>
         </p:nvSpPr>
@@ -5455,53 +6146,14 @@
       </p:sp>
       <p:sp>
         <p:nvSpPr>
-          <p:cNvPr id="3" name="TextBox 2"/>
-          <p:cNvSpPr txBox="1"/>
-          <p:nvPr/>
-        </p:nvSpPr>
-        <p:spPr>
-          <a:xfrm>
-            <a:off x="457200" y="164592"/>
-            <a:ext cx="7315200" cy="274320"/>
-          </a:xfrm>
-          <a:prstGeom prst="rect">
-            <a:avLst/>
-          </a:prstGeom>
-          <a:noFill/>
-        </p:spPr>
-        <p:txBody>
-          <a:bodyPr wrap="square">
-            <a:spAutoFit/>
-          </a:bodyPr>
-          <a:lstStyle/>
-          <a:p>
-            <a:pPr>
-              <a:defRPr>
-                <a:latin typeface="Roboto"/>
-              </a:defRPr>
-            </a:pPr>
-            <a:r>
-              <a:rPr sz="1000" b="0">
-                <a:solidFill>
-                  <a:srgbClr val="5F6F63"/>
-                </a:solidFill>
-                <a:latin typeface="Roboto"/>
-              </a:rPr>
-              <a:t>Sample Community Services Ltd · What does it cost to raise a dollar?</a:t>
-            </a:r>
-          </a:p>
-        </p:txBody>
-      </p:sp>
-      <p:sp>
-        <p:nvSpPr>
           <p:cNvPr id="4" name="TextBox 3"/>
           <p:cNvSpPr txBox="1"/>
           <p:nvPr/>
         </p:nvSpPr>
         <p:spPr>
           <a:xfrm>
-            <a:off x="457200" y="411480"/>
-            <a:ext cx="11247120" cy="548640"/>
+            <a:off x="457200" y="146304"/>
+            <a:ext cx="8229600" cy="256032"/>
           </a:xfrm>
           <a:prstGeom prst="rect">
             <a:avLst/>
@@ -5509,7 +6161,7 @@
           <a:noFill/>
         </p:spPr>
         <p:txBody>
-          <a:bodyPr wrap="square">
+          <a:bodyPr wrap="square" lIns="45720" rIns="45720">
             <a:spAutoFit/>
           </a:bodyPr>
           <a:lstStyle/>
@@ -5520,45 +6172,465 @@
               </a:defRPr>
             </a:pPr>
             <a:r>
-              <a:rPr sz="2400" b="1">
-                <a:solidFill>
-                  <a:srgbClr val="25342A"/>
+              <a:rPr sz="1000" b="0">
+                <a:solidFill>
+                  <a:srgbClr val="5F6F63"/>
                 </a:solidFill>
                 <a:latin typeface="Roboto"/>
               </a:rPr>
-              <a:t>Cost to raise a dollar, by source, February 2026 (cents) · Source: All fundraising</a:t>
+              <a:t>Sample Community Services Ltd · What does it cost to raise a dollar?</a:t>
+            </a:r>
+          </a:p>
+        </p:txBody>
+      </p:sp>
+      <p:sp>
+        <p:nvSpPr>
+          <p:cNvPr id="5" name="TextBox 4"/>
+          <p:cNvSpPr txBox="1"/>
+          <p:nvPr/>
+        </p:nvSpPr>
+        <p:spPr>
+          <a:xfrm>
+            <a:off x="457200" y="914400"/>
+            <a:ext cx="11277295" cy="263652"/>
+          </a:xfrm>
+          <a:prstGeom prst="rect">
+            <a:avLst/>
+          </a:prstGeom>
+          <a:noFill/>
+        </p:spPr>
+        <p:txBody>
+          <a:bodyPr wrap="square" lIns="45720" rIns="45720">
+            <a:spAutoFit/>
+          </a:bodyPr>
+          <a:lstStyle/>
+          <a:p>
+            <a:pPr>
+              <a:defRPr>
+                <a:latin typeface="Roboto"/>
+              </a:defRPr>
+            </a:pPr>
+            <a:r>
+              <a:rPr sz="1200" b="0">
+                <a:solidFill>
+                  <a:srgbClr val="5F6F63"/>
+                </a:solidFill>
+                <a:latin typeface="Roboto"/>
+              </a:rPr>
+              <a:t>Cost to raise a dollar, by month (cents) · Grants</a:t>
+            </a:r>
+          </a:p>
+        </p:txBody>
+      </p:sp>
+      <p:sp>
+        <p:nvSpPr>
+          <p:cNvPr id="6" name="Rectangle 5"/>
+          <p:cNvSpPr/>
+          <p:nvPr/>
+        </p:nvSpPr>
+        <p:spPr>
+          <a:xfrm>
+            <a:off x="457200" y="1278636"/>
+            <a:ext cx="5524347" cy="1188720"/>
+          </a:xfrm>
+          <a:prstGeom prst="rect">
+            <a:avLst/>
+          </a:prstGeom>
+          <a:solidFill>
+            <a:srgbClr val="F7FAF7"/>
+          </a:solidFill>
+          <a:ln>
+            <a:solidFill>
+              <a:srgbClr val="DCE8DC"/>
+            </a:solidFill>
+          </a:ln>
+        </p:spPr>
+        <p:style>
+          <a:lnRef idx="1">
+            <a:schemeClr val="accent1"/>
+          </a:lnRef>
+          <a:fillRef idx="3">
+            <a:schemeClr val="accent1"/>
+          </a:fillRef>
+          <a:effectRef idx="2">
+            <a:schemeClr val="accent1"/>
+          </a:effectRef>
+          <a:fontRef idx="minor">
+            <a:schemeClr val="lt1"/>
+          </a:fontRef>
+        </p:style>
+        <p:txBody>
+          <a:bodyPr rtlCol="0" anchor="ctr"/>
+          <a:lstStyle/>
+          <a:p>
+            <a:pPr algn="ctr">
+              <a:defRPr>
+                <a:latin typeface="Roboto"/>
+              </a:defRPr>
+            </a:pPr>
+          </a:p>
+        </p:txBody>
+      </p:sp>
+      <p:sp>
+        <p:nvSpPr>
+          <p:cNvPr id="7" name="TextBox 6"/>
+          <p:cNvSpPr txBox="1"/>
+          <p:nvPr/>
+        </p:nvSpPr>
+        <p:spPr>
+          <a:xfrm>
+            <a:off x="594360" y="1351788"/>
+            <a:ext cx="5250027" cy="384048"/>
+          </a:xfrm>
+          <a:prstGeom prst="rect">
+            <a:avLst/>
+          </a:prstGeom>
+          <a:noFill/>
+        </p:spPr>
+        <p:txBody>
+          <a:bodyPr wrap="square" lIns="45720" rIns="45720">
+            <a:spAutoFit/>
+          </a:bodyPr>
+          <a:lstStyle/>
+          <a:p>
+            <a:pPr>
+              <a:defRPr>
+                <a:latin typeface="Roboto"/>
+              </a:defRPr>
+            </a:pPr>
+            <a:r>
+              <a:rPr sz="1100" b="0">
+                <a:solidFill>
+                  <a:srgbClr val="5F6F63"/>
+                </a:solidFill>
+                <a:latin typeface="Roboto"/>
+              </a:rPr>
+              <a:t>February · Grants</a:t>
+            </a:r>
+          </a:p>
+        </p:txBody>
+      </p:sp>
+      <p:sp>
+        <p:nvSpPr>
+          <p:cNvPr id="8" name="TextBox 7"/>
+          <p:cNvSpPr txBox="1"/>
+          <p:nvPr/>
+        </p:nvSpPr>
+        <p:spPr>
+          <a:xfrm>
+            <a:off x="594360" y="1717548"/>
+            <a:ext cx="5250027" cy="502920"/>
+          </a:xfrm>
+          <a:prstGeom prst="rect">
+            <a:avLst/>
+          </a:prstGeom>
+          <a:noFill/>
+        </p:spPr>
+        <p:txBody>
+          <a:bodyPr wrap="square" lIns="45720" rIns="45720">
+            <a:spAutoFit/>
+          </a:bodyPr>
+          <a:lstStyle/>
+          <a:p>
+            <a:pPr>
+              <a:defRPr>
+                <a:latin typeface="Roboto"/>
+              </a:defRPr>
+            </a:pPr>
+            <a:r>
+              <a:rPr sz="2200" b="1">
+                <a:solidFill>
+                  <a:srgbClr val="2F7A5D"/>
+                </a:solidFill>
+                <a:latin typeface="Roboto"/>
+              </a:rPr>
+              <a:t>13¢</a:t>
+            </a:r>
+          </a:p>
+        </p:txBody>
+      </p:sp>
+      <p:sp>
+        <p:nvSpPr>
+          <p:cNvPr id="9" name="TextBox 8"/>
+          <p:cNvSpPr txBox="1"/>
+          <p:nvPr/>
+        </p:nvSpPr>
+        <p:spPr>
+          <a:xfrm>
+            <a:off x="594360" y="2083308"/>
+            <a:ext cx="5250027" cy="329184"/>
+          </a:xfrm>
+          <a:prstGeom prst="rect">
+            <a:avLst/>
+          </a:prstGeom>
+          <a:noFill/>
+        </p:spPr>
+        <p:txBody>
+          <a:bodyPr wrap="square" lIns="45720" rIns="45720">
+            <a:spAutoFit/>
+          </a:bodyPr>
+          <a:lstStyle/>
+          <a:p>
+            <a:pPr>
+              <a:defRPr>
+                <a:latin typeface="Roboto"/>
+              </a:defRPr>
+            </a:pPr>
+            <a:r>
+              <a:rPr sz="1000" b="0">
+                <a:solidFill>
+                  <a:srgbClr val="5F6F63"/>
+                </a:solidFill>
+                <a:latin typeface="Roboto"/>
+              </a:rPr>
+              <a:t>January 12¢</a:t>
+            </a:r>
+          </a:p>
+        </p:txBody>
+      </p:sp>
+      <p:sp>
+        <p:nvSpPr>
+          <p:cNvPr id="10" name="Rectangle 9"/>
+          <p:cNvSpPr/>
+          <p:nvPr/>
+        </p:nvSpPr>
+        <p:spPr>
+          <a:xfrm>
+            <a:off x="6210147" y="1278636"/>
+            <a:ext cx="5524347" cy="1188720"/>
+          </a:xfrm>
+          <a:prstGeom prst="rect">
+            <a:avLst/>
+          </a:prstGeom>
+          <a:solidFill>
+            <a:srgbClr val="F7FAF7"/>
+          </a:solidFill>
+          <a:ln>
+            <a:solidFill>
+              <a:srgbClr val="DCE8DC"/>
+            </a:solidFill>
+          </a:ln>
+        </p:spPr>
+        <p:style>
+          <a:lnRef idx="1">
+            <a:schemeClr val="accent1"/>
+          </a:lnRef>
+          <a:fillRef idx="3">
+            <a:schemeClr val="accent1"/>
+          </a:fillRef>
+          <a:effectRef idx="2">
+            <a:schemeClr val="accent1"/>
+          </a:effectRef>
+          <a:fontRef idx="minor">
+            <a:schemeClr val="lt1"/>
+          </a:fontRef>
+        </p:style>
+        <p:txBody>
+          <a:bodyPr rtlCol="0" anchor="ctr"/>
+          <a:lstStyle/>
+          <a:p>
+            <a:pPr algn="ctr">
+              <a:defRPr>
+                <a:latin typeface="Roboto"/>
+              </a:defRPr>
+            </a:pPr>
+          </a:p>
+        </p:txBody>
+      </p:sp>
+      <p:sp>
+        <p:nvSpPr>
+          <p:cNvPr id="11" name="TextBox 10"/>
+          <p:cNvSpPr txBox="1"/>
+          <p:nvPr/>
+        </p:nvSpPr>
+        <p:spPr>
+          <a:xfrm>
+            <a:off x="6347307" y="1351788"/>
+            <a:ext cx="5250027" cy="384048"/>
+          </a:xfrm>
+          <a:prstGeom prst="rect">
+            <a:avLst/>
+          </a:prstGeom>
+          <a:noFill/>
+        </p:spPr>
+        <p:txBody>
+          <a:bodyPr wrap="square" lIns="45720" rIns="45720">
+            <a:spAutoFit/>
+          </a:bodyPr>
+          <a:lstStyle/>
+          <a:p>
+            <a:pPr>
+              <a:defRPr>
+                <a:latin typeface="Roboto"/>
+              </a:defRPr>
+            </a:pPr>
+            <a:r>
+              <a:rPr sz="1100" b="0">
+                <a:solidFill>
+                  <a:srgbClr val="5F6F63"/>
+                </a:solidFill>
+                <a:latin typeface="Roboto"/>
+              </a:rPr>
+              <a:t>Year to date (Jul to Feb 2026)</a:t>
+            </a:r>
+          </a:p>
+        </p:txBody>
+      </p:sp>
+      <p:sp>
+        <p:nvSpPr>
+          <p:cNvPr id="12" name="TextBox 11"/>
+          <p:cNvSpPr txBox="1"/>
+          <p:nvPr/>
+        </p:nvSpPr>
+        <p:spPr>
+          <a:xfrm>
+            <a:off x="6347307" y="1717548"/>
+            <a:ext cx="5250027" cy="502920"/>
+          </a:xfrm>
+          <a:prstGeom prst="rect">
+            <a:avLst/>
+          </a:prstGeom>
+          <a:noFill/>
+        </p:spPr>
+        <p:txBody>
+          <a:bodyPr wrap="square" lIns="45720" rIns="45720">
+            <a:spAutoFit/>
+          </a:bodyPr>
+          <a:lstStyle/>
+          <a:p>
+            <a:pPr>
+              <a:defRPr>
+                <a:latin typeface="Roboto"/>
+              </a:defRPr>
+            </a:pPr>
+            <a:r>
+              <a:rPr sz="2200" b="1">
+                <a:solidFill>
+                  <a:srgbClr val="2F7A5D"/>
+                </a:solidFill>
+                <a:latin typeface="Roboto"/>
+              </a:rPr>
+              <a:t>11¢</a:t>
+            </a:r>
+          </a:p>
+        </p:txBody>
+      </p:sp>
+      <p:sp>
+        <p:nvSpPr>
+          <p:cNvPr id="13" name="TextBox 12"/>
+          <p:cNvSpPr txBox="1"/>
+          <p:nvPr/>
+        </p:nvSpPr>
+        <p:spPr>
+          <a:xfrm>
+            <a:off x="6347307" y="2083308"/>
+            <a:ext cx="5250027" cy="329184"/>
+          </a:xfrm>
+          <a:prstGeom prst="rect">
+            <a:avLst/>
+          </a:prstGeom>
+          <a:noFill/>
+        </p:spPr>
+        <p:txBody>
+          <a:bodyPr wrap="square" lIns="45720" rIns="45720">
+            <a:spAutoFit/>
+          </a:bodyPr>
+          <a:lstStyle/>
+          <a:p>
+            <a:pPr>
+              <a:defRPr>
+                <a:latin typeface="Roboto"/>
+              </a:defRPr>
+            </a:pPr>
+            <a:r>
+              <a:rPr sz="1000" b="0">
+                <a:solidFill>
+                  <a:srgbClr val="5F6F63"/>
+                </a:solidFill>
+                <a:latin typeface="Roboto"/>
+              </a:rPr>
+              <a:t>same period last year: not in the data</a:t>
             </a:r>
           </a:p>
         </p:txBody>
       </p:sp>
       <p:graphicFrame>
         <p:nvGraphicFramePr>
-          <p:cNvPr id="5" name="Chart 4"/>
+          <p:cNvPr id="14" name="Chart 13"/>
           <p:cNvGraphicFramePr>
             <a:graphicFrameLocks noGrp="1"/>
           </p:cNvGraphicFramePr>
           <p:nvPr/>
         </p:nvGraphicFramePr>
         <p:xfrm>
-          <a:off x="457200" y="1188720"/>
-          <a:ext cx="11247120" cy="5029200"/>
+          <a:off x="457200" y="2604516"/>
+          <a:ext cx="11277295" cy="2714244"/>
         </p:xfrm>
         <a:graphic>
           <a:graphicData uri="http://schemas.openxmlformats.org/drawingml/2006/chart">
-            <c:chart xmlns:c="http://schemas.openxmlformats.org/drawingml/2006/chart" r:id="rId2"/>
+            <c:chart xmlns:c="http://schemas.openxmlformats.org/drawingml/2006/chart" r:id="rId3"/>
           </a:graphicData>
         </a:graphic>
       </p:graphicFrame>
       <p:sp>
         <p:nvSpPr>
-          <p:cNvPr id="6" name="TextBox 5"/>
+          <p:cNvPr id="15" name="Rectangle 14"/>
+          <p:cNvSpPr/>
+          <p:nvPr/>
+        </p:nvSpPr>
+        <p:spPr>
+          <a:xfrm>
+            <a:off x="457200" y="5410200"/>
+            <a:ext cx="5501487" cy="899160"/>
+          </a:xfrm>
+          <a:prstGeom prst="rect">
+            <a:avLst/>
+          </a:prstGeom>
+          <a:solidFill>
+            <a:srgbClr val="FFFFFF"/>
+          </a:solidFill>
+          <a:ln>
+            <a:solidFill>
+              <a:srgbClr val="DCE8DC"/>
+            </a:solidFill>
+          </a:ln>
+        </p:spPr>
+        <p:style>
+          <a:lnRef idx="1">
+            <a:schemeClr val="accent1"/>
+          </a:lnRef>
+          <a:fillRef idx="3">
+            <a:schemeClr val="accent1"/>
+          </a:fillRef>
+          <a:effectRef idx="2">
+            <a:schemeClr val="accent1"/>
+          </a:effectRef>
+          <a:fontRef idx="minor">
+            <a:schemeClr val="lt1"/>
+          </a:fontRef>
+        </p:style>
+        <p:txBody>
+          <a:bodyPr rtlCol="0" anchor="ctr"/>
+          <a:lstStyle/>
+          <a:p>
+            <a:pPr algn="ctr">
+              <a:defRPr>
+                <a:latin typeface="Roboto"/>
+              </a:defRPr>
+            </a:pPr>
+          </a:p>
+        </p:txBody>
+      </p:sp>
+      <p:sp>
+        <p:nvSpPr>
+          <p:cNvPr id="16" name="TextBox 15"/>
           <p:cNvSpPr txBox="1"/>
           <p:nvPr/>
         </p:nvSpPr>
         <p:spPr>
           <a:xfrm>
-            <a:off x="457200" y="6492240"/>
-            <a:ext cx="3657600" cy="274320"/>
+            <a:off x="594360" y="5465064"/>
+            <a:ext cx="5227167" cy="274320"/>
           </a:xfrm>
           <a:prstGeom prst="rect">
             <a:avLst/>
@@ -5566,7 +6638,7 @@
           <a:noFill/>
         </p:spPr>
         <p:txBody>
-          <a:bodyPr wrap="square">
+          <a:bodyPr wrap="square" lIns="45720" rIns="45720">
             <a:spAutoFit/>
           </a:bodyPr>
           <a:lstStyle/>
@@ -5577,6 +6649,211 @@
               </a:defRPr>
             </a:pPr>
             <a:r>
+              <a:rPr sz="1000" b="1">
+                <a:solidFill>
+                  <a:srgbClr val="5F6F63"/>
+                </a:solidFill>
+                <a:latin typeface="Roboto"/>
+              </a:rPr>
+              <a:t>WHAT IT SHOWS</a:t>
+            </a:r>
+          </a:p>
+        </p:txBody>
+      </p:sp>
+      <p:sp>
+        <p:nvSpPr>
+          <p:cNvPr id="17" name="TextBox 16"/>
+          <p:cNvSpPr txBox="1"/>
+          <p:nvPr/>
+        </p:nvSpPr>
+        <p:spPr>
+          <a:xfrm>
+            <a:off x="594360" y="5739384"/>
+            <a:ext cx="5227167" cy="533400"/>
+          </a:xfrm>
+          <a:prstGeom prst="rect">
+            <a:avLst/>
+          </a:prstGeom>
+          <a:noFill/>
+        </p:spPr>
+        <p:txBody>
+          <a:bodyPr wrap="square" lIns="45720" rIns="45720">
+            <a:spAutoFit/>
+          </a:bodyPr>
+          <a:lstStyle/>
+          <a:p>
+            <a:pPr>
+              <a:defRPr>
+                <a:latin typeface="Roboto"/>
+              </a:defRPr>
+            </a:pPr>
+            <a:r>
+              <a:rPr sz="1200" b="0">
+                <a:solidFill>
+                  <a:srgbClr val="25342A"/>
+                </a:solidFill>
+                <a:latin typeface="Roboto"/>
+              </a:rPr>
+              <a:t>Grants cost 11¢ to raise each dollar this financial year to date ($56,800 of grant writing and reporting for $506,430).</a:t>
+            </a:r>
+          </a:p>
+        </p:txBody>
+      </p:sp>
+      <p:sp>
+        <p:nvSpPr>
+          <p:cNvPr id="18" name="Rectangle 17"/>
+          <p:cNvSpPr/>
+          <p:nvPr/>
+        </p:nvSpPr>
+        <p:spPr>
+          <a:xfrm>
+            <a:off x="6233007" y="5410200"/>
+            <a:ext cx="5501487" cy="899160"/>
+          </a:xfrm>
+          <a:prstGeom prst="rect">
+            <a:avLst/>
+          </a:prstGeom>
+          <a:solidFill>
+            <a:srgbClr val="EEF5F0"/>
+          </a:solidFill>
+          <a:ln>
+            <a:solidFill>
+              <a:srgbClr val="DCE8DC"/>
+            </a:solidFill>
+          </a:ln>
+        </p:spPr>
+        <p:style>
+          <a:lnRef idx="1">
+            <a:schemeClr val="accent1"/>
+          </a:lnRef>
+          <a:fillRef idx="3">
+            <a:schemeClr val="accent1"/>
+          </a:fillRef>
+          <a:effectRef idx="2">
+            <a:schemeClr val="accent1"/>
+          </a:effectRef>
+          <a:fontRef idx="minor">
+            <a:schemeClr val="lt1"/>
+          </a:fontRef>
+        </p:style>
+        <p:txBody>
+          <a:bodyPr rtlCol="0" anchor="ctr"/>
+          <a:lstStyle/>
+          <a:p>
+            <a:pPr algn="ctr">
+              <a:defRPr>
+                <a:latin typeface="Roboto"/>
+              </a:defRPr>
+            </a:pPr>
+          </a:p>
+        </p:txBody>
+      </p:sp>
+      <p:sp>
+        <p:nvSpPr>
+          <p:cNvPr id="19" name="TextBox 18"/>
+          <p:cNvSpPr txBox="1"/>
+          <p:nvPr/>
+        </p:nvSpPr>
+        <p:spPr>
+          <a:xfrm>
+            <a:off x="6370167" y="5465064"/>
+            <a:ext cx="5227167" cy="274320"/>
+          </a:xfrm>
+          <a:prstGeom prst="rect">
+            <a:avLst/>
+          </a:prstGeom>
+          <a:noFill/>
+        </p:spPr>
+        <p:txBody>
+          <a:bodyPr wrap="square" lIns="45720" rIns="45720">
+            <a:spAutoFit/>
+          </a:bodyPr>
+          <a:lstStyle/>
+          <a:p>
+            <a:pPr>
+              <a:defRPr>
+                <a:latin typeface="Roboto"/>
+              </a:defRPr>
+            </a:pPr>
+            <a:r>
+              <a:rPr sz="1000" b="1">
+                <a:solidFill>
+                  <a:srgbClr val="5F6F63"/>
+                </a:solidFill>
+                <a:latin typeface="Roboto"/>
+              </a:rPr>
+              <a:t>WHAT YOU'D DO ABOUT IT</a:t>
+            </a:r>
+          </a:p>
+        </p:txBody>
+      </p:sp>
+      <p:sp>
+        <p:nvSpPr>
+          <p:cNvPr id="20" name="TextBox 19"/>
+          <p:cNvSpPr txBox="1"/>
+          <p:nvPr/>
+        </p:nvSpPr>
+        <p:spPr>
+          <a:xfrm>
+            <a:off x="6370167" y="5739384"/>
+            <a:ext cx="5227167" cy="533400"/>
+          </a:xfrm>
+          <a:prstGeom prst="rect">
+            <a:avLst/>
+          </a:prstGeom>
+          <a:noFill/>
+        </p:spPr>
+        <p:txBody>
+          <a:bodyPr wrap="square" lIns="45720" rIns="45720">
+            <a:spAutoFit/>
+          </a:bodyPr>
+          <a:lstStyle/>
+          <a:p>
+            <a:pPr>
+              <a:defRPr>
+                <a:latin typeface="Roboto"/>
+              </a:defRPr>
+            </a:pPr>
+            <a:r>
+              <a:rPr sz="1200" b="0">
+                <a:solidFill>
+                  <a:srgbClr val="25342A"/>
+                </a:solidFill>
+                <a:latin typeface="Roboto"/>
+              </a:rPr>
+              <a:t>Usually the cheapest money to raise, as long as the time that goes into applications and acquittals is protected.</a:t>
+            </a:r>
+          </a:p>
+        </p:txBody>
+      </p:sp>
+      <p:sp>
+        <p:nvSpPr>
+          <p:cNvPr id="21" name="TextBox 20"/>
+          <p:cNvSpPr txBox="1"/>
+          <p:nvPr/>
+        </p:nvSpPr>
+        <p:spPr>
+          <a:xfrm>
+            <a:off x="457200" y="6492240"/>
+            <a:ext cx="2926080" cy="274320"/>
+          </a:xfrm>
+          <a:prstGeom prst="rect">
+            <a:avLst/>
+          </a:prstGeom>
+          <a:noFill/>
+        </p:spPr>
+        <p:txBody>
+          <a:bodyPr wrap="square" lIns="45720" rIns="45720">
+            <a:spAutoFit/>
+          </a:bodyPr>
+          <a:lstStyle/>
+          <a:p>
+            <a:pPr>
+              <a:defRPr>
+                <a:latin typeface="Roboto"/>
+              </a:defRPr>
+            </a:pPr>
+            <a:r>
               <a:rPr sz="900" b="0">
                 <a:solidFill>
                   <a:srgbClr val="5F6F63"/>
@@ -5590,14 +6867,14 @@
       </p:sp>
       <p:sp>
         <p:nvSpPr>
-          <p:cNvPr id="7" name="TextBox 6"/>
+          <p:cNvPr id="22" name="TextBox 21"/>
           <p:cNvSpPr txBox="1"/>
           <p:nvPr/>
         </p:nvSpPr>
         <p:spPr>
           <a:xfrm>
-            <a:off x="4297680" y="6492240"/>
-            <a:ext cx="3657600" cy="274320"/>
+            <a:off x="3108960" y="6492240"/>
+            <a:ext cx="5943600" cy="274320"/>
           </a:xfrm>
           <a:prstGeom prst="rect">
             <a:avLst/>
@@ -5605,7 +6882,7 @@
           <a:noFill/>
         </p:spPr>
         <p:txBody>
-          <a:bodyPr wrap="square">
+          <a:bodyPr wrap="square" lIns="45720" rIns="45720">
             <a:spAutoFit/>
           </a:bodyPr>
           <a:lstStyle/>
@@ -5622,14 +6899,14 @@
                 </a:solidFill>
                 <a:latin typeface="Roboto"/>
               </a:rPr>
-              <a:t>Data retrieved 2pm, Tue 6 Oct 2026 · Sample data</a:t>
-            </a:r>
-          </a:p>
-        </p:txBody>
-      </p:sp>
-      <p:sp>
-        <p:nvSpPr>
-          <p:cNvPr id="8" name="TextBox 7"/>
+              <a:t>Data retrieved 2pm, Tue 6 Oct 2026 · Generated 8 Oct 2026, 9:35am · Sample data · Made with Python (python-pptx)</a:t>
+            </a:r>
+          </a:p>
+        </p:txBody>
+      </p:sp>
+      <p:sp>
+        <p:nvSpPr>
+          <p:cNvPr id="23" name="TextBox 22"/>
           <p:cNvSpPr txBox="1"/>
           <p:nvPr/>
         </p:nvSpPr>
@@ -5644,7 +6921,7 @@
           <a:noFill/>
         </p:spPr>
         <p:txBody>
-          <a:bodyPr wrap="square">
+          <a:bodyPr wrap="square" lIns="45720" rIns="45720">
             <a:spAutoFit/>
           </a:bodyPr>
           <a:lstStyle/>
@@ -5661,7 +6938,7 @@
                 </a:solidFill>
                 <a:latin typeface="Roboto"/>
               </a:rPr>
-              <a:t>Slide 3 of 11</a:t>
+              <a:t>Slide 3 of 5</a:t>
             </a:r>
           </a:p>
         </p:txBody>
@@ -5686,7 +6963,44 @@
       <p:grpSpPr/>
       <p:sp>
         <p:nvSpPr>
-          <p:cNvPr id="2" name="Rectangle 1"/>
+          <p:cNvPr id="2" name="Title 1"/>
+          <p:cNvSpPr>
+            <a:spLocks noGrp="1"/>
+          </p:cNvSpPr>
+          <p:nvPr>
+            <p:ph type="title"/>
+          </p:nvPr>
+        </p:nvSpPr>
+        <p:spPr>
+          <a:xfrm>
+            <a:off x="457200" y="384048"/>
+            <a:ext cx="11277295" cy="475488"/>
+          </a:xfrm>
+        </p:spPr>
+        <p:txBody>
+          <a:bodyPr wrap="square" lIns="45720" rIns="45720" tIns="0" bIns="0" anchor="t"/>
+          <a:lstStyle/>
+          <a:p>
+            <a:pPr algn="l">
+              <a:defRPr>
+                <a:latin typeface="Roboto"/>
+              </a:defRPr>
+            </a:pPr>
+            <a:r>
+              <a:rPr sz="2400" b="1">
+                <a:solidFill>
+                  <a:srgbClr val="25342A"/>
+                </a:solidFill>
+                <a:latin typeface="Roboto"/>
+              </a:rPr>
+              <a:t>Donations</a:t>
+            </a:r>
+          </a:p>
+        </p:txBody>
+      </p:sp>
+      <p:sp>
+        <p:nvSpPr>
+          <p:cNvPr id="3" name="Rectangle 2"/>
           <p:cNvSpPr/>
           <p:nvPr/>
         </p:nvSpPr>
@@ -5733,53 +7047,14 @@
       </p:sp>
       <p:sp>
         <p:nvSpPr>
-          <p:cNvPr id="3" name="TextBox 2"/>
-          <p:cNvSpPr txBox="1"/>
-          <p:nvPr/>
-        </p:nvSpPr>
-        <p:spPr>
-          <a:xfrm>
-            <a:off x="457200" y="164592"/>
-            <a:ext cx="7315200" cy="274320"/>
-          </a:xfrm>
-          <a:prstGeom prst="rect">
-            <a:avLst/>
-          </a:prstGeom>
-          <a:noFill/>
-        </p:spPr>
-        <p:txBody>
-          <a:bodyPr wrap="square">
-            <a:spAutoFit/>
-          </a:bodyPr>
-          <a:lstStyle/>
-          <a:p>
-            <a:pPr>
-              <a:defRPr>
-                <a:latin typeface="Roboto"/>
-              </a:defRPr>
-            </a:pPr>
-            <a:r>
-              <a:rPr sz="1000" b="0">
-                <a:solidFill>
-                  <a:srgbClr val="5F6F63"/>
-                </a:solidFill>
-                <a:latin typeface="Roboto"/>
-              </a:rPr>
-              <a:t>Sample Community Services Ltd · What does it cost to raise a dollar?</a:t>
-            </a:r>
-          </a:p>
-        </p:txBody>
-      </p:sp>
-      <p:sp>
-        <p:nvSpPr>
           <p:cNvPr id="4" name="TextBox 3"/>
           <p:cNvSpPr txBox="1"/>
           <p:nvPr/>
         </p:nvSpPr>
         <p:spPr>
           <a:xfrm>
-            <a:off x="457200" y="411480"/>
-            <a:ext cx="11247120" cy="548640"/>
+            <a:off x="457200" y="146304"/>
+            <a:ext cx="8229600" cy="256032"/>
           </a:xfrm>
           <a:prstGeom prst="rect">
             <a:avLst/>
@@ -5787,7 +7062,7 @@
           <a:noFill/>
         </p:spPr>
         <p:txBody>
-          <a:bodyPr wrap="square">
+          <a:bodyPr wrap="square" lIns="45720" rIns="45720">
             <a:spAutoFit/>
           </a:bodyPr>
           <a:lstStyle/>
@@ -5798,33 +7073,72 @@
               </a:defRPr>
             </a:pPr>
             <a:r>
-              <a:rPr sz="2400" b="1">
-                <a:solidFill>
-                  <a:srgbClr val="25342A"/>
+              <a:rPr sz="1000" b="0">
+                <a:solidFill>
+                  <a:srgbClr val="5F6F63"/>
                 </a:solidFill>
                 <a:latin typeface="Roboto"/>
               </a:rPr>
-              <a:t>What it shows · Source: All fundraising</a:t>
-            </a:r>
-          </a:p>
-        </p:txBody>
-      </p:sp>
-      <p:sp>
-        <p:nvSpPr>
-          <p:cNvPr id="5" name="Rectangle 4"/>
+              <a:t>Sample Community Services Ltd · What does it cost to raise a dollar?</a:t>
+            </a:r>
+          </a:p>
+        </p:txBody>
+      </p:sp>
+      <p:sp>
+        <p:nvSpPr>
+          <p:cNvPr id="5" name="TextBox 4"/>
+          <p:cNvSpPr txBox="1"/>
+          <p:nvPr/>
+        </p:nvSpPr>
+        <p:spPr>
+          <a:xfrm>
+            <a:off x="457200" y="914400"/>
+            <a:ext cx="11277295" cy="263652"/>
+          </a:xfrm>
+          <a:prstGeom prst="rect">
+            <a:avLst/>
+          </a:prstGeom>
+          <a:noFill/>
+        </p:spPr>
+        <p:txBody>
+          <a:bodyPr wrap="square" lIns="45720" rIns="45720">
+            <a:spAutoFit/>
+          </a:bodyPr>
+          <a:lstStyle/>
+          <a:p>
+            <a:pPr>
+              <a:defRPr>
+                <a:latin typeface="Roboto"/>
+              </a:defRPr>
+            </a:pPr>
+            <a:r>
+              <a:rPr sz="1200" b="0">
+                <a:solidFill>
+                  <a:srgbClr val="5F6F63"/>
+                </a:solidFill>
+                <a:latin typeface="Roboto"/>
+              </a:rPr>
+              <a:t>Cost to raise a dollar, by month (cents) · Donations</a:t>
+            </a:r>
+          </a:p>
+        </p:txBody>
+      </p:sp>
+      <p:sp>
+        <p:nvSpPr>
+          <p:cNvPr id="6" name="Rectangle 5"/>
           <p:cNvSpPr/>
           <p:nvPr/>
         </p:nvSpPr>
         <p:spPr>
           <a:xfrm>
-            <a:off x="457200" y="1554480"/>
-            <a:ext cx="5501487" cy="4389120"/>
+            <a:off x="457200" y="1278636"/>
+            <a:ext cx="5524347" cy="1188720"/>
           </a:xfrm>
           <a:prstGeom prst="rect">
             <a:avLst/>
           </a:prstGeom>
           <a:solidFill>
-            <a:srgbClr val="FFFFFF"/>
+            <a:srgbClr val="F7FAF7"/>
           </a:solidFill>
           <a:ln>
             <a:solidFill>
@@ -5860,53 +7174,14 @@
       </p:sp>
       <p:sp>
         <p:nvSpPr>
-          <p:cNvPr id="6" name="TextBox 5"/>
-          <p:cNvSpPr txBox="1"/>
-          <p:nvPr/>
-        </p:nvSpPr>
-        <p:spPr>
-          <a:xfrm>
-            <a:off x="685800" y="1691640"/>
-            <a:ext cx="5044287" cy="365760"/>
-          </a:xfrm>
-          <a:prstGeom prst="rect">
-            <a:avLst/>
-          </a:prstGeom>
-          <a:noFill/>
-        </p:spPr>
-        <p:txBody>
-          <a:bodyPr wrap="square">
-            <a:spAutoFit/>
-          </a:bodyPr>
-          <a:lstStyle/>
-          <a:p>
-            <a:pPr>
-              <a:defRPr>
-                <a:latin typeface="Roboto"/>
-              </a:defRPr>
-            </a:pPr>
-            <a:r>
-              <a:rPr sz="1100" b="1">
-                <a:solidFill>
-                  <a:srgbClr val="5F6F63"/>
-                </a:solidFill>
-                <a:latin typeface="Roboto"/>
-              </a:rPr>
-              <a:t>WHAT IT SHOWS</a:t>
-            </a:r>
-          </a:p>
-        </p:txBody>
-      </p:sp>
-      <p:sp>
-        <p:nvSpPr>
           <p:cNvPr id="7" name="TextBox 6"/>
           <p:cNvSpPr txBox="1"/>
           <p:nvPr/>
         </p:nvSpPr>
         <p:spPr>
           <a:xfrm>
-            <a:off x="685800" y="2103120"/>
-            <a:ext cx="5044287" cy="3749039"/>
+            <a:off x="594360" y="1351788"/>
+            <a:ext cx="5250027" cy="384048"/>
           </a:xfrm>
           <a:prstGeom prst="rect">
             <a:avLst/>
@@ -5914,7 +7189,7 @@
           <a:noFill/>
         </p:spPr>
         <p:txBody>
-          <a:bodyPr wrap="square">
+          <a:bodyPr wrap="square" lIns="45720" rIns="45720">
             <a:spAutoFit/>
           </a:bodyPr>
           <a:lstStyle/>
@@ -5925,33 +7200,111 @@
               </a:defRPr>
             </a:pPr>
             <a:r>
-              <a:rPr sz="1600" b="0">
-                <a:solidFill>
-                  <a:srgbClr val="25342A"/>
+              <a:rPr sz="1100" b="0">
+                <a:solidFill>
+                  <a:srgbClr val="5F6F63"/>
                 </a:solidFill>
                 <a:latin typeface="Roboto"/>
               </a:rPr>
-              <a:t>February cost 13¢ to raise each dollar, against 13¢ in January. This financial year to date it has cost 14¢ a dollar.</a:t>
-            </a:r>
-          </a:p>
-        </p:txBody>
-      </p:sp>
-      <p:sp>
-        <p:nvSpPr>
-          <p:cNvPr id="8" name="Rectangle 7"/>
+              <a:t>February · Donations</a:t>
+            </a:r>
+          </a:p>
+        </p:txBody>
+      </p:sp>
+      <p:sp>
+        <p:nvSpPr>
+          <p:cNvPr id="8" name="TextBox 7"/>
+          <p:cNvSpPr txBox="1"/>
+          <p:nvPr/>
+        </p:nvSpPr>
+        <p:spPr>
+          <a:xfrm>
+            <a:off x="594360" y="1717548"/>
+            <a:ext cx="5250027" cy="502920"/>
+          </a:xfrm>
+          <a:prstGeom prst="rect">
+            <a:avLst/>
+          </a:prstGeom>
+          <a:noFill/>
+        </p:spPr>
+        <p:txBody>
+          <a:bodyPr wrap="square" lIns="45720" rIns="45720">
+            <a:spAutoFit/>
+          </a:bodyPr>
+          <a:lstStyle/>
+          <a:p>
+            <a:pPr>
+              <a:defRPr>
+                <a:latin typeface="Roboto"/>
+              </a:defRPr>
+            </a:pPr>
+            <a:r>
+              <a:rPr sz="2200" b="1">
+                <a:solidFill>
+                  <a:srgbClr val="2F7A5D"/>
+                </a:solidFill>
+                <a:latin typeface="Roboto"/>
+              </a:rPr>
+              <a:t>13¢</a:t>
+            </a:r>
+          </a:p>
+        </p:txBody>
+      </p:sp>
+      <p:sp>
+        <p:nvSpPr>
+          <p:cNvPr id="9" name="TextBox 8"/>
+          <p:cNvSpPr txBox="1"/>
+          <p:nvPr/>
+        </p:nvSpPr>
+        <p:spPr>
+          <a:xfrm>
+            <a:off x="594360" y="2083308"/>
+            <a:ext cx="5250027" cy="329184"/>
+          </a:xfrm>
+          <a:prstGeom prst="rect">
+            <a:avLst/>
+          </a:prstGeom>
+          <a:noFill/>
+        </p:spPr>
+        <p:txBody>
+          <a:bodyPr wrap="square" lIns="45720" rIns="45720">
+            <a:spAutoFit/>
+          </a:bodyPr>
+          <a:lstStyle/>
+          <a:p>
+            <a:pPr>
+              <a:defRPr>
+                <a:latin typeface="Roboto"/>
+              </a:defRPr>
+            </a:pPr>
+            <a:r>
+              <a:rPr sz="1000" b="0">
+                <a:solidFill>
+                  <a:srgbClr val="5F6F63"/>
+                </a:solidFill>
+                <a:latin typeface="Roboto"/>
+              </a:rPr>
+              <a:t>January 17¢</a:t>
+            </a:r>
+          </a:p>
+        </p:txBody>
+      </p:sp>
+      <p:sp>
+        <p:nvSpPr>
+          <p:cNvPr id="10" name="Rectangle 9"/>
           <p:cNvSpPr/>
           <p:nvPr/>
         </p:nvSpPr>
         <p:spPr>
           <a:xfrm>
-            <a:off x="6233007" y="1554480"/>
-            <a:ext cx="5501487" cy="4389120"/>
+            <a:off x="6210147" y="1278636"/>
+            <a:ext cx="5524347" cy="1188720"/>
           </a:xfrm>
           <a:prstGeom prst="rect">
             <a:avLst/>
           </a:prstGeom>
           <a:solidFill>
-            <a:srgbClr val="EEF5F0"/>
+            <a:srgbClr val="F7FAF7"/>
           </a:solidFill>
           <a:ln>
             <a:solidFill>
@@ -5987,92 +7340,14 @@
       </p:sp>
       <p:sp>
         <p:nvSpPr>
-          <p:cNvPr id="9" name="TextBox 8"/>
-          <p:cNvSpPr txBox="1"/>
-          <p:nvPr/>
-        </p:nvSpPr>
-        <p:spPr>
-          <a:xfrm>
-            <a:off x="6461607" y="1691640"/>
-            <a:ext cx="5044287" cy="365760"/>
-          </a:xfrm>
-          <a:prstGeom prst="rect">
-            <a:avLst/>
-          </a:prstGeom>
-          <a:noFill/>
-        </p:spPr>
-        <p:txBody>
-          <a:bodyPr wrap="square">
-            <a:spAutoFit/>
-          </a:bodyPr>
-          <a:lstStyle/>
-          <a:p>
-            <a:pPr>
-              <a:defRPr>
-                <a:latin typeface="Roboto"/>
-              </a:defRPr>
-            </a:pPr>
-            <a:r>
-              <a:rPr sz="1100" b="1">
-                <a:solidFill>
-                  <a:srgbClr val="5F6F63"/>
-                </a:solidFill>
-                <a:latin typeface="Roboto"/>
-              </a:rPr>
-              <a:t>WHAT YOU'D DO ABOUT IT</a:t>
-            </a:r>
-          </a:p>
-        </p:txBody>
-      </p:sp>
-      <p:sp>
-        <p:nvSpPr>
-          <p:cNvPr id="10" name="TextBox 9"/>
-          <p:cNvSpPr txBox="1"/>
-          <p:nvPr/>
-        </p:nvSpPr>
-        <p:spPr>
-          <a:xfrm>
-            <a:off x="6461607" y="2103120"/>
-            <a:ext cx="5044287" cy="3749039"/>
-          </a:xfrm>
-          <a:prstGeom prst="rect">
-            <a:avLst/>
-          </a:prstGeom>
-          <a:noFill/>
-        </p:spPr>
-        <p:txBody>
-          <a:bodyPr wrap="square">
-            <a:spAutoFit/>
-          </a:bodyPr>
-          <a:lstStyle/>
-          <a:p>
-            <a:pPr>
-              <a:defRPr>
-                <a:latin typeface="Roboto"/>
-              </a:defRPr>
-            </a:pPr>
-            <a:r>
-              <a:rPr sz="1600" b="0">
-                <a:solidFill>
-                  <a:srgbClr val="25342A"/>
-                </a:solidFill>
-                <a:latin typeface="Roboto"/>
-              </a:rPr>
-              <a:t>The year-to-date figure is steadier than single months: events make some months jump. Pick a source above to see which one moves it.</a:t>
-            </a:r>
-          </a:p>
-        </p:txBody>
-      </p:sp>
-      <p:sp>
-        <p:nvSpPr>
           <p:cNvPr id="11" name="TextBox 10"/>
           <p:cNvSpPr txBox="1"/>
           <p:nvPr/>
         </p:nvSpPr>
         <p:spPr>
           <a:xfrm>
-            <a:off x="457200" y="6492240"/>
-            <a:ext cx="3657600" cy="274320"/>
+            <a:off x="6347307" y="1351788"/>
+            <a:ext cx="5250027" cy="384048"/>
           </a:xfrm>
           <a:prstGeom prst="rect">
             <a:avLst/>
@@ -6080,7 +7355,7 @@
           <a:noFill/>
         </p:spPr>
         <p:txBody>
-          <a:bodyPr wrap="square">
+          <a:bodyPr wrap="square" lIns="45720" rIns="45720">
             <a:spAutoFit/>
           </a:bodyPr>
           <a:lstStyle/>
@@ -6091,13 +7366,13 @@
               </a:defRPr>
             </a:pPr>
             <a:r>
-              <a:rPr sz="900" b="0">
+              <a:rPr sz="1100" b="0">
                 <a:solidFill>
                   <a:srgbClr val="5F6F63"/>
                 </a:solidFill>
                 <a:latin typeface="Roboto"/>
               </a:rPr>
-              <a:t>cost-to-raise.pptx</a:t>
+              <a:t>Year to date (Jul to Feb 2026)</a:t>
             </a:r>
           </a:p>
         </p:txBody>
@@ -6110,8 +7385,8 @@
         </p:nvSpPr>
         <p:spPr>
           <a:xfrm>
-            <a:off x="4297680" y="6492240"/>
-            <a:ext cx="3657600" cy="274320"/>
+            <a:off x="6347307" y="1717548"/>
+            <a:ext cx="5250027" cy="502920"/>
           </a:xfrm>
           <a:prstGeom prst="rect">
             <a:avLst/>
@@ -6119,24 +7394,24 @@
           <a:noFill/>
         </p:spPr>
         <p:txBody>
-          <a:bodyPr wrap="square">
+          <a:bodyPr wrap="square" lIns="45720" rIns="45720">
             <a:spAutoFit/>
           </a:bodyPr>
           <a:lstStyle/>
           <a:p>
-            <a:pPr algn="ctr">
-              <a:defRPr>
-                <a:latin typeface="Roboto"/>
-              </a:defRPr>
-            </a:pPr>
-            <a:r>
-              <a:rPr sz="900" b="0">
-                <a:solidFill>
-                  <a:srgbClr val="5F6F63"/>
+            <a:pPr>
+              <a:defRPr>
+                <a:latin typeface="Roboto"/>
+              </a:defRPr>
+            </a:pPr>
+            <a:r>
+              <a:rPr sz="2200" b="1">
+                <a:solidFill>
+                  <a:srgbClr val="2F7A5D"/>
                 </a:solidFill>
                 <a:latin typeface="Roboto"/>
               </a:rPr>
-              <a:t>Data retrieved 2pm, Tue 6 Oct 2026 · Sample data</a:t>
+              <a:t>15¢</a:t>
             </a:r>
           </a:p>
         </p:txBody>
@@ -6149,6 +7424,395 @@
         </p:nvSpPr>
         <p:spPr>
           <a:xfrm>
+            <a:off x="6347307" y="2083308"/>
+            <a:ext cx="5250027" cy="329184"/>
+          </a:xfrm>
+          <a:prstGeom prst="rect">
+            <a:avLst/>
+          </a:prstGeom>
+          <a:noFill/>
+        </p:spPr>
+        <p:txBody>
+          <a:bodyPr wrap="square" lIns="45720" rIns="45720">
+            <a:spAutoFit/>
+          </a:bodyPr>
+          <a:lstStyle/>
+          <a:p>
+            <a:pPr>
+              <a:defRPr>
+                <a:latin typeface="Roboto"/>
+              </a:defRPr>
+            </a:pPr>
+            <a:r>
+              <a:rPr sz="1000" b="0">
+                <a:solidFill>
+                  <a:srgbClr val="5F6F63"/>
+                </a:solidFill>
+                <a:latin typeface="Roboto"/>
+              </a:rPr>
+              <a:t>same period last year: not in the data</a:t>
+            </a:r>
+          </a:p>
+        </p:txBody>
+      </p:sp>
+      <p:graphicFrame>
+        <p:nvGraphicFramePr>
+          <p:cNvPr id="14" name="Chart 13"/>
+          <p:cNvGraphicFramePr>
+            <a:graphicFrameLocks noGrp="1"/>
+          </p:cNvGraphicFramePr>
+          <p:nvPr/>
+        </p:nvGraphicFramePr>
+        <p:xfrm>
+          <a:off x="457200" y="2604516"/>
+          <a:ext cx="11277295" cy="2714244"/>
+        </p:xfrm>
+        <a:graphic>
+          <a:graphicData uri="http://schemas.openxmlformats.org/drawingml/2006/chart">
+            <c:chart xmlns:c="http://schemas.openxmlformats.org/drawingml/2006/chart" r:id="rId3"/>
+          </a:graphicData>
+        </a:graphic>
+      </p:graphicFrame>
+      <p:sp>
+        <p:nvSpPr>
+          <p:cNvPr id="15" name="Rectangle 14"/>
+          <p:cNvSpPr/>
+          <p:nvPr/>
+        </p:nvSpPr>
+        <p:spPr>
+          <a:xfrm>
+            <a:off x="457200" y="5410200"/>
+            <a:ext cx="5501487" cy="899160"/>
+          </a:xfrm>
+          <a:prstGeom prst="rect">
+            <a:avLst/>
+          </a:prstGeom>
+          <a:solidFill>
+            <a:srgbClr val="FFFFFF"/>
+          </a:solidFill>
+          <a:ln>
+            <a:solidFill>
+              <a:srgbClr val="DCE8DC"/>
+            </a:solidFill>
+          </a:ln>
+        </p:spPr>
+        <p:style>
+          <a:lnRef idx="1">
+            <a:schemeClr val="accent1"/>
+          </a:lnRef>
+          <a:fillRef idx="3">
+            <a:schemeClr val="accent1"/>
+          </a:fillRef>
+          <a:effectRef idx="2">
+            <a:schemeClr val="accent1"/>
+          </a:effectRef>
+          <a:fontRef idx="minor">
+            <a:schemeClr val="lt1"/>
+          </a:fontRef>
+        </p:style>
+        <p:txBody>
+          <a:bodyPr rtlCol="0" anchor="ctr"/>
+          <a:lstStyle/>
+          <a:p>
+            <a:pPr algn="ctr">
+              <a:defRPr>
+                <a:latin typeface="Roboto"/>
+              </a:defRPr>
+            </a:pPr>
+          </a:p>
+        </p:txBody>
+      </p:sp>
+      <p:sp>
+        <p:nvSpPr>
+          <p:cNvPr id="16" name="TextBox 15"/>
+          <p:cNvSpPr txBox="1"/>
+          <p:nvPr/>
+        </p:nvSpPr>
+        <p:spPr>
+          <a:xfrm>
+            <a:off x="594360" y="5465064"/>
+            <a:ext cx="5227167" cy="274320"/>
+          </a:xfrm>
+          <a:prstGeom prst="rect">
+            <a:avLst/>
+          </a:prstGeom>
+          <a:noFill/>
+        </p:spPr>
+        <p:txBody>
+          <a:bodyPr wrap="square" lIns="45720" rIns="45720">
+            <a:spAutoFit/>
+          </a:bodyPr>
+          <a:lstStyle/>
+          <a:p>
+            <a:pPr>
+              <a:defRPr>
+                <a:latin typeface="Roboto"/>
+              </a:defRPr>
+            </a:pPr>
+            <a:r>
+              <a:rPr sz="1000" b="1">
+                <a:solidFill>
+                  <a:srgbClr val="5F6F63"/>
+                </a:solidFill>
+                <a:latin typeface="Roboto"/>
+              </a:rPr>
+              <a:t>WHAT IT SHOWS</a:t>
+            </a:r>
+          </a:p>
+        </p:txBody>
+      </p:sp>
+      <p:sp>
+        <p:nvSpPr>
+          <p:cNvPr id="17" name="TextBox 16"/>
+          <p:cNvSpPr txBox="1"/>
+          <p:nvPr/>
+        </p:nvSpPr>
+        <p:spPr>
+          <a:xfrm>
+            <a:off x="594360" y="5739384"/>
+            <a:ext cx="5227167" cy="533400"/>
+          </a:xfrm>
+          <a:prstGeom prst="rect">
+            <a:avLst/>
+          </a:prstGeom>
+          <a:noFill/>
+        </p:spPr>
+        <p:txBody>
+          <a:bodyPr wrap="square" lIns="45720" rIns="45720">
+            <a:spAutoFit/>
+          </a:bodyPr>
+          <a:lstStyle/>
+          <a:p>
+            <a:pPr>
+              <a:defRPr>
+                <a:latin typeface="Roboto"/>
+              </a:defRPr>
+            </a:pPr>
+            <a:r>
+              <a:rPr sz="1200" b="0">
+                <a:solidFill>
+                  <a:srgbClr val="25342A"/>
+                </a:solidFill>
+                <a:latin typeface="Roboto"/>
+              </a:rPr>
+              <a:t>Donations cost 15¢ to raise each dollar this financial year to date ($20,700 of donor campaigns for $136,100).</a:t>
+            </a:r>
+          </a:p>
+        </p:txBody>
+      </p:sp>
+      <p:sp>
+        <p:nvSpPr>
+          <p:cNvPr id="18" name="Rectangle 17"/>
+          <p:cNvSpPr/>
+          <p:nvPr/>
+        </p:nvSpPr>
+        <p:spPr>
+          <a:xfrm>
+            <a:off x="6233007" y="5410200"/>
+            <a:ext cx="5501487" cy="899160"/>
+          </a:xfrm>
+          <a:prstGeom prst="rect">
+            <a:avLst/>
+          </a:prstGeom>
+          <a:solidFill>
+            <a:srgbClr val="EEF5F0"/>
+          </a:solidFill>
+          <a:ln>
+            <a:solidFill>
+              <a:srgbClr val="DCE8DC"/>
+            </a:solidFill>
+          </a:ln>
+        </p:spPr>
+        <p:style>
+          <a:lnRef idx="1">
+            <a:schemeClr val="accent1"/>
+          </a:lnRef>
+          <a:fillRef idx="3">
+            <a:schemeClr val="accent1"/>
+          </a:fillRef>
+          <a:effectRef idx="2">
+            <a:schemeClr val="accent1"/>
+          </a:effectRef>
+          <a:fontRef idx="minor">
+            <a:schemeClr val="lt1"/>
+          </a:fontRef>
+        </p:style>
+        <p:txBody>
+          <a:bodyPr rtlCol="0" anchor="ctr"/>
+          <a:lstStyle/>
+          <a:p>
+            <a:pPr algn="ctr">
+              <a:defRPr>
+                <a:latin typeface="Roboto"/>
+              </a:defRPr>
+            </a:pPr>
+          </a:p>
+        </p:txBody>
+      </p:sp>
+      <p:sp>
+        <p:nvSpPr>
+          <p:cNvPr id="19" name="TextBox 18"/>
+          <p:cNvSpPr txBox="1"/>
+          <p:nvPr/>
+        </p:nvSpPr>
+        <p:spPr>
+          <a:xfrm>
+            <a:off x="6370167" y="5465064"/>
+            <a:ext cx="5227167" cy="274320"/>
+          </a:xfrm>
+          <a:prstGeom prst="rect">
+            <a:avLst/>
+          </a:prstGeom>
+          <a:noFill/>
+        </p:spPr>
+        <p:txBody>
+          <a:bodyPr wrap="square" lIns="45720" rIns="45720">
+            <a:spAutoFit/>
+          </a:bodyPr>
+          <a:lstStyle/>
+          <a:p>
+            <a:pPr>
+              <a:defRPr>
+                <a:latin typeface="Roboto"/>
+              </a:defRPr>
+            </a:pPr>
+            <a:r>
+              <a:rPr sz="1000" b="1">
+                <a:solidFill>
+                  <a:srgbClr val="5F6F63"/>
+                </a:solidFill>
+                <a:latin typeface="Roboto"/>
+              </a:rPr>
+              <a:t>WHAT YOU'D DO ABOUT IT</a:t>
+            </a:r>
+          </a:p>
+        </p:txBody>
+      </p:sp>
+      <p:sp>
+        <p:nvSpPr>
+          <p:cNvPr id="20" name="TextBox 19"/>
+          <p:cNvSpPr txBox="1"/>
+          <p:nvPr/>
+        </p:nvSpPr>
+        <p:spPr>
+          <a:xfrm>
+            <a:off x="6370167" y="5739384"/>
+            <a:ext cx="5227167" cy="533400"/>
+          </a:xfrm>
+          <a:prstGeom prst="rect">
+            <a:avLst/>
+          </a:prstGeom>
+          <a:noFill/>
+        </p:spPr>
+        <p:txBody>
+          <a:bodyPr wrap="square" lIns="45720" rIns="45720">
+            <a:spAutoFit/>
+          </a:bodyPr>
+          <a:lstStyle/>
+          <a:p>
+            <a:pPr>
+              <a:defRPr>
+                <a:latin typeface="Roboto"/>
+              </a:defRPr>
+            </a:pPr>
+            <a:r>
+              <a:rPr sz="1200" b="0">
+                <a:solidFill>
+                  <a:srgbClr val="25342A"/>
+                </a:solidFill>
+                <a:latin typeface="Roboto"/>
+              </a:rPr>
+              <a:t>Steady and cheap, and untied: the money that builds reserves.</a:t>
+            </a:r>
+          </a:p>
+        </p:txBody>
+      </p:sp>
+      <p:sp>
+        <p:nvSpPr>
+          <p:cNvPr id="21" name="TextBox 20"/>
+          <p:cNvSpPr txBox="1"/>
+          <p:nvPr/>
+        </p:nvSpPr>
+        <p:spPr>
+          <a:xfrm>
+            <a:off x="457200" y="6492240"/>
+            <a:ext cx="2926080" cy="274320"/>
+          </a:xfrm>
+          <a:prstGeom prst="rect">
+            <a:avLst/>
+          </a:prstGeom>
+          <a:noFill/>
+        </p:spPr>
+        <p:txBody>
+          <a:bodyPr wrap="square" lIns="45720" rIns="45720">
+            <a:spAutoFit/>
+          </a:bodyPr>
+          <a:lstStyle/>
+          <a:p>
+            <a:pPr>
+              <a:defRPr>
+                <a:latin typeface="Roboto"/>
+              </a:defRPr>
+            </a:pPr>
+            <a:r>
+              <a:rPr sz="900" b="0">
+                <a:solidFill>
+                  <a:srgbClr val="5F6F63"/>
+                </a:solidFill>
+                <a:latin typeface="Roboto"/>
+              </a:rPr>
+              <a:t>cost-to-raise.pptx</a:t>
+            </a:r>
+          </a:p>
+        </p:txBody>
+      </p:sp>
+      <p:sp>
+        <p:nvSpPr>
+          <p:cNvPr id="22" name="TextBox 21"/>
+          <p:cNvSpPr txBox="1"/>
+          <p:nvPr/>
+        </p:nvSpPr>
+        <p:spPr>
+          <a:xfrm>
+            <a:off x="3108960" y="6492240"/>
+            <a:ext cx="5943600" cy="274320"/>
+          </a:xfrm>
+          <a:prstGeom prst="rect">
+            <a:avLst/>
+          </a:prstGeom>
+          <a:noFill/>
+        </p:spPr>
+        <p:txBody>
+          <a:bodyPr wrap="square" lIns="45720" rIns="45720">
+            <a:spAutoFit/>
+          </a:bodyPr>
+          <a:lstStyle/>
+          <a:p>
+            <a:pPr algn="ctr">
+              <a:defRPr>
+                <a:latin typeface="Roboto"/>
+              </a:defRPr>
+            </a:pPr>
+            <a:r>
+              <a:rPr sz="900" b="0">
+                <a:solidFill>
+                  <a:srgbClr val="5F6F63"/>
+                </a:solidFill>
+                <a:latin typeface="Roboto"/>
+              </a:rPr>
+              <a:t>Data retrieved 2pm, Tue 6 Oct 2026 · Generated 8 Oct 2026, 9:35am · Sample data · Made with Python (python-pptx)</a:t>
+            </a:r>
+          </a:p>
+        </p:txBody>
+      </p:sp>
+      <p:sp>
+        <p:nvSpPr>
+          <p:cNvPr id="23" name="TextBox 22"/>
+          <p:cNvSpPr txBox="1"/>
+          <p:nvPr/>
+        </p:nvSpPr>
+        <p:spPr>
+          <a:xfrm>
             <a:off x="8503920" y="6492240"/>
             <a:ext cx="3200400" cy="274320"/>
           </a:xfrm>
@@ -6158,7 +7822,7 @@
           <a:noFill/>
         </p:spPr>
         <p:txBody>
-          <a:bodyPr wrap="square">
+          <a:bodyPr wrap="square" lIns="45720" rIns="45720">
             <a:spAutoFit/>
           </a:bodyPr>
           <a:lstStyle/>
@@ -6175,7 +7839,7 @@
                 </a:solidFill>
                 <a:latin typeface="Roboto"/>
               </a:rPr>
-              <a:t>Slide 4 of 11</a:t>
+              <a:t>Slide 4 of 5</a:t>
             </a:r>
           </a:p>
         </p:txBody>
@@ -6200,7 +7864,44 @@
       <p:grpSpPr/>
       <p:sp>
         <p:nvSpPr>
-          <p:cNvPr id="2" name="Rectangle 1"/>
+          <p:cNvPr id="2" name="Title 1"/>
+          <p:cNvSpPr>
+            <a:spLocks noGrp="1"/>
+          </p:cNvSpPr>
+          <p:nvPr>
+            <p:ph type="title"/>
+          </p:nvPr>
+        </p:nvSpPr>
+        <p:spPr>
+          <a:xfrm>
+            <a:off x="457200" y="384048"/>
+            <a:ext cx="11277295" cy="475488"/>
+          </a:xfrm>
+        </p:spPr>
+        <p:txBody>
+          <a:bodyPr wrap="square" lIns="45720" rIns="45720" tIns="0" bIns="0" anchor="t"/>
+          <a:lstStyle/>
+          <a:p>
+            <a:pPr algn="l">
+              <a:defRPr>
+                <a:latin typeface="Roboto"/>
+              </a:defRPr>
+            </a:pPr>
+            <a:r>
+              <a:rPr sz="2400" b="1">
+                <a:solidFill>
+                  <a:srgbClr val="25342A"/>
+                </a:solidFill>
+                <a:latin typeface="Roboto"/>
+              </a:rPr>
+              <a:t>Fundraising events</a:t>
+            </a:r>
+          </a:p>
+        </p:txBody>
+      </p:sp>
+      <p:sp>
+        <p:nvSpPr>
+          <p:cNvPr id="3" name="Rectangle 2"/>
           <p:cNvSpPr/>
           <p:nvPr/>
         </p:nvSpPr>
@@ -6247,53 +7948,14 @@
       </p:sp>
       <p:sp>
         <p:nvSpPr>
-          <p:cNvPr id="3" name="TextBox 2"/>
-          <p:cNvSpPr txBox="1"/>
-          <p:nvPr/>
-        </p:nvSpPr>
-        <p:spPr>
-          <a:xfrm>
-            <a:off x="457200" y="164592"/>
-            <a:ext cx="7315200" cy="274320"/>
-          </a:xfrm>
-          <a:prstGeom prst="rect">
-            <a:avLst/>
-          </a:prstGeom>
-          <a:noFill/>
-        </p:spPr>
-        <p:txBody>
-          <a:bodyPr wrap="square">
-            <a:spAutoFit/>
-          </a:bodyPr>
-          <a:lstStyle/>
-          <a:p>
-            <a:pPr>
-              <a:defRPr>
-                <a:latin typeface="Roboto"/>
-              </a:defRPr>
-            </a:pPr>
-            <a:r>
-              <a:rPr sz="1000" b="0">
-                <a:solidFill>
-                  <a:srgbClr val="5F6F63"/>
-                </a:solidFill>
-                <a:latin typeface="Roboto"/>
-              </a:rPr>
-              <a:t>Sample Community Services Ltd · What does it cost to raise a dollar?</a:t>
-            </a:r>
-          </a:p>
-        </p:txBody>
-      </p:sp>
-      <p:sp>
-        <p:nvSpPr>
           <p:cNvPr id="4" name="TextBox 3"/>
           <p:cNvSpPr txBox="1"/>
           <p:nvPr/>
         </p:nvSpPr>
         <p:spPr>
           <a:xfrm>
-            <a:off x="457200" y="411480"/>
-            <a:ext cx="11247120" cy="548640"/>
+            <a:off x="457200" y="146304"/>
+            <a:ext cx="8229600" cy="256032"/>
           </a:xfrm>
           <a:prstGeom prst="rect">
             <a:avLst/>
@@ -6301,7 +7963,7 @@
           <a:noFill/>
         </p:spPr>
         <p:txBody>
-          <a:bodyPr wrap="square">
+          <a:bodyPr wrap="square" lIns="45720" rIns="45720">
             <a:spAutoFit/>
           </a:bodyPr>
           <a:lstStyle/>
@@ -6312,27 +7974,66 @@
               </a:defRPr>
             </a:pPr>
             <a:r>
-              <a:rPr sz="2400" b="1">
-                <a:solidFill>
-                  <a:srgbClr val="25342A"/>
+              <a:rPr sz="1000" b="0">
+                <a:solidFill>
+                  <a:srgbClr val="5F6F63"/>
                 </a:solidFill>
                 <a:latin typeface="Roboto"/>
               </a:rPr>
-              <a:t>Headline numbers · Source: Grants</a:t>
-            </a:r>
-          </a:p>
-        </p:txBody>
-      </p:sp>
-      <p:sp>
-        <p:nvSpPr>
-          <p:cNvPr id="5" name="Rectangle 4"/>
+              <a:t>Sample Community Services Ltd · What does it cost to raise a dollar?</a:t>
+            </a:r>
+          </a:p>
+        </p:txBody>
+      </p:sp>
+      <p:sp>
+        <p:nvSpPr>
+          <p:cNvPr id="5" name="TextBox 4"/>
+          <p:cNvSpPr txBox="1"/>
+          <p:nvPr/>
+        </p:nvSpPr>
+        <p:spPr>
+          <a:xfrm>
+            <a:off x="457200" y="914400"/>
+            <a:ext cx="11277295" cy="263652"/>
+          </a:xfrm>
+          <a:prstGeom prst="rect">
+            <a:avLst/>
+          </a:prstGeom>
+          <a:noFill/>
+        </p:spPr>
+        <p:txBody>
+          <a:bodyPr wrap="square" lIns="45720" rIns="45720">
+            <a:spAutoFit/>
+          </a:bodyPr>
+          <a:lstStyle/>
+          <a:p>
+            <a:pPr>
+              <a:defRPr>
+                <a:latin typeface="Roboto"/>
+              </a:defRPr>
+            </a:pPr>
+            <a:r>
+              <a:rPr sz="1200" b="0">
+                <a:solidFill>
+                  <a:srgbClr val="5F6F63"/>
+                </a:solidFill>
+                <a:latin typeface="Roboto"/>
+              </a:rPr>
+              <a:t>Cost to raise a dollar, by month (cents) · Fundraising events</a:t>
+            </a:r>
+          </a:p>
+        </p:txBody>
+      </p:sp>
+      <p:sp>
+        <p:nvSpPr>
+          <p:cNvPr id="6" name="Rectangle 5"/>
           <p:cNvSpPr/>
           <p:nvPr/>
         </p:nvSpPr>
         <p:spPr>
           <a:xfrm>
-            <a:off x="457200" y="1645920"/>
-            <a:ext cx="5501487" cy="2011680"/>
+            <a:off x="457200" y="1278636"/>
+            <a:ext cx="5524347" cy="1188720"/>
           </a:xfrm>
           <a:prstGeom prst="rect">
             <a:avLst/>
@@ -6374,53 +8075,14 @@
       </p:sp>
       <p:sp>
         <p:nvSpPr>
-          <p:cNvPr id="6" name="TextBox 5"/>
-          <p:cNvSpPr txBox="1"/>
-          <p:nvPr/>
-        </p:nvSpPr>
-        <p:spPr>
-          <a:xfrm>
-            <a:off x="640080" y="1783080"/>
-            <a:ext cx="5135727" cy="457200"/>
-          </a:xfrm>
-          <a:prstGeom prst="rect">
-            <a:avLst/>
-          </a:prstGeom>
-          <a:noFill/>
-        </p:spPr>
-        <p:txBody>
-          <a:bodyPr wrap="square">
-            <a:spAutoFit/>
-          </a:bodyPr>
-          <a:lstStyle/>
-          <a:p>
-            <a:pPr>
-              <a:defRPr>
-                <a:latin typeface="Roboto"/>
-              </a:defRPr>
-            </a:pPr>
-            <a:r>
-              <a:rPr sz="1200" b="0">
-                <a:solidFill>
-                  <a:srgbClr val="5F6F63"/>
-                </a:solidFill>
-                <a:latin typeface="Roboto"/>
-              </a:rPr>
-              <a:t>February · Grants</a:t>
-            </a:r>
-          </a:p>
-        </p:txBody>
-      </p:sp>
-      <p:sp>
-        <p:nvSpPr>
           <p:cNvPr id="7" name="TextBox 6"/>
           <p:cNvSpPr txBox="1"/>
           <p:nvPr/>
         </p:nvSpPr>
         <p:spPr>
           <a:xfrm>
-            <a:off x="640080" y="2240280"/>
-            <a:ext cx="5135727" cy="731520"/>
+            <a:off x="594360" y="1351788"/>
+            <a:ext cx="5250027" cy="384048"/>
           </a:xfrm>
           <a:prstGeom prst="rect">
             <a:avLst/>
@@ -6428,7 +8090,7 @@
           <a:noFill/>
         </p:spPr>
         <p:txBody>
-          <a:bodyPr wrap="square">
+          <a:bodyPr wrap="square" lIns="45720" rIns="45720">
             <a:spAutoFit/>
           </a:bodyPr>
           <a:lstStyle/>
@@ -6439,13 +8101,13 @@
               </a:defRPr>
             </a:pPr>
             <a:r>
-              <a:rPr sz="3000" b="1">
-                <a:solidFill>
-                  <a:srgbClr val="2F7A5D"/>
+              <a:rPr sz="1100" b="0">
+                <a:solidFill>
+                  <a:srgbClr val="5F6F63"/>
                 </a:solidFill>
                 <a:latin typeface="Roboto"/>
               </a:rPr>
-              <a:t>13¢</a:t>
+              <a:t>February · Fundraising events</a:t>
             </a:r>
           </a:p>
         </p:txBody>
@@ -6458,8 +8120,8 @@
         </p:nvSpPr>
         <p:spPr>
           <a:xfrm>
-            <a:off x="640080" y="3017520"/>
-            <a:ext cx="5135727" cy="548640"/>
+            <a:off x="594360" y="1717548"/>
+            <a:ext cx="5250027" cy="502920"/>
           </a:xfrm>
           <a:prstGeom prst="rect">
             <a:avLst/>
@@ -6467,7 +8129,7 @@
           <a:noFill/>
         </p:spPr>
         <p:txBody>
-          <a:bodyPr wrap="square">
+          <a:bodyPr wrap="square" lIns="45720" rIns="45720">
             <a:spAutoFit/>
           </a:bodyPr>
           <a:lstStyle/>
@@ -6478,27 +8140,66 @@
               </a:defRPr>
             </a:pPr>
             <a:r>
-              <a:rPr sz="1100" b="0">
+              <a:rPr sz="2200" b="1">
+                <a:solidFill>
+                  <a:srgbClr val="2F7A5D"/>
+                </a:solidFill>
+                <a:latin typeface="Roboto"/>
+              </a:rPr>
+              <a:t>–</a:t>
+            </a:r>
+          </a:p>
+        </p:txBody>
+      </p:sp>
+      <p:sp>
+        <p:nvSpPr>
+          <p:cNvPr id="9" name="TextBox 8"/>
+          <p:cNvSpPr txBox="1"/>
+          <p:nvPr/>
+        </p:nvSpPr>
+        <p:spPr>
+          <a:xfrm>
+            <a:off x="594360" y="2083308"/>
+            <a:ext cx="5250027" cy="329184"/>
+          </a:xfrm>
+          <a:prstGeom prst="rect">
+            <a:avLst/>
+          </a:prstGeom>
+          <a:noFill/>
+        </p:spPr>
+        <p:txBody>
+          <a:bodyPr wrap="square" lIns="45720" rIns="45720">
+            <a:spAutoFit/>
+          </a:bodyPr>
+          <a:lstStyle/>
+          <a:p>
+            <a:pPr>
+              <a:defRPr>
+                <a:latin typeface="Roboto"/>
+              </a:defRPr>
+            </a:pPr>
+            <a:r>
+              <a:rPr sz="1000" b="0">
                 <a:solidFill>
                   <a:srgbClr val="5F6F63"/>
                 </a:solidFill>
                 <a:latin typeface="Roboto"/>
               </a:rPr>
-              <a:t>January 12¢</a:t>
-            </a:r>
-          </a:p>
-        </p:txBody>
-      </p:sp>
-      <p:sp>
-        <p:nvSpPr>
-          <p:cNvPr id="9" name="Rectangle 8"/>
+              <a:t>January none raised</a:t>
+            </a:r>
+          </a:p>
+        </p:txBody>
+      </p:sp>
+      <p:sp>
+        <p:nvSpPr>
+          <p:cNvPr id="10" name="Rectangle 9"/>
           <p:cNvSpPr/>
           <p:nvPr/>
         </p:nvSpPr>
         <p:spPr>
           <a:xfrm>
-            <a:off x="6233007" y="1645920"/>
-            <a:ext cx="5501487" cy="2011680"/>
+            <a:off x="6210147" y="1278636"/>
+            <a:ext cx="5524347" cy="1188720"/>
           </a:xfrm>
           <a:prstGeom prst="rect">
             <a:avLst/>
@@ -6540,53 +8241,14 @@
       </p:sp>
       <p:sp>
         <p:nvSpPr>
-          <p:cNvPr id="10" name="TextBox 9"/>
-          <p:cNvSpPr txBox="1"/>
-          <p:nvPr/>
-        </p:nvSpPr>
-        <p:spPr>
-          <a:xfrm>
-            <a:off x="6415887" y="1783080"/>
-            <a:ext cx="5135727" cy="457200"/>
-          </a:xfrm>
-          <a:prstGeom prst="rect">
-            <a:avLst/>
-          </a:prstGeom>
-          <a:noFill/>
-        </p:spPr>
-        <p:txBody>
-          <a:bodyPr wrap="square">
-            <a:spAutoFit/>
-          </a:bodyPr>
-          <a:lstStyle/>
-          <a:p>
-            <a:pPr>
-              <a:defRPr>
-                <a:latin typeface="Roboto"/>
-              </a:defRPr>
-            </a:pPr>
-            <a:r>
-              <a:rPr sz="1200" b="0">
-                <a:solidFill>
-                  <a:srgbClr val="5F6F63"/>
-                </a:solidFill>
-                <a:latin typeface="Roboto"/>
-              </a:rPr>
-              <a:t>Year to date (Jul to Feb 2026)</a:t>
-            </a:r>
-          </a:p>
-        </p:txBody>
-      </p:sp>
-      <p:sp>
-        <p:nvSpPr>
           <p:cNvPr id="11" name="TextBox 10"/>
           <p:cNvSpPr txBox="1"/>
           <p:nvPr/>
         </p:nvSpPr>
         <p:spPr>
           <a:xfrm>
-            <a:off x="6415887" y="2240280"/>
-            <a:ext cx="5135727" cy="731520"/>
+            <a:off x="6347307" y="1351788"/>
+            <a:ext cx="5250027" cy="384048"/>
           </a:xfrm>
           <a:prstGeom prst="rect">
             <a:avLst/>
@@ -6594,7 +8256,7 @@
           <a:noFill/>
         </p:spPr>
         <p:txBody>
-          <a:bodyPr wrap="square">
+          <a:bodyPr wrap="square" lIns="45720" rIns="45720">
             <a:spAutoFit/>
           </a:bodyPr>
           <a:lstStyle/>
@@ -6605,13 +8267,13 @@
               </a:defRPr>
             </a:pPr>
             <a:r>
-              <a:rPr sz="3000" b="1">
-                <a:solidFill>
-                  <a:srgbClr val="2F7A5D"/>
+              <a:rPr sz="1100" b="0">
+                <a:solidFill>
+                  <a:srgbClr val="5F6F63"/>
                 </a:solidFill>
                 <a:latin typeface="Roboto"/>
               </a:rPr>
-              <a:t>11¢</a:t>
+              <a:t>Year to date (Jul to Feb 2026)</a:t>
             </a:r>
           </a:p>
         </p:txBody>
@@ -6624,8 +8286,8 @@
         </p:nvSpPr>
         <p:spPr>
           <a:xfrm>
-            <a:off x="6415887" y="3017520"/>
-            <a:ext cx="5135727" cy="548640"/>
+            <a:off x="6347307" y="1717548"/>
+            <a:ext cx="5250027" cy="502920"/>
           </a:xfrm>
           <a:prstGeom prst="rect">
             <a:avLst/>
@@ -6633,7 +8295,7 @@
           <a:noFill/>
         </p:spPr>
         <p:txBody>
-          <a:bodyPr wrap="square">
+          <a:bodyPr wrap="square" lIns="45720" rIns="45720">
             <a:spAutoFit/>
           </a:bodyPr>
           <a:lstStyle/>
@@ -6644,13 +8306,13 @@
               </a:defRPr>
             </a:pPr>
             <a:r>
-              <a:rPr sz="1100" b="0">
-                <a:solidFill>
-                  <a:srgbClr val="5F6F63"/>
+              <a:rPr sz="2200" b="1">
+                <a:solidFill>
+                  <a:srgbClr val="2F7A5D"/>
                 </a:solidFill>
                 <a:latin typeface="Roboto"/>
               </a:rPr>
-              <a:t>same period last year: not in the data</a:t>
+              <a:t>41¢</a:t>
             </a:r>
           </a:p>
         </p:txBody>
@@ -6663,8 +8325,8 @@
         </p:nvSpPr>
         <p:spPr>
           <a:xfrm>
-            <a:off x="457200" y="6492240"/>
-            <a:ext cx="3657600" cy="274320"/>
+            <a:off x="6347307" y="2083308"/>
+            <a:ext cx="5250027" cy="329184"/>
           </a:xfrm>
           <a:prstGeom prst="rect">
             <a:avLst/>
@@ -6672,7 +8334,7 @@
           <a:noFill/>
         </p:spPr>
         <p:txBody>
-          <a:bodyPr wrap="square">
+          <a:bodyPr wrap="square" lIns="45720" rIns="45720">
             <a:spAutoFit/>
           </a:bodyPr>
           <a:lstStyle/>
@@ -6683,132 +8345,56 @@
               </a:defRPr>
             </a:pPr>
             <a:r>
-              <a:rPr sz="900" b="0">
+              <a:rPr sz="1000" b="0">
                 <a:solidFill>
                   <a:srgbClr val="5F6F63"/>
                 </a:solidFill>
                 <a:latin typeface="Roboto"/>
               </a:rPr>
-              <a:t>cost-to-raise.pptx</a:t>
-            </a:r>
-          </a:p>
-        </p:txBody>
-      </p:sp>
-      <p:sp>
-        <p:nvSpPr>
-          <p:cNvPr id="14" name="TextBox 13"/>
-          <p:cNvSpPr txBox="1"/>
+              <a:t>same period last year: not in the data</a:t>
+            </a:r>
+          </a:p>
+        </p:txBody>
+      </p:sp>
+      <p:graphicFrame>
+        <p:nvGraphicFramePr>
+          <p:cNvPr id="14" name="Chart 13"/>
+          <p:cNvGraphicFramePr>
+            <a:graphicFrameLocks noGrp="1"/>
+          </p:cNvGraphicFramePr>
           <p:nvPr/>
-        </p:nvSpPr>
-        <p:spPr>
-          <a:xfrm>
-            <a:off x="4297680" y="6492240"/>
-            <a:ext cx="3657600" cy="274320"/>
-          </a:xfrm>
-          <a:prstGeom prst="rect">
-            <a:avLst/>
-          </a:prstGeom>
-          <a:noFill/>
-        </p:spPr>
-        <p:txBody>
-          <a:bodyPr wrap="square">
-            <a:spAutoFit/>
-          </a:bodyPr>
-          <a:lstStyle/>
-          <a:p>
-            <a:pPr algn="ctr">
-              <a:defRPr>
-                <a:latin typeface="Roboto"/>
-              </a:defRPr>
-            </a:pPr>
-            <a:r>
-              <a:rPr sz="900" b="0">
-                <a:solidFill>
-                  <a:srgbClr val="5F6F63"/>
-                </a:solidFill>
-                <a:latin typeface="Roboto"/>
-              </a:rPr>
-              <a:t>Data retrieved 2pm, Tue 6 Oct 2026 · Sample data</a:t>
-            </a:r>
-          </a:p>
-        </p:txBody>
-      </p:sp>
-      <p:sp>
-        <p:nvSpPr>
-          <p:cNvPr id="15" name="TextBox 14"/>
-          <p:cNvSpPr txBox="1"/>
-          <p:nvPr/>
-        </p:nvSpPr>
-        <p:spPr>
-          <a:xfrm>
-            <a:off x="8503920" y="6492240"/>
-            <a:ext cx="3200400" cy="274320"/>
-          </a:xfrm>
-          <a:prstGeom prst="rect">
-            <a:avLst/>
-          </a:prstGeom>
-          <a:noFill/>
-        </p:spPr>
-        <p:txBody>
-          <a:bodyPr wrap="square">
-            <a:spAutoFit/>
-          </a:bodyPr>
-          <a:lstStyle/>
-          <a:p>
-            <a:pPr algn="r">
-              <a:defRPr>
-                <a:latin typeface="Roboto"/>
-              </a:defRPr>
-            </a:pPr>
-            <a:r>
-              <a:rPr sz="900" b="0">
-                <a:solidFill>
-                  <a:srgbClr val="5F6F63"/>
-                </a:solidFill>
-                <a:latin typeface="Roboto"/>
-              </a:rPr>
-              <a:t>Slide 5 of 11</a:t>
-            </a:r>
-          </a:p>
-        </p:txBody>
-      </p:sp>
-    </p:spTree>
-  </p:cSld>
-  <p:clrMapOvr>
-    <a:masterClrMapping/>
-  </p:clrMapOvr>
-</p:sld>
-</file>
-
-<file path=ppt/slides/slide6.xml><?xml version="1.0" encoding="utf-8"?>
-<p:sld xmlns:a="http://schemas.openxmlformats.org/drawingml/2006/main" xmlns:p="http://schemas.openxmlformats.org/presentationml/2006/main" xmlns:r="http://schemas.openxmlformats.org/officeDocument/2006/relationships">
-  <p:cSld>
-    <p:spTree>
-      <p:nvGrpSpPr>
-        <p:cNvPr id="1" name=""/>
-        <p:cNvGrpSpPr/>
-        <p:nvPr/>
-      </p:nvGrpSpPr>
-      <p:grpSpPr/>
-      <p:sp>
-        <p:nvSpPr>
-          <p:cNvPr id="2" name="Rectangle 1"/>
+        </p:nvGraphicFramePr>
+        <p:xfrm>
+          <a:off x="457200" y="2604516"/>
+          <a:ext cx="11277295" cy="2714244"/>
+        </p:xfrm>
+        <a:graphic>
+          <a:graphicData uri="http://schemas.openxmlformats.org/drawingml/2006/chart">
+            <c:chart xmlns:c="http://schemas.openxmlformats.org/drawingml/2006/chart" r:id="rId3"/>
+          </a:graphicData>
+        </a:graphic>
+      </p:graphicFrame>
+      <p:sp>
+        <p:nvSpPr>
+          <p:cNvPr id="15" name="Rectangle 14"/>
           <p:cNvSpPr/>
           <p:nvPr/>
         </p:nvSpPr>
         <p:spPr>
           <a:xfrm>
-            <a:off x="0" y="0"/>
-            <a:ext cx="12191695" cy="73152"/>
+            <a:off x="457200" y="5410200"/>
+            <a:ext cx="5501487" cy="899160"/>
           </a:xfrm>
           <a:prstGeom prst="rect">
             <a:avLst/>
           </a:prstGeom>
           <a:solidFill>
-            <a:srgbClr val="2F7A5D"/>
+            <a:srgbClr val="FFFFFF"/>
           </a:solidFill>
           <a:ln>
-            <a:noFill/>
+            <a:solidFill>
+              <a:srgbClr val="DCE8DC"/>
+            </a:solidFill>
           </a:ln>
         </p:spPr>
         <p:style>
@@ -6839,14 +8425,14 @@
       </p:sp>
       <p:sp>
         <p:nvSpPr>
-          <p:cNvPr id="3" name="TextBox 2"/>
+          <p:cNvPr id="16" name="TextBox 15"/>
           <p:cNvSpPr txBox="1"/>
           <p:nvPr/>
         </p:nvSpPr>
         <p:spPr>
           <a:xfrm>
-            <a:off x="457200" y="164592"/>
-            <a:ext cx="7315200" cy="274320"/>
+            <a:off x="594360" y="5465064"/>
+            <a:ext cx="5227167" cy="274320"/>
           </a:xfrm>
           <a:prstGeom prst="rect">
             <a:avLst/>
@@ -6854,7 +8440,7 @@
           <a:noFill/>
         </p:spPr>
         <p:txBody>
-          <a:bodyPr wrap="square">
+          <a:bodyPr wrap="square" lIns="45720" rIns="45720">
             <a:spAutoFit/>
           </a:bodyPr>
           <a:lstStyle/>
@@ -6865,27 +8451,27 @@
               </a:defRPr>
             </a:pPr>
             <a:r>
-              <a:rPr sz="1000" b="0">
+              <a:rPr sz="1000" b="1">
                 <a:solidFill>
                   <a:srgbClr val="5F6F63"/>
                 </a:solidFill>
                 <a:latin typeface="Roboto"/>
               </a:rPr>
-              <a:t>Sample Community Services Ltd · What does it cost to raise a dollar?</a:t>
-            </a:r>
-          </a:p>
-        </p:txBody>
-      </p:sp>
-      <p:sp>
-        <p:nvSpPr>
-          <p:cNvPr id="4" name="TextBox 3"/>
+              <a:t>WHAT IT SHOWS</a:t>
+            </a:r>
+          </a:p>
+        </p:txBody>
+      </p:sp>
+      <p:sp>
+        <p:nvSpPr>
+          <p:cNvPr id="17" name="TextBox 16"/>
           <p:cNvSpPr txBox="1"/>
           <p:nvPr/>
         </p:nvSpPr>
         <p:spPr>
           <a:xfrm>
-            <a:off x="457200" y="411480"/>
-            <a:ext cx="11247120" cy="548640"/>
+            <a:off x="594360" y="5739384"/>
+            <a:ext cx="5227167" cy="533400"/>
           </a:xfrm>
           <a:prstGeom prst="rect">
             <a:avLst/>
@@ -6893,7 +8479,7 @@
           <a:noFill/>
         </p:spPr>
         <p:txBody>
-          <a:bodyPr wrap="square">
+          <a:bodyPr wrap="square" lIns="45720" rIns="45720">
             <a:spAutoFit/>
           </a:bodyPr>
           <a:lstStyle/>
@@ -6904,33 +8490,33 @@
               </a:defRPr>
             </a:pPr>
             <a:r>
-              <a:rPr sz="2400" b="1">
+              <a:rPr sz="1200" b="0">
                 <a:solidFill>
                   <a:srgbClr val="25342A"/>
                 </a:solidFill>
                 <a:latin typeface="Roboto"/>
               </a:rPr>
-              <a:t>What it shows · Source: Grants</a:t>
-            </a:r>
-          </a:p>
-        </p:txBody>
-      </p:sp>
-      <p:sp>
-        <p:nvSpPr>
-          <p:cNvPr id="5" name="Rectangle 4"/>
+              <a:t>Fundraising events cost 41¢ to raise each dollar this financial year to date ($17,800 of event costs for $43,000).</a:t>
+            </a:r>
+          </a:p>
+        </p:txBody>
+      </p:sp>
+      <p:sp>
+        <p:nvSpPr>
+          <p:cNvPr id="18" name="Rectangle 17"/>
           <p:cNvSpPr/>
           <p:nvPr/>
         </p:nvSpPr>
         <p:spPr>
           <a:xfrm>
-            <a:off x="457200" y="1554480"/>
-            <a:ext cx="5501487" cy="4389120"/>
+            <a:off x="6233007" y="5410200"/>
+            <a:ext cx="5501487" cy="899160"/>
           </a:xfrm>
           <a:prstGeom prst="rect">
             <a:avLst/>
           </a:prstGeom>
           <a:solidFill>
-            <a:srgbClr val="FFFFFF"/>
+            <a:srgbClr val="EEF5F0"/>
           </a:solidFill>
           <a:ln>
             <a:solidFill>
@@ -6966,14 +8552,14 @@
       </p:sp>
       <p:sp>
         <p:nvSpPr>
-          <p:cNvPr id="6" name="TextBox 5"/>
+          <p:cNvPr id="19" name="TextBox 18"/>
           <p:cNvSpPr txBox="1"/>
           <p:nvPr/>
         </p:nvSpPr>
         <p:spPr>
           <a:xfrm>
-            <a:off x="685800" y="1691640"/>
-            <a:ext cx="5044287" cy="365760"/>
+            <a:off x="6370167" y="5465064"/>
+            <a:ext cx="5227167" cy="274320"/>
           </a:xfrm>
           <a:prstGeom prst="rect">
             <a:avLst/>
@@ -6981,7 +8567,7 @@
           <a:noFill/>
         </p:spPr>
         <p:txBody>
-          <a:bodyPr wrap="square">
+          <a:bodyPr wrap="square" lIns="45720" rIns="45720">
             <a:spAutoFit/>
           </a:bodyPr>
           <a:lstStyle/>
@@ -6992,27 +8578,27 @@
               </a:defRPr>
             </a:pPr>
             <a:r>
-              <a:rPr sz="1100" b="1">
+              <a:rPr sz="1000" b="1">
                 <a:solidFill>
                   <a:srgbClr val="5F6F63"/>
                 </a:solidFill>
                 <a:latin typeface="Roboto"/>
               </a:rPr>
-              <a:t>WHAT IT SHOWS</a:t>
-            </a:r>
-          </a:p>
-        </p:txBody>
-      </p:sp>
-      <p:sp>
-        <p:nvSpPr>
-          <p:cNvPr id="7" name="TextBox 6"/>
+              <a:t>WHAT YOU'D DO ABOUT IT</a:t>
+            </a:r>
+          </a:p>
+        </p:txBody>
+      </p:sp>
+      <p:sp>
+        <p:nvSpPr>
+          <p:cNvPr id="20" name="TextBox 19"/>
           <p:cNvSpPr txBox="1"/>
           <p:nvPr/>
         </p:nvSpPr>
         <p:spPr>
           <a:xfrm>
-            <a:off x="685800" y="2103120"/>
-            <a:ext cx="5044287" cy="3749039"/>
+            <a:off x="6370167" y="5739384"/>
+            <a:ext cx="5227167" cy="533400"/>
           </a:xfrm>
           <a:prstGeom prst="rect">
             <a:avLst/>
@@ -7020,7 +8606,7 @@
           <a:noFill/>
         </p:spPr>
         <p:txBody>
-          <a:bodyPr wrap="square">
+          <a:bodyPr wrap="square" lIns="45720" rIns="45720">
             <a:spAutoFit/>
           </a:bodyPr>
           <a:lstStyle/>
@@ -7031,76 +8617,27 @@
               </a:defRPr>
             </a:pPr>
             <a:r>
-              <a:rPr sz="1600" b="0">
+              <a:rPr sz="1200" b="0">
                 <a:solidFill>
                   <a:srgbClr val="25342A"/>
                 </a:solidFill>
                 <a:latin typeface="Roboto"/>
               </a:rPr>
-              <a:t>Grants cost 11¢ to raise each dollar this financial year to date ($56,800 of grant writing and reporting for $506,430).</a:t>
-            </a:r>
-          </a:p>
-        </p:txBody>
-      </p:sp>
-      <p:sp>
-        <p:nvSpPr>
-          <p:cNvPr id="8" name="Rectangle 7"/>
-          <p:cNvSpPr/>
-          <p:nvPr/>
-        </p:nvSpPr>
-        <p:spPr>
-          <a:xfrm>
-            <a:off x="6233007" y="1554480"/>
-            <a:ext cx="5501487" cy="4389120"/>
-          </a:xfrm>
-          <a:prstGeom prst="rect">
-            <a:avLst/>
-          </a:prstGeom>
-          <a:solidFill>
-            <a:srgbClr val="EEF5F0"/>
-          </a:solidFill>
-          <a:ln>
-            <a:solidFill>
-              <a:srgbClr val="DCE8DC"/>
-            </a:solidFill>
-          </a:ln>
-        </p:spPr>
-        <p:style>
-          <a:lnRef idx="1">
-            <a:schemeClr val="accent1"/>
-          </a:lnRef>
-          <a:fillRef idx="3">
-            <a:schemeClr val="accent1"/>
-          </a:fillRef>
-          <a:effectRef idx="2">
-            <a:schemeClr val="accent1"/>
-          </a:effectRef>
-          <a:fontRef idx="minor">
-            <a:schemeClr val="lt1"/>
-          </a:fontRef>
-        </p:style>
-        <p:txBody>
-          <a:bodyPr rtlCol="0" anchor="ctr"/>
-          <a:lstStyle/>
-          <a:p>
-            <a:pPr algn="ctr">
-              <a:defRPr>
-                <a:latin typeface="Roboto"/>
-              </a:defRPr>
-            </a:pPr>
-          </a:p>
-        </p:txBody>
-      </p:sp>
-      <p:sp>
-        <p:nvSpPr>
-          <p:cNvPr id="9" name="TextBox 8"/>
+              <a:t>Usually the dearest money to raise: events are worth counting for what else they bring too (new donors, profile).</a:t>
+            </a:r>
+          </a:p>
+        </p:txBody>
+      </p:sp>
+      <p:sp>
+        <p:nvSpPr>
+          <p:cNvPr id="21" name="TextBox 20"/>
           <p:cNvSpPr txBox="1"/>
           <p:nvPr/>
         </p:nvSpPr>
         <p:spPr>
           <a:xfrm>
-            <a:off x="6461607" y="1691640"/>
-            <a:ext cx="5044287" cy="365760"/>
+            <a:off x="457200" y="6492240"/>
+            <a:ext cx="2926080" cy="274320"/>
           </a:xfrm>
           <a:prstGeom prst="rect">
             <a:avLst/>
@@ -7108,7 +8645,7 @@
           <a:noFill/>
         </p:spPr>
         <p:txBody>
-          <a:bodyPr wrap="square">
+          <a:bodyPr wrap="square" lIns="45720" rIns="45720">
             <a:spAutoFit/>
           </a:bodyPr>
           <a:lstStyle/>
@@ -7119,27 +8656,27 @@
               </a:defRPr>
             </a:pPr>
             <a:r>
-              <a:rPr sz="1100" b="1">
+              <a:rPr sz="900" b="0">
                 <a:solidFill>
                   <a:srgbClr val="5F6F63"/>
                 </a:solidFill>
                 <a:latin typeface="Roboto"/>
               </a:rPr>
-              <a:t>WHAT YOU'D DO ABOUT IT</a:t>
-            </a:r>
-          </a:p>
-        </p:txBody>
-      </p:sp>
-      <p:sp>
-        <p:nvSpPr>
-          <p:cNvPr id="10" name="TextBox 9"/>
+              <a:t>cost-to-raise.pptx</a:t>
+            </a:r>
+          </a:p>
+        </p:txBody>
+      </p:sp>
+      <p:sp>
+        <p:nvSpPr>
+          <p:cNvPr id="22" name="TextBox 21"/>
           <p:cNvSpPr txBox="1"/>
           <p:nvPr/>
         </p:nvSpPr>
         <p:spPr>
           <a:xfrm>
-            <a:off x="6461607" y="2103120"/>
-            <a:ext cx="5044287" cy="3749039"/>
+            <a:off x="3108960" y="6492240"/>
+            <a:ext cx="5943600" cy="274320"/>
           </a:xfrm>
           <a:prstGeom prst="rect">
             <a:avLst/>
@@ -7147,38 +8684,38 @@
           <a:noFill/>
         </p:spPr>
         <p:txBody>
-          <a:bodyPr wrap="square">
+          <a:bodyPr wrap="square" lIns="45720" rIns="45720">
             <a:spAutoFit/>
           </a:bodyPr>
           <a:lstStyle/>
           <a:p>
-            <a:pPr>
-              <a:defRPr>
-                <a:latin typeface="Roboto"/>
-              </a:defRPr>
-            </a:pPr>
-            <a:r>
-              <a:rPr sz="1600" b="0">
-                <a:solidFill>
-                  <a:srgbClr val="25342A"/>
+            <a:pPr algn="ctr">
+              <a:defRPr>
+                <a:latin typeface="Roboto"/>
+              </a:defRPr>
+            </a:pPr>
+            <a:r>
+              <a:rPr sz="900" b="0">
+                <a:solidFill>
+                  <a:srgbClr val="5F6F63"/>
                 </a:solidFill>
                 <a:latin typeface="Roboto"/>
               </a:rPr>
-              <a:t>Usually the cheapest money to raise, as long as the time that goes into applications and acquittals is protected.</a:t>
-            </a:r>
-          </a:p>
-        </p:txBody>
-      </p:sp>
-      <p:sp>
-        <p:nvSpPr>
-          <p:cNvPr id="11" name="TextBox 10"/>
+              <a:t>Data retrieved 2pm, Tue 6 Oct 2026 · Generated 8 Oct 2026, 9:35am · Sample data · Made with Python (python-pptx)</a:t>
+            </a:r>
+          </a:p>
+        </p:txBody>
+      </p:sp>
+      <p:sp>
+        <p:nvSpPr>
+          <p:cNvPr id="23" name="TextBox 22"/>
           <p:cNvSpPr txBox="1"/>
           <p:nvPr/>
         </p:nvSpPr>
         <p:spPr>
           <a:xfrm>
-            <a:off x="457200" y="6492240"/>
-            <a:ext cx="3657600" cy="274320"/>
+            <a:off x="8503920" y="6492240"/>
+            <a:ext cx="3200400" cy="274320"/>
           </a:xfrm>
           <a:prstGeom prst="rect">
             <a:avLst/>
@@ -7186,12 +8723,12 @@
           <a:noFill/>
         </p:spPr>
         <p:txBody>
-          <a:bodyPr wrap="square">
+          <a:bodyPr wrap="square" lIns="45720" rIns="45720">
             <a:spAutoFit/>
           </a:bodyPr>
           <a:lstStyle/>
           <a:p>
-            <a:pPr>
+            <a:pPr algn="r">
               <a:defRPr>
                 <a:latin typeface="Roboto"/>
               </a:defRPr>
@@ -7203,1783 +8740,7 @@
                 </a:solidFill>
                 <a:latin typeface="Roboto"/>
               </a:rPr>
-              <a:t>cost-to-raise.pptx</a:t>
-            </a:r>
-          </a:p>
-        </p:txBody>
-      </p:sp>
-      <p:sp>
-        <p:nvSpPr>
-          <p:cNvPr id="12" name="TextBox 11"/>
-          <p:cNvSpPr txBox="1"/>
-          <p:nvPr/>
-        </p:nvSpPr>
-        <p:spPr>
-          <a:xfrm>
-            <a:off x="4297680" y="6492240"/>
-            <a:ext cx="3657600" cy="274320"/>
-          </a:xfrm>
-          <a:prstGeom prst="rect">
-            <a:avLst/>
-          </a:prstGeom>
-          <a:noFill/>
-        </p:spPr>
-        <p:txBody>
-          <a:bodyPr wrap="square">
-            <a:spAutoFit/>
-          </a:bodyPr>
-          <a:lstStyle/>
-          <a:p>
-            <a:pPr algn="ctr">
-              <a:defRPr>
-                <a:latin typeface="Roboto"/>
-              </a:defRPr>
-            </a:pPr>
-            <a:r>
-              <a:rPr sz="900" b="0">
-                <a:solidFill>
-                  <a:srgbClr val="5F6F63"/>
-                </a:solidFill>
-                <a:latin typeface="Roboto"/>
-              </a:rPr>
-              <a:t>Data retrieved 2pm, Tue 6 Oct 2026 · Sample data</a:t>
-            </a:r>
-          </a:p>
-        </p:txBody>
-      </p:sp>
-      <p:sp>
-        <p:nvSpPr>
-          <p:cNvPr id="13" name="TextBox 12"/>
-          <p:cNvSpPr txBox="1"/>
-          <p:nvPr/>
-        </p:nvSpPr>
-        <p:spPr>
-          <a:xfrm>
-            <a:off x="8503920" y="6492240"/>
-            <a:ext cx="3200400" cy="274320"/>
-          </a:xfrm>
-          <a:prstGeom prst="rect">
-            <a:avLst/>
-          </a:prstGeom>
-          <a:noFill/>
-        </p:spPr>
-        <p:txBody>
-          <a:bodyPr wrap="square">
-            <a:spAutoFit/>
-          </a:bodyPr>
-          <a:lstStyle/>
-          <a:p>
-            <a:pPr algn="r">
-              <a:defRPr>
-                <a:latin typeface="Roboto"/>
-              </a:defRPr>
-            </a:pPr>
-            <a:r>
-              <a:rPr sz="900" b="0">
-                <a:solidFill>
-                  <a:srgbClr val="5F6F63"/>
-                </a:solidFill>
-                <a:latin typeface="Roboto"/>
-              </a:rPr>
-              <a:t>Slide 6 of 11</a:t>
-            </a:r>
-          </a:p>
-        </p:txBody>
-      </p:sp>
-    </p:spTree>
-  </p:cSld>
-  <p:clrMapOvr>
-    <a:masterClrMapping/>
-  </p:clrMapOvr>
-</p:sld>
-</file>
-
-<file path=ppt/slides/slide7.xml><?xml version="1.0" encoding="utf-8"?>
-<p:sld xmlns:a="http://schemas.openxmlformats.org/drawingml/2006/main" xmlns:p="http://schemas.openxmlformats.org/presentationml/2006/main" xmlns:r="http://schemas.openxmlformats.org/officeDocument/2006/relationships">
-  <p:cSld>
-    <p:spTree>
-      <p:nvGrpSpPr>
-        <p:cNvPr id="1" name=""/>
-        <p:cNvGrpSpPr/>
-        <p:nvPr/>
-      </p:nvGrpSpPr>
-      <p:grpSpPr/>
-      <p:sp>
-        <p:nvSpPr>
-          <p:cNvPr id="2" name="Rectangle 1"/>
-          <p:cNvSpPr/>
-          <p:nvPr/>
-        </p:nvSpPr>
-        <p:spPr>
-          <a:xfrm>
-            <a:off x="0" y="0"/>
-            <a:ext cx="12191695" cy="73152"/>
-          </a:xfrm>
-          <a:prstGeom prst="rect">
-            <a:avLst/>
-          </a:prstGeom>
-          <a:solidFill>
-            <a:srgbClr val="2F7A5D"/>
-          </a:solidFill>
-          <a:ln>
-            <a:noFill/>
-          </a:ln>
-        </p:spPr>
-        <p:style>
-          <a:lnRef idx="1">
-            <a:schemeClr val="accent1"/>
-          </a:lnRef>
-          <a:fillRef idx="3">
-            <a:schemeClr val="accent1"/>
-          </a:fillRef>
-          <a:effectRef idx="2">
-            <a:schemeClr val="accent1"/>
-          </a:effectRef>
-          <a:fontRef idx="minor">
-            <a:schemeClr val="lt1"/>
-          </a:fontRef>
-        </p:style>
-        <p:txBody>
-          <a:bodyPr rtlCol="0" anchor="ctr"/>
-          <a:lstStyle/>
-          <a:p>
-            <a:pPr algn="ctr">
-              <a:defRPr>
-                <a:latin typeface="Roboto"/>
-              </a:defRPr>
-            </a:pPr>
-          </a:p>
-        </p:txBody>
-      </p:sp>
-      <p:sp>
-        <p:nvSpPr>
-          <p:cNvPr id="3" name="TextBox 2"/>
-          <p:cNvSpPr txBox="1"/>
-          <p:nvPr/>
-        </p:nvSpPr>
-        <p:spPr>
-          <a:xfrm>
-            <a:off x="457200" y="164592"/>
-            <a:ext cx="7315200" cy="274320"/>
-          </a:xfrm>
-          <a:prstGeom prst="rect">
-            <a:avLst/>
-          </a:prstGeom>
-          <a:noFill/>
-        </p:spPr>
-        <p:txBody>
-          <a:bodyPr wrap="square">
-            <a:spAutoFit/>
-          </a:bodyPr>
-          <a:lstStyle/>
-          <a:p>
-            <a:pPr>
-              <a:defRPr>
-                <a:latin typeface="Roboto"/>
-              </a:defRPr>
-            </a:pPr>
-            <a:r>
-              <a:rPr sz="1000" b="0">
-                <a:solidFill>
-                  <a:srgbClr val="5F6F63"/>
-                </a:solidFill>
-                <a:latin typeface="Roboto"/>
-              </a:rPr>
-              <a:t>Sample Community Services Ltd · What does it cost to raise a dollar?</a:t>
-            </a:r>
-          </a:p>
-        </p:txBody>
-      </p:sp>
-      <p:sp>
-        <p:nvSpPr>
-          <p:cNvPr id="4" name="TextBox 3"/>
-          <p:cNvSpPr txBox="1"/>
-          <p:nvPr/>
-        </p:nvSpPr>
-        <p:spPr>
-          <a:xfrm>
-            <a:off x="457200" y="411480"/>
-            <a:ext cx="11247120" cy="548640"/>
-          </a:xfrm>
-          <a:prstGeom prst="rect">
-            <a:avLst/>
-          </a:prstGeom>
-          <a:noFill/>
-        </p:spPr>
-        <p:txBody>
-          <a:bodyPr wrap="square">
-            <a:spAutoFit/>
-          </a:bodyPr>
-          <a:lstStyle/>
-          <a:p>
-            <a:pPr>
-              <a:defRPr>
-                <a:latin typeface="Roboto"/>
-              </a:defRPr>
-            </a:pPr>
-            <a:r>
-              <a:rPr sz="2400" b="1">
-                <a:solidFill>
-                  <a:srgbClr val="25342A"/>
-                </a:solidFill>
-                <a:latin typeface="Roboto"/>
-              </a:rPr>
-              <a:t>Headline numbers · Source: Donations</a:t>
-            </a:r>
-          </a:p>
-        </p:txBody>
-      </p:sp>
-      <p:sp>
-        <p:nvSpPr>
-          <p:cNvPr id="5" name="Rectangle 4"/>
-          <p:cNvSpPr/>
-          <p:nvPr/>
-        </p:nvSpPr>
-        <p:spPr>
-          <a:xfrm>
-            <a:off x="457200" y="1645920"/>
-            <a:ext cx="5501487" cy="2011680"/>
-          </a:xfrm>
-          <a:prstGeom prst="rect">
-            <a:avLst/>
-          </a:prstGeom>
-          <a:solidFill>
-            <a:srgbClr val="F7FAF7"/>
-          </a:solidFill>
-          <a:ln>
-            <a:solidFill>
-              <a:srgbClr val="DCE8DC"/>
-            </a:solidFill>
-          </a:ln>
-        </p:spPr>
-        <p:style>
-          <a:lnRef idx="1">
-            <a:schemeClr val="accent1"/>
-          </a:lnRef>
-          <a:fillRef idx="3">
-            <a:schemeClr val="accent1"/>
-          </a:fillRef>
-          <a:effectRef idx="2">
-            <a:schemeClr val="accent1"/>
-          </a:effectRef>
-          <a:fontRef idx="minor">
-            <a:schemeClr val="lt1"/>
-          </a:fontRef>
-        </p:style>
-        <p:txBody>
-          <a:bodyPr rtlCol="0" anchor="ctr"/>
-          <a:lstStyle/>
-          <a:p>
-            <a:pPr algn="ctr">
-              <a:defRPr>
-                <a:latin typeface="Roboto"/>
-              </a:defRPr>
-            </a:pPr>
-          </a:p>
-        </p:txBody>
-      </p:sp>
-      <p:sp>
-        <p:nvSpPr>
-          <p:cNvPr id="6" name="TextBox 5"/>
-          <p:cNvSpPr txBox="1"/>
-          <p:nvPr/>
-        </p:nvSpPr>
-        <p:spPr>
-          <a:xfrm>
-            <a:off x="640080" y="1783080"/>
-            <a:ext cx="5135727" cy="457200"/>
-          </a:xfrm>
-          <a:prstGeom prst="rect">
-            <a:avLst/>
-          </a:prstGeom>
-          <a:noFill/>
-        </p:spPr>
-        <p:txBody>
-          <a:bodyPr wrap="square">
-            <a:spAutoFit/>
-          </a:bodyPr>
-          <a:lstStyle/>
-          <a:p>
-            <a:pPr>
-              <a:defRPr>
-                <a:latin typeface="Roboto"/>
-              </a:defRPr>
-            </a:pPr>
-            <a:r>
-              <a:rPr sz="1200" b="0">
-                <a:solidFill>
-                  <a:srgbClr val="5F6F63"/>
-                </a:solidFill>
-                <a:latin typeface="Roboto"/>
-              </a:rPr>
-              <a:t>February · Donations</a:t>
-            </a:r>
-          </a:p>
-        </p:txBody>
-      </p:sp>
-      <p:sp>
-        <p:nvSpPr>
-          <p:cNvPr id="7" name="TextBox 6"/>
-          <p:cNvSpPr txBox="1"/>
-          <p:nvPr/>
-        </p:nvSpPr>
-        <p:spPr>
-          <a:xfrm>
-            <a:off x="640080" y="2240280"/>
-            <a:ext cx="5135727" cy="731520"/>
-          </a:xfrm>
-          <a:prstGeom prst="rect">
-            <a:avLst/>
-          </a:prstGeom>
-          <a:noFill/>
-        </p:spPr>
-        <p:txBody>
-          <a:bodyPr wrap="square">
-            <a:spAutoFit/>
-          </a:bodyPr>
-          <a:lstStyle/>
-          <a:p>
-            <a:pPr>
-              <a:defRPr>
-                <a:latin typeface="Roboto"/>
-              </a:defRPr>
-            </a:pPr>
-            <a:r>
-              <a:rPr sz="3000" b="1">
-                <a:solidFill>
-                  <a:srgbClr val="2F7A5D"/>
-                </a:solidFill>
-                <a:latin typeface="Roboto"/>
-              </a:rPr>
-              <a:t>13¢</a:t>
-            </a:r>
-          </a:p>
-        </p:txBody>
-      </p:sp>
-      <p:sp>
-        <p:nvSpPr>
-          <p:cNvPr id="8" name="TextBox 7"/>
-          <p:cNvSpPr txBox="1"/>
-          <p:nvPr/>
-        </p:nvSpPr>
-        <p:spPr>
-          <a:xfrm>
-            <a:off x="640080" y="3017520"/>
-            <a:ext cx="5135727" cy="548640"/>
-          </a:xfrm>
-          <a:prstGeom prst="rect">
-            <a:avLst/>
-          </a:prstGeom>
-          <a:noFill/>
-        </p:spPr>
-        <p:txBody>
-          <a:bodyPr wrap="square">
-            <a:spAutoFit/>
-          </a:bodyPr>
-          <a:lstStyle/>
-          <a:p>
-            <a:pPr>
-              <a:defRPr>
-                <a:latin typeface="Roboto"/>
-              </a:defRPr>
-            </a:pPr>
-            <a:r>
-              <a:rPr sz="1100" b="0">
-                <a:solidFill>
-                  <a:srgbClr val="5F6F63"/>
-                </a:solidFill>
-                <a:latin typeface="Roboto"/>
-              </a:rPr>
-              <a:t>January 17¢</a:t>
-            </a:r>
-          </a:p>
-        </p:txBody>
-      </p:sp>
-      <p:sp>
-        <p:nvSpPr>
-          <p:cNvPr id="9" name="Rectangle 8"/>
-          <p:cNvSpPr/>
-          <p:nvPr/>
-        </p:nvSpPr>
-        <p:spPr>
-          <a:xfrm>
-            <a:off x="6233007" y="1645920"/>
-            <a:ext cx="5501487" cy="2011680"/>
-          </a:xfrm>
-          <a:prstGeom prst="rect">
-            <a:avLst/>
-          </a:prstGeom>
-          <a:solidFill>
-            <a:srgbClr val="F7FAF7"/>
-          </a:solidFill>
-          <a:ln>
-            <a:solidFill>
-              <a:srgbClr val="DCE8DC"/>
-            </a:solidFill>
-          </a:ln>
-        </p:spPr>
-        <p:style>
-          <a:lnRef idx="1">
-            <a:schemeClr val="accent1"/>
-          </a:lnRef>
-          <a:fillRef idx="3">
-            <a:schemeClr val="accent1"/>
-          </a:fillRef>
-          <a:effectRef idx="2">
-            <a:schemeClr val="accent1"/>
-          </a:effectRef>
-          <a:fontRef idx="minor">
-            <a:schemeClr val="lt1"/>
-          </a:fontRef>
-        </p:style>
-        <p:txBody>
-          <a:bodyPr rtlCol="0" anchor="ctr"/>
-          <a:lstStyle/>
-          <a:p>
-            <a:pPr algn="ctr">
-              <a:defRPr>
-                <a:latin typeface="Roboto"/>
-              </a:defRPr>
-            </a:pPr>
-          </a:p>
-        </p:txBody>
-      </p:sp>
-      <p:sp>
-        <p:nvSpPr>
-          <p:cNvPr id="10" name="TextBox 9"/>
-          <p:cNvSpPr txBox="1"/>
-          <p:nvPr/>
-        </p:nvSpPr>
-        <p:spPr>
-          <a:xfrm>
-            <a:off x="6415887" y="1783080"/>
-            <a:ext cx="5135727" cy="457200"/>
-          </a:xfrm>
-          <a:prstGeom prst="rect">
-            <a:avLst/>
-          </a:prstGeom>
-          <a:noFill/>
-        </p:spPr>
-        <p:txBody>
-          <a:bodyPr wrap="square">
-            <a:spAutoFit/>
-          </a:bodyPr>
-          <a:lstStyle/>
-          <a:p>
-            <a:pPr>
-              <a:defRPr>
-                <a:latin typeface="Roboto"/>
-              </a:defRPr>
-            </a:pPr>
-            <a:r>
-              <a:rPr sz="1200" b="0">
-                <a:solidFill>
-                  <a:srgbClr val="5F6F63"/>
-                </a:solidFill>
-                <a:latin typeface="Roboto"/>
-              </a:rPr>
-              <a:t>Year to date (Jul to Feb 2026)</a:t>
-            </a:r>
-          </a:p>
-        </p:txBody>
-      </p:sp>
-      <p:sp>
-        <p:nvSpPr>
-          <p:cNvPr id="11" name="TextBox 10"/>
-          <p:cNvSpPr txBox="1"/>
-          <p:nvPr/>
-        </p:nvSpPr>
-        <p:spPr>
-          <a:xfrm>
-            <a:off x="6415887" y="2240280"/>
-            <a:ext cx="5135727" cy="731520"/>
-          </a:xfrm>
-          <a:prstGeom prst="rect">
-            <a:avLst/>
-          </a:prstGeom>
-          <a:noFill/>
-        </p:spPr>
-        <p:txBody>
-          <a:bodyPr wrap="square">
-            <a:spAutoFit/>
-          </a:bodyPr>
-          <a:lstStyle/>
-          <a:p>
-            <a:pPr>
-              <a:defRPr>
-                <a:latin typeface="Roboto"/>
-              </a:defRPr>
-            </a:pPr>
-            <a:r>
-              <a:rPr sz="3000" b="1">
-                <a:solidFill>
-                  <a:srgbClr val="2F7A5D"/>
-                </a:solidFill>
-                <a:latin typeface="Roboto"/>
-              </a:rPr>
-              <a:t>15¢</a:t>
-            </a:r>
-          </a:p>
-        </p:txBody>
-      </p:sp>
-      <p:sp>
-        <p:nvSpPr>
-          <p:cNvPr id="12" name="TextBox 11"/>
-          <p:cNvSpPr txBox="1"/>
-          <p:nvPr/>
-        </p:nvSpPr>
-        <p:spPr>
-          <a:xfrm>
-            <a:off x="6415887" y="3017520"/>
-            <a:ext cx="5135727" cy="548640"/>
-          </a:xfrm>
-          <a:prstGeom prst="rect">
-            <a:avLst/>
-          </a:prstGeom>
-          <a:noFill/>
-        </p:spPr>
-        <p:txBody>
-          <a:bodyPr wrap="square">
-            <a:spAutoFit/>
-          </a:bodyPr>
-          <a:lstStyle/>
-          <a:p>
-            <a:pPr>
-              <a:defRPr>
-                <a:latin typeface="Roboto"/>
-              </a:defRPr>
-            </a:pPr>
-            <a:r>
-              <a:rPr sz="1100" b="0">
-                <a:solidFill>
-                  <a:srgbClr val="5F6F63"/>
-                </a:solidFill>
-                <a:latin typeface="Roboto"/>
-              </a:rPr>
-              <a:t>same period last year: not in the data</a:t>
-            </a:r>
-          </a:p>
-        </p:txBody>
-      </p:sp>
-      <p:sp>
-        <p:nvSpPr>
-          <p:cNvPr id="13" name="TextBox 12"/>
-          <p:cNvSpPr txBox="1"/>
-          <p:nvPr/>
-        </p:nvSpPr>
-        <p:spPr>
-          <a:xfrm>
-            <a:off x="457200" y="6492240"/>
-            <a:ext cx="3657600" cy="274320"/>
-          </a:xfrm>
-          <a:prstGeom prst="rect">
-            <a:avLst/>
-          </a:prstGeom>
-          <a:noFill/>
-        </p:spPr>
-        <p:txBody>
-          <a:bodyPr wrap="square">
-            <a:spAutoFit/>
-          </a:bodyPr>
-          <a:lstStyle/>
-          <a:p>
-            <a:pPr>
-              <a:defRPr>
-                <a:latin typeface="Roboto"/>
-              </a:defRPr>
-            </a:pPr>
-            <a:r>
-              <a:rPr sz="900" b="0">
-                <a:solidFill>
-                  <a:srgbClr val="5F6F63"/>
-                </a:solidFill>
-                <a:latin typeface="Roboto"/>
-              </a:rPr>
-              <a:t>cost-to-raise.pptx</a:t>
-            </a:r>
-          </a:p>
-        </p:txBody>
-      </p:sp>
-      <p:sp>
-        <p:nvSpPr>
-          <p:cNvPr id="14" name="TextBox 13"/>
-          <p:cNvSpPr txBox="1"/>
-          <p:nvPr/>
-        </p:nvSpPr>
-        <p:spPr>
-          <a:xfrm>
-            <a:off x="4297680" y="6492240"/>
-            <a:ext cx="3657600" cy="274320"/>
-          </a:xfrm>
-          <a:prstGeom prst="rect">
-            <a:avLst/>
-          </a:prstGeom>
-          <a:noFill/>
-        </p:spPr>
-        <p:txBody>
-          <a:bodyPr wrap="square">
-            <a:spAutoFit/>
-          </a:bodyPr>
-          <a:lstStyle/>
-          <a:p>
-            <a:pPr algn="ctr">
-              <a:defRPr>
-                <a:latin typeface="Roboto"/>
-              </a:defRPr>
-            </a:pPr>
-            <a:r>
-              <a:rPr sz="900" b="0">
-                <a:solidFill>
-                  <a:srgbClr val="5F6F63"/>
-                </a:solidFill>
-                <a:latin typeface="Roboto"/>
-              </a:rPr>
-              <a:t>Data retrieved 2pm, Tue 6 Oct 2026 · Sample data</a:t>
-            </a:r>
-          </a:p>
-        </p:txBody>
-      </p:sp>
-      <p:sp>
-        <p:nvSpPr>
-          <p:cNvPr id="15" name="TextBox 14"/>
-          <p:cNvSpPr txBox="1"/>
-          <p:nvPr/>
-        </p:nvSpPr>
-        <p:spPr>
-          <a:xfrm>
-            <a:off x="8503920" y="6492240"/>
-            <a:ext cx="3200400" cy="274320"/>
-          </a:xfrm>
-          <a:prstGeom prst="rect">
-            <a:avLst/>
-          </a:prstGeom>
-          <a:noFill/>
-        </p:spPr>
-        <p:txBody>
-          <a:bodyPr wrap="square">
-            <a:spAutoFit/>
-          </a:bodyPr>
-          <a:lstStyle/>
-          <a:p>
-            <a:pPr algn="r">
-              <a:defRPr>
-                <a:latin typeface="Roboto"/>
-              </a:defRPr>
-            </a:pPr>
-            <a:r>
-              <a:rPr sz="900" b="0">
-                <a:solidFill>
-                  <a:srgbClr val="5F6F63"/>
-                </a:solidFill>
-                <a:latin typeface="Roboto"/>
-              </a:rPr>
-              <a:t>Slide 7 of 11</a:t>
-            </a:r>
-          </a:p>
-        </p:txBody>
-      </p:sp>
-    </p:spTree>
-  </p:cSld>
-  <p:clrMapOvr>
-    <a:masterClrMapping/>
-  </p:clrMapOvr>
-</p:sld>
-</file>
-
-<file path=ppt/slides/slide8.xml><?xml version="1.0" encoding="utf-8"?>
-<p:sld xmlns:a="http://schemas.openxmlformats.org/drawingml/2006/main" xmlns:p="http://schemas.openxmlformats.org/presentationml/2006/main" xmlns:r="http://schemas.openxmlformats.org/officeDocument/2006/relationships">
-  <p:cSld>
-    <p:spTree>
-      <p:nvGrpSpPr>
-        <p:cNvPr id="1" name=""/>
-        <p:cNvGrpSpPr/>
-        <p:nvPr/>
-      </p:nvGrpSpPr>
-      <p:grpSpPr/>
-      <p:sp>
-        <p:nvSpPr>
-          <p:cNvPr id="2" name="Rectangle 1"/>
-          <p:cNvSpPr/>
-          <p:nvPr/>
-        </p:nvSpPr>
-        <p:spPr>
-          <a:xfrm>
-            <a:off x="0" y="0"/>
-            <a:ext cx="12191695" cy="73152"/>
-          </a:xfrm>
-          <a:prstGeom prst="rect">
-            <a:avLst/>
-          </a:prstGeom>
-          <a:solidFill>
-            <a:srgbClr val="2F7A5D"/>
-          </a:solidFill>
-          <a:ln>
-            <a:noFill/>
-          </a:ln>
-        </p:spPr>
-        <p:style>
-          <a:lnRef idx="1">
-            <a:schemeClr val="accent1"/>
-          </a:lnRef>
-          <a:fillRef idx="3">
-            <a:schemeClr val="accent1"/>
-          </a:fillRef>
-          <a:effectRef idx="2">
-            <a:schemeClr val="accent1"/>
-          </a:effectRef>
-          <a:fontRef idx="minor">
-            <a:schemeClr val="lt1"/>
-          </a:fontRef>
-        </p:style>
-        <p:txBody>
-          <a:bodyPr rtlCol="0" anchor="ctr"/>
-          <a:lstStyle/>
-          <a:p>
-            <a:pPr algn="ctr">
-              <a:defRPr>
-                <a:latin typeface="Roboto"/>
-              </a:defRPr>
-            </a:pPr>
-          </a:p>
-        </p:txBody>
-      </p:sp>
-      <p:sp>
-        <p:nvSpPr>
-          <p:cNvPr id="3" name="TextBox 2"/>
-          <p:cNvSpPr txBox="1"/>
-          <p:nvPr/>
-        </p:nvSpPr>
-        <p:spPr>
-          <a:xfrm>
-            <a:off x="457200" y="164592"/>
-            <a:ext cx="7315200" cy="274320"/>
-          </a:xfrm>
-          <a:prstGeom prst="rect">
-            <a:avLst/>
-          </a:prstGeom>
-          <a:noFill/>
-        </p:spPr>
-        <p:txBody>
-          <a:bodyPr wrap="square">
-            <a:spAutoFit/>
-          </a:bodyPr>
-          <a:lstStyle/>
-          <a:p>
-            <a:pPr>
-              <a:defRPr>
-                <a:latin typeface="Roboto"/>
-              </a:defRPr>
-            </a:pPr>
-            <a:r>
-              <a:rPr sz="1000" b="0">
-                <a:solidFill>
-                  <a:srgbClr val="5F6F63"/>
-                </a:solidFill>
-                <a:latin typeface="Roboto"/>
-              </a:rPr>
-              <a:t>Sample Community Services Ltd · What does it cost to raise a dollar?</a:t>
-            </a:r>
-          </a:p>
-        </p:txBody>
-      </p:sp>
-      <p:sp>
-        <p:nvSpPr>
-          <p:cNvPr id="4" name="TextBox 3"/>
-          <p:cNvSpPr txBox="1"/>
-          <p:nvPr/>
-        </p:nvSpPr>
-        <p:spPr>
-          <a:xfrm>
-            <a:off x="457200" y="411480"/>
-            <a:ext cx="11247120" cy="548640"/>
-          </a:xfrm>
-          <a:prstGeom prst="rect">
-            <a:avLst/>
-          </a:prstGeom>
-          <a:noFill/>
-        </p:spPr>
-        <p:txBody>
-          <a:bodyPr wrap="square">
-            <a:spAutoFit/>
-          </a:bodyPr>
-          <a:lstStyle/>
-          <a:p>
-            <a:pPr>
-              <a:defRPr>
-                <a:latin typeface="Roboto"/>
-              </a:defRPr>
-            </a:pPr>
-            <a:r>
-              <a:rPr sz="2400" b="1">
-                <a:solidFill>
-                  <a:srgbClr val="25342A"/>
-                </a:solidFill>
-                <a:latin typeface="Roboto"/>
-              </a:rPr>
-              <a:t>What it shows · Source: Donations</a:t>
-            </a:r>
-          </a:p>
-        </p:txBody>
-      </p:sp>
-      <p:sp>
-        <p:nvSpPr>
-          <p:cNvPr id="5" name="Rectangle 4"/>
-          <p:cNvSpPr/>
-          <p:nvPr/>
-        </p:nvSpPr>
-        <p:spPr>
-          <a:xfrm>
-            <a:off x="457200" y="1554480"/>
-            <a:ext cx="5501487" cy="4389120"/>
-          </a:xfrm>
-          <a:prstGeom prst="rect">
-            <a:avLst/>
-          </a:prstGeom>
-          <a:solidFill>
-            <a:srgbClr val="FFFFFF"/>
-          </a:solidFill>
-          <a:ln>
-            <a:solidFill>
-              <a:srgbClr val="DCE8DC"/>
-            </a:solidFill>
-          </a:ln>
-        </p:spPr>
-        <p:style>
-          <a:lnRef idx="1">
-            <a:schemeClr val="accent1"/>
-          </a:lnRef>
-          <a:fillRef idx="3">
-            <a:schemeClr val="accent1"/>
-          </a:fillRef>
-          <a:effectRef idx="2">
-            <a:schemeClr val="accent1"/>
-          </a:effectRef>
-          <a:fontRef idx="minor">
-            <a:schemeClr val="lt1"/>
-          </a:fontRef>
-        </p:style>
-        <p:txBody>
-          <a:bodyPr rtlCol="0" anchor="ctr"/>
-          <a:lstStyle/>
-          <a:p>
-            <a:pPr algn="ctr">
-              <a:defRPr>
-                <a:latin typeface="Roboto"/>
-              </a:defRPr>
-            </a:pPr>
-          </a:p>
-        </p:txBody>
-      </p:sp>
-      <p:sp>
-        <p:nvSpPr>
-          <p:cNvPr id="6" name="TextBox 5"/>
-          <p:cNvSpPr txBox="1"/>
-          <p:nvPr/>
-        </p:nvSpPr>
-        <p:spPr>
-          <a:xfrm>
-            <a:off x="685800" y="1691640"/>
-            <a:ext cx="5044287" cy="365760"/>
-          </a:xfrm>
-          <a:prstGeom prst="rect">
-            <a:avLst/>
-          </a:prstGeom>
-          <a:noFill/>
-        </p:spPr>
-        <p:txBody>
-          <a:bodyPr wrap="square">
-            <a:spAutoFit/>
-          </a:bodyPr>
-          <a:lstStyle/>
-          <a:p>
-            <a:pPr>
-              <a:defRPr>
-                <a:latin typeface="Roboto"/>
-              </a:defRPr>
-            </a:pPr>
-            <a:r>
-              <a:rPr sz="1100" b="1">
-                <a:solidFill>
-                  <a:srgbClr val="5F6F63"/>
-                </a:solidFill>
-                <a:latin typeface="Roboto"/>
-              </a:rPr>
-              <a:t>WHAT IT SHOWS</a:t>
-            </a:r>
-          </a:p>
-        </p:txBody>
-      </p:sp>
-      <p:sp>
-        <p:nvSpPr>
-          <p:cNvPr id="7" name="TextBox 6"/>
-          <p:cNvSpPr txBox="1"/>
-          <p:nvPr/>
-        </p:nvSpPr>
-        <p:spPr>
-          <a:xfrm>
-            <a:off x="685800" y="2103120"/>
-            <a:ext cx="5044287" cy="3749039"/>
-          </a:xfrm>
-          <a:prstGeom prst="rect">
-            <a:avLst/>
-          </a:prstGeom>
-          <a:noFill/>
-        </p:spPr>
-        <p:txBody>
-          <a:bodyPr wrap="square">
-            <a:spAutoFit/>
-          </a:bodyPr>
-          <a:lstStyle/>
-          <a:p>
-            <a:pPr>
-              <a:defRPr>
-                <a:latin typeface="Roboto"/>
-              </a:defRPr>
-            </a:pPr>
-            <a:r>
-              <a:rPr sz="1600" b="0">
-                <a:solidFill>
-                  <a:srgbClr val="25342A"/>
-                </a:solidFill>
-                <a:latin typeface="Roboto"/>
-              </a:rPr>
-              <a:t>Donations cost 15¢ to raise each dollar this financial year to date ($20,700 of donor campaigns for $136,100).</a:t>
-            </a:r>
-          </a:p>
-        </p:txBody>
-      </p:sp>
-      <p:sp>
-        <p:nvSpPr>
-          <p:cNvPr id="8" name="Rectangle 7"/>
-          <p:cNvSpPr/>
-          <p:nvPr/>
-        </p:nvSpPr>
-        <p:spPr>
-          <a:xfrm>
-            <a:off x="6233007" y="1554480"/>
-            <a:ext cx="5501487" cy="4389120"/>
-          </a:xfrm>
-          <a:prstGeom prst="rect">
-            <a:avLst/>
-          </a:prstGeom>
-          <a:solidFill>
-            <a:srgbClr val="EEF5F0"/>
-          </a:solidFill>
-          <a:ln>
-            <a:solidFill>
-              <a:srgbClr val="DCE8DC"/>
-            </a:solidFill>
-          </a:ln>
-        </p:spPr>
-        <p:style>
-          <a:lnRef idx="1">
-            <a:schemeClr val="accent1"/>
-          </a:lnRef>
-          <a:fillRef idx="3">
-            <a:schemeClr val="accent1"/>
-          </a:fillRef>
-          <a:effectRef idx="2">
-            <a:schemeClr val="accent1"/>
-          </a:effectRef>
-          <a:fontRef idx="minor">
-            <a:schemeClr val="lt1"/>
-          </a:fontRef>
-        </p:style>
-        <p:txBody>
-          <a:bodyPr rtlCol="0" anchor="ctr"/>
-          <a:lstStyle/>
-          <a:p>
-            <a:pPr algn="ctr">
-              <a:defRPr>
-                <a:latin typeface="Roboto"/>
-              </a:defRPr>
-            </a:pPr>
-          </a:p>
-        </p:txBody>
-      </p:sp>
-      <p:sp>
-        <p:nvSpPr>
-          <p:cNvPr id="9" name="TextBox 8"/>
-          <p:cNvSpPr txBox="1"/>
-          <p:nvPr/>
-        </p:nvSpPr>
-        <p:spPr>
-          <a:xfrm>
-            <a:off x="6461607" y="1691640"/>
-            <a:ext cx="5044287" cy="365760"/>
-          </a:xfrm>
-          <a:prstGeom prst="rect">
-            <a:avLst/>
-          </a:prstGeom>
-          <a:noFill/>
-        </p:spPr>
-        <p:txBody>
-          <a:bodyPr wrap="square">
-            <a:spAutoFit/>
-          </a:bodyPr>
-          <a:lstStyle/>
-          <a:p>
-            <a:pPr>
-              <a:defRPr>
-                <a:latin typeface="Roboto"/>
-              </a:defRPr>
-            </a:pPr>
-            <a:r>
-              <a:rPr sz="1100" b="1">
-                <a:solidFill>
-                  <a:srgbClr val="5F6F63"/>
-                </a:solidFill>
-                <a:latin typeface="Roboto"/>
-              </a:rPr>
-              <a:t>WHAT YOU'D DO ABOUT IT</a:t>
-            </a:r>
-          </a:p>
-        </p:txBody>
-      </p:sp>
-      <p:sp>
-        <p:nvSpPr>
-          <p:cNvPr id="10" name="TextBox 9"/>
-          <p:cNvSpPr txBox="1"/>
-          <p:nvPr/>
-        </p:nvSpPr>
-        <p:spPr>
-          <a:xfrm>
-            <a:off x="6461607" y="2103120"/>
-            <a:ext cx="5044287" cy="3749039"/>
-          </a:xfrm>
-          <a:prstGeom prst="rect">
-            <a:avLst/>
-          </a:prstGeom>
-          <a:noFill/>
-        </p:spPr>
-        <p:txBody>
-          <a:bodyPr wrap="square">
-            <a:spAutoFit/>
-          </a:bodyPr>
-          <a:lstStyle/>
-          <a:p>
-            <a:pPr>
-              <a:defRPr>
-                <a:latin typeface="Roboto"/>
-              </a:defRPr>
-            </a:pPr>
-            <a:r>
-              <a:rPr sz="1600" b="0">
-                <a:solidFill>
-                  <a:srgbClr val="25342A"/>
-                </a:solidFill>
-                <a:latin typeface="Roboto"/>
-              </a:rPr>
-              <a:t>Steady and cheap, and untied: the money that builds reserves.</a:t>
-            </a:r>
-          </a:p>
-        </p:txBody>
-      </p:sp>
-      <p:sp>
-        <p:nvSpPr>
-          <p:cNvPr id="11" name="TextBox 10"/>
-          <p:cNvSpPr txBox="1"/>
-          <p:nvPr/>
-        </p:nvSpPr>
-        <p:spPr>
-          <a:xfrm>
-            <a:off x="457200" y="6492240"/>
-            <a:ext cx="3657600" cy="274320"/>
-          </a:xfrm>
-          <a:prstGeom prst="rect">
-            <a:avLst/>
-          </a:prstGeom>
-          <a:noFill/>
-        </p:spPr>
-        <p:txBody>
-          <a:bodyPr wrap="square">
-            <a:spAutoFit/>
-          </a:bodyPr>
-          <a:lstStyle/>
-          <a:p>
-            <a:pPr>
-              <a:defRPr>
-                <a:latin typeface="Roboto"/>
-              </a:defRPr>
-            </a:pPr>
-            <a:r>
-              <a:rPr sz="900" b="0">
-                <a:solidFill>
-                  <a:srgbClr val="5F6F63"/>
-                </a:solidFill>
-                <a:latin typeface="Roboto"/>
-              </a:rPr>
-              <a:t>cost-to-raise.pptx</a:t>
-            </a:r>
-          </a:p>
-        </p:txBody>
-      </p:sp>
-      <p:sp>
-        <p:nvSpPr>
-          <p:cNvPr id="12" name="TextBox 11"/>
-          <p:cNvSpPr txBox="1"/>
-          <p:nvPr/>
-        </p:nvSpPr>
-        <p:spPr>
-          <a:xfrm>
-            <a:off x="4297680" y="6492240"/>
-            <a:ext cx="3657600" cy="274320"/>
-          </a:xfrm>
-          <a:prstGeom prst="rect">
-            <a:avLst/>
-          </a:prstGeom>
-          <a:noFill/>
-        </p:spPr>
-        <p:txBody>
-          <a:bodyPr wrap="square">
-            <a:spAutoFit/>
-          </a:bodyPr>
-          <a:lstStyle/>
-          <a:p>
-            <a:pPr algn="ctr">
-              <a:defRPr>
-                <a:latin typeface="Roboto"/>
-              </a:defRPr>
-            </a:pPr>
-            <a:r>
-              <a:rPr sz="900" b="0">
-                <a:solidFill>
-                  <a:srgbClr val="5F6F63"/>
-                </a:solidFill>
-                <a:latin typeface="Roboto"/>
-              </a:rPr>
-              <a:t>Data retrieved 2pm, Tue 6 Oct 2026 · Sample data</a:t>
-            </a:r>
-          </a:p>
-        </p:txBody>
-      </p:sp>
-      <p:sp>
-        <p:nvSpPr>
-          <p:cNvPr id="13" name="TextBox 12"/>
-          <p:cNvSpPr txBox="1"/>
-          <p:nvPr/>
-        </p:nvSpPr>
-        <p:spPr>
-          <a:xfrm>
-            <a:off x="8503920" y="6492240"/>
-            <a:ext cx="3200400" cy="274320"/>
-          </a:xfrm>
-          <a:prstGeom prst="rect">
-            <a:avLst/>
-          </a:prstGeom>
-          <a:noFill/>
-        </p:spPr>
-        <p:txBody>
-          <a:bodyPr wrap="square">
-            <a:spAutoFit/>
-          </a:bodyPr>
-          <a:lstStyle/>
-          <a:p>
-            <a:pPr algn="r">
-              <a:defRPr>
-                <a:latin typeface="Roboto"/>
-              </a:defRPr>
-            </a:pPr>
-            <a:r>
-              <a:rPr sz="900" b="0">
-                <a:solidFill>
-                  <a:srgbClr val="5F6F63"/>
-                </a:solidFill>
-                <a:latin typeface="Roboto"/>
-              </a:rPr>
-              <a:t>Slide 8 of 11</a:t>
-            </a:r>
-          </a:p>
-        </p:txBody>
-      </p:sp>
-    </p:spTree>
-  </p:cSld>
-  <p:clrMapOvr>
-    <a:masterClrMapping/>
-  </p:clrMapOvr>
-</p:sld>
-</file>
-
-<file path=ppt/slides/slide9.xml><?xml version="1.0" encoding="utf-8"?>
-<p:sld xmlns:a="http://schemas.openxmlformats.org/drawingml/2006/main" xmlns:p="http://schemas.openxmlformats.org/presentationml/2006/main" xmlns:r="http://schemas.openxmlformats.org/officeDocument/2006/relationships">
-  <p:cSld>
-    <p:spTree>
-      <p:nvGrpSpPr>
-        <p:cNvPr id="1" name=""/>
-        <p:cNvGrpSpPr/>
-        <p:nvPr/>
-      </p:nvGrpSpPr>
-      <p:grpSpPr/>
-      <p:sp>
-        <p:nvSpPr>
-          <p:cNvPr id="2" name="Rectangle 1"/>
-          <p:cNvSpPr/>
-          <p:nvPr/>
-        </p:nvSpPr>
-        <p:spPr>
-          <a:xfrm>
-            <a:off x="0" y="0"/>
-            <a:ext cx="12191695" cy="73152"/>
-          </a:xfrm>
-          <a:prstGeom prst="rect">
-            <a:avLst/>
-          </a:prstGeom>
-          <a:solidFill>
-            <a:srgbClr val="2F7A5D"/>
-          </a:solidFill>
-          <a:ln>
-            <a:noFill/>
-          </a:ln>
-        </p:spPr>
-        <p:style>
-          <a:lnRef idx="1">
-            <a:schemeClr val="accent1"/>
-          </a:lnRef>
-          <a:fillRef idx="3">
-            <a:schemeClr val="accent1"/>
-          </a:fillRef>
-          <a:effectRef idx="2">
-            <a:schemeClr val="accent1"/>
-          </a:effectRef>
-          <a:fontRef idx="minor">
-            <a:schemeClr val="lt1"/>
-          </a:fontRef>
-        </p:style>
-        <p:txBody>
-          <a:bodyPr rtlCol="0" anchor="ctr"/>
-          <a:lstStyle/>
-          <a:p>
-            <a:pPr algn="ctr">
-              <a:defRPr>
-                <a:latin typeface="Roboto"/>
-              </a:defRPr>
-            </a:pPr>
-          </a:p>
-        </p:txBody>
-      </p:sp>
-      <p:sp>
-        <p:nvSpPr>
-          <p:cNvPr id="3" name="TextBox 2"/>
-          <p:cNvSpPr txBox="1"/>
-          <p:nvPr/>
-        </p:nvSpPr>
-        <p:spPr>
-          <a:xfrm>
-            <a:off x="457200" y="164592"/>
-            <a:ext cx="7315200" cy="274320"/>
-          </a:xfrm>
-          <a:prstGeom prst="rect">
-            <a:avLst/>
-          </a:prstGeom>
-          <a:noFill/>
-        </p:spPr>
-        <p:txBody>
-          <a:bodyPr wrap="square">
-            <a:spAutoFit/>
-          </a:bodyPr>
-          <a:lstStyle/>
-          <a:p>
-            <a:pPr>
-              <a:defRPr>
-                <a:latin typeface="Roboto"/>
-              </a:defRPr>
-            </a:pPr>
-            <a:r>
-              <a:rPr sz="1000" b="0">
-                <a:solidFill>
-                  <a:srgbClr val="5F6F63"/>
-                </a:solidFill>
-                <a:latin typeface="Roboto"/>
-              </a:rPr>
-              <a:t>Sample Community Services Ltd · What does it cost to raise a dollar?</a:t>
-            </a:r>
-          </a:p>
-        </p:txBody>
-      </p:sp>
-      <p:sp>
-        <p:nvSpPr>
-          <p:cNvPr id="4" name="TextBox 3"/>
-          <p:cNvSpPr txBox="1"/>
-          <p:nvPr/>
-        </p:nvSpPr>
-        <p:spPr>
-          <a:xfrm>
-            <a:off x="457200" y="411480"/>
-            <a:ext cx="11247120" cy="548640"/>
-          </a:xfrm>
-          <a:prstGeom prst="rect">
-            <a:avLst/>
-          </a:prstGeom>
-          <a:noFill/>
-        </p:spPr>
-        <p:txBody>
-          <a:bodyPr wrap="square">
-            <a:spAutoFit/>
-          </a:bodyPr>
-          <a:lstStyle/>
-          <a:p>
-            <a:pPr>
-              <a:defRPr>
-                <a:latin typeface="Roboto"/>
-              </a:defRPr>
-            </a:pPr>
-            <a:r>
-              <a:rPr sz="2400" b="1">
-                <a:solidFill>
-                  <a:srgbClr val="25342A"/>
-                </a:solidFill>
-                <a:latin typeface="Roboto"/>
-              </a:rPr>
-              <a:t>Headline numbers · Source: Fundraising events</a:t>
-            </a:r>
-          </a:p>
-        </p:txBody>
-      </p:sp>
-      <p:sp>
-        <p:nvSpPr>
-          <p:cNvPr id="5" name="Rectangle 4"/>
-          <p:cNvSpPr/>
-          <p:nvPr/>
-        </p:nvSpPr>
-        <p:spPr>
-          <a:xfrm>
-            <a:off x="457200" y="1645920"/>
-            <a:ext cx="5501487" cy="2011680"/>
-          </a:xfrm>
-          <a:prstGeom prst="rect">
-            <a:avLst/>
-          </a:prstGeom>
-          <a:solidFill>
-            <a:srgbClr val="F7FAF7"/>
-          </a:solidFill>
-          <a:ln>
-            <a:solidFill>
-              <a:srgbClr val="DCE8DC"/>
-            </a:solidFill>
-          </a:ln>
-        </p:spPr>
-        <p:style>
-          <a:lnRef idx="1">
-            <a:schemeClr val="accent1"/>
-          </a:lnRef>
-          <a:fillRef idx="3">
-            <a:schemeClr val="accent1"/>
-          </a:fillRef>
-          <a:effectRef idx="2">
-            <a:schemeClr val="accent1"/>
-          </a:effectRef>
-          <a:fontRef idx="minor">
-            <a:schemeClr val="lt1"/>
-          </a:fontRef>
-        </p:style>
-        <p:txBody>
-          <a:bodyPr rtlCol="0" anchor="ctr"/>
-          <a:lstStyle/>
-          <a:p>
-            <a:pPr algn="ctr">
-              <a:defRPr>
-                <a:latin typeface="Roboto"/>
-              </a:defRPr>
-            </a:pPr>
-          </a:p>
-        </p:txBody>
-      </p:sp>
-      <p:sp>
-        <p:nvSpPr>
-          <p:cNvPr id="6" name="TextBox 5"/>
-          <p:cNvSpPr txBox="1"/>
-          <p:nvPr/>
-        </p:nvSpPr>
-        <p:spPr>
-          <a:xfrm>
-            <a:off x="640080" y="1783080"/>
-            <a:ext cx="5135727" cy="457200"/>
-          </a:xfrm>
-          <a:prstGeom prst="rect">
-            <a:avLst/>
-          </a:prstGeom>
-          <a:noFill/>
-        </p:spPr>
-        <p:txBody>
-          <a:bodyPr wrap="square">
-            <a:spAutoFit/>
-          </a:bodyPr>
-          <a:lstStyle/>
-          <a:p>
-            <a:pPr>
-              <a:defRPr>
-                <a:latin typeface="Roboto"/>
-              </a:defRPr>
-            </a:pPr>
-            <a:r>
-              <a:rPr sz="1200" b="0">
-                <a:solidFill>
-                  <a:srgbClr val="5F6F63"/>
-                </a:solidFill>
-                <a:latin typeface="Roboto"/>
-              </a:rPr>
-              <a:t>February · Fundraising events</a:t>
-            </a:r>
-          </a:p>
-        </p:txBody>
-      </p:sp>
-      <p:sp>
-        <p:nvSpPr>
-          <p:cNvPr id="7" name="TextBox 6"/>
-          <p:cNvSpPr txBox="1"/>
-          <p:nvPr/>
-        </p:nvSpPr>
-        <p:spPr>
-          <a:xfrm>
-            <a:off x="640080" y="2240280"/>
-            <a:ext cx="5135727" cy="731520"/>
-          </a:xfrm>
-          <a:prstGeom prst="rect">
-            <a:avLst/>
-          </a:prstGeom>
-          <a:noFill/>
-        </p:spPr>
-        <p:txBody>
-          <a:bodyPr wrap="square">
-            <a:spAutoFit/>
-          </a:bodyPr>
-          <a:lstStyle/>
-          <a:p>
-            <a:pPr>
-              <a:defRPr>
-                <a:latin typeface="Roboto"/>
-              </a:defRPr>
-            </a:pPr>
-            <a:r>
-              <a:rPr sz="3000" b="1">
-                <a:solidFill>
-                  <a:srgbClr val="2F7A5D"/>
-                </a:solidFill>
-                <a:latin typeface="Roboto"/>
-              </a:rPr>
-              <a:t>–</a:t>
-            </a:r>
-          </a:p>
-        </p:txBody>
-      </p:sp>
-      <p:sp>
-        <p:nvSpPr>
-          <p:cNvPr id="8" name="TextBox 7"/>
-          <p:cNvSpPr txBox="1"/>
-          <p:nvPr/>
-        </p:nvSpPr>
-        <p:spPr>
-          <a:xfrm>
-            <a:off x="640080" y="3017520"/>
-            <a:ext cx="5135727" cy="548640"/>
-          </a:xfrm>
-          <a:prstGeom prst="rect">
-            <a:avLst/>
-          </a:prstGeom>
-          <a:noFill/>
-        </p:spPr>
-        <p:txBody>
-          <a:bodyPr wrap="square">
-            <a:spAutoFit/>
-          </a:bodyPr>
-          <a:lstStyle/>
-          <a:p>
-            <a:pPr>
-              <a:defRPr>
-                <a:latin typeface="Roboto"/>
-              </a:defRPr>
-            </a:pPr>
-            <a:r>
-              <a:rPr sz="1100" b="0">
-                <a:solidFill>
-                  <a:srgbClr val="5F6F63"/>
-                </a:solidFill>
-                <a:latin typeface="Roboto"/>
-              </a:rPr>
-              <a:t>January none raised</a:t>
-            </a:r>
-          </a:p>
-        </p:txBody>
-      </p:sp>
-      <p:sp>
-        <p:nvSpPr>
-          <p:cNvPr id="9" name="Rectangle 8"/>
-          <p:cNvSpPr/>
-          <p:nvPr/>
-        </p:nvSpPr>
-        <p:spPr>
-          <a:xfrm>
-            <a:off x="6233007" y="1645920"/>
-            <a:ext cx="5501487" cy="2011680"/>
-          </a:xfrm>
-          <a:prstGeom prst="rect">
-            <a:avLst/>
-          </a:prstGeom>
-          <a:solidFill>
-            <a:srgbClr val="F7FAF7"/>
-          </a:solidFill>
-          <a:ln>
-            <a:solidFill>
-              <a:srgbClr val="DCE8DC"/>
-            </a:solidFill>
-          </a:ln>
-        </p:spPr>
-        <p:style>
-          <a:lnRef idx="1">
-            <a:schemeClr val="accent1"/>
-          </a:lnRef>
-          <a:fillRef idx="3">
-            <a:schemeClr val="accent1"/>
-          </a:fillRef>
-          <a:effectRef idx="2">
-            <a:schemeClr val="accent1"/>
-          </a:effectRef>
-          <a:fontRef idx="minor">
-            <a:schemeClr val="lt1"/>
-          </a:fontRef>
-        </p:style>
-        <p:txBody>
-          <a:bodyPr rtlCol="0" anchor="ctr"/>
-          <a:lstStyle/>
-          <a:p>
-            <a:pPr algn="ctr">
-              <a:defRPr>
-                <a:latin typeface="Roboto"/>
-              </a:defRPr>
-            </a:pPr>
-          </a:p>
-        </p:txBody>
-      </p:sp>
-      <p:sp>
-        <p:nvSpPr>
-          <p:cNvPr id="10" name="TextBox 9"/>
-          <p:cNvSpPr txBox="1"/>
-          <p:nvPr/>
-        </p:nvSpPr>
-        <p:spPr>
-          <a:xfrm>
-            <a:off x="6415887" y="1783080"/>
-            <a:ext cx="5135727" cy="457200"/>
-          </a:xfrm>
-          <a:prstGeom prst="rect">
-            <a:avLst/>
-          </a:prstGeom>
-          <a:noFill/>
-        </p:spPr>
-        <p:txBody>
-          <a:bodyPr wrap="square">
-            <a:spAutoFit/>
-          </a:bodyPr>
-          <a:lstStyle/>
-          <a:p>
-            <a:pPr>
-              <a:defRPr>
-                <a:latin typeface="Roboto"/>
-              </a:defRPr>
-            </a:pPr>
-            <a:r>
-              <a:rPr sz="1200" b="0">
-                <a:solidFill>
-                  <a:srgbClr val="5F6F63"/>
-                </a:solidFill>
-                <a:latin typeface="Roboto"/>
-              </a:rPr>
-              <a:t>Year to date (Jul to Feb 2026)</a:t>
-            </a:r>
-          </a:p>
-        </p:txBody>
-      </p:sp>
-      <p:sp>
-        <p:nvSpPr>
-          <p:cNvPr id="11" name="TextBox 10"/>
-          <p:cNvSpPr txBox="1"/>
-          <p:nvPr/>
-        </p:nvSpPr>
-        <p:spPr>
-          <a:xfrm>
-            <a:off x="6415887" y="2240280"/>
-            <a:ext cx="5135727" cy="731520"/>
-          </a:xfrm>
-          <a:prstGeom prst="rect">
-            <a:avLst/>
-          </a:prstGeom>
-          <a:noFill/>
-        </p:spPr>
-        <p:txBody>
-          <a:bodyPr wrap="square">
-            <a:spAutoFit/>
-          </a:bodyPr>
-          <a:lstStyle/>
-          <a:p>
-            <a:pPr>
-              <a:defRPr>
-                <a:latin typeface="Roboto"/>
-              </a:defRPr>
-            </a:pPr>
-            <a:r>
-              <a:rPr sz="3000" b="1">
-                <a:solidFill>
-                  <a:srgbClr val="2F7A5D"/>
-                </a:solidFill>
-                <a:latin typeface="Roboto"/>
-              </a:rPr>
-              <a:t>41¢</a:t>
-            </a:r>
-          </a:p>
-        </p:txBody>
-      </p:sp>
-      <p:sp>
-        <p:nvSpPr>
-          <p:cNvPr id="12" name="TextBox 11"/>
-          <p:cNvSpPr txBox="1"/>
-          <p:nvPr/>
-        </p:nvSpPr>
-        <p:spPr>
-          <a:xfrm>
-            <a:off x="6415887" y="3017520"/>
-            <a:ext cx="5135727" cy="548640"/>
-          </a:xfrm>
-          <a:prstGeom prst="rect">
-            <a:avLst/>
-          </a:prstGeom>
-          <a:noFill/>
-        </p:spPr>
-        <p:txBody>
-          <a:bodyPr wrap="square">
-            <a:spAutoFit/>
-          </a:bodyPr>
-          <a:lstStyle/>
-          <a:p>
-            <a:pPr>
-              <a:defRPr>
-                <a:latin typeface="Roboto"/>
-              </a:defRPr>
-            </a:pPr>
-            <a:r>
-              <a:rPr sz="1100" b="0">
-                <a:solidFill>
-                  <a:srgbClr val="5F6F63"/>
-                </a:solidFill>
-                <a:latin typeface="Roboto"/>
-              </a:rPr>
-              <a:t>same period last year: not in the data</a:t>
-            </a:r>
-          </a:p>
-        </p:txBody>
-      </p:sp>
-      <p:sp>
-        <p:nvSpPr>
-          <p:cNvPr id="13" name="TextBox 12"/>
-          <p:cNvSpPr txBox="1"/>
-          <p:nvPr/>
-        </p:nvSpPr>
-        <p:spPr>
-          <a:xfrm>
-            <a:off x="457200" y="6492240"/>
-            <a:ext cx="3657600" cy="274320"/>
-          </a:xfrm>
-          <a:prstGeom prst="rect">
-            <a:avLst/>
-          </a:prstGeom>
-          <a:noFill/>
-        </p:spPr>
-        <p:txBody>
-          <a:bodyPr wrap="square">
-            <a:spAutoFit/>
-          </a:bodyPr>
-          <a:lstStyle/>
-          <a:p>
-            <a:pPr>
-              <a:defRPr>
-                <a:latin typeface="Roboto"/>
-              </a:defRPr>
-            </a:pPr>
-            <a:r>
-              <a:rPr sz="900" b="0">
-                <a:solidFill>
-                  <a:srgbClr val="5F6F63"/>
-                </a:solidFill>
-                <a:latin typeface="Roboto"/>
-              </a:rPr>
-              <a:t>cost-to-raise.pptx</a:t>
-            </a:r>
-          </a:p>
-        </p:txBody>
-      </p:sp>
-      <p:sp>
-        <p:nvSpPr>
-          <p:cNvPr id="14" name="TextBox 13"/>
-          <p:cNvSpPr txBox="1"/>
-          <p:nvPr/>
-        </p:nvSpPr>
-        <p:spPr>
-          <a:xfrm>
-            <a:off x="4297680" y="6492240"/>
-            <a:ext cx="3657600" cy="274320"/>
-          </a:xfrm>
-          <a:prstGeom prst="rect">
-            <a:avLst/>
-          </a:prstGeom>
-          <a:noFill/>
-        </p:spPr>
-        <p:txBody>
-          <a:bodyPr wrap="square">
-            <a:spAutoFit/>
-          </a:bodyPr>
-          <a:lstStyle/>
-          <a:p>
-            <a:pPr algn="ctr">
-              <a:defRPr>
-                <a:latin typeface="Roboto"/>
-              </a:defRPr>
-            </a:pPr>
-            <a:r>
-              <a:rPr sz="900" b="0">
-                <a:solidFill>
-                  <a:srgbClr val="5F6F63"/>
-                </a:solidFill>
-                <a:latin typeface="Roboto"/>
-              </a:rPr>
-              <a:t>Data retrieved 2pm, Tue 6 Oct 2026 · Sample data</a:t>
-            </a:r>
-          </a:p>
-        </p:txBody>
-      </p:sp>
-      <p:sp>
-        <p:nvSpPr>
-          <p:cNvPr id="15" name="TextBox 14"/>
-          <p:cNvSpPr txBox="1"/>
-          <p:nvPr/>
-        </p:nvSpPr>
-        <p:spPr>
-          <a:xfrm>
-            <a:off x="8503920" y="6492240"/>
-            <a:ext cx="3200400" cy="274320"/>
-          </a:xfrm>
-          <a:prstGeom prst="rect">
-            <a:avLst/>
-          </a:prstGeom>
-          <a:noFill/>
-        </p:spPr>
-        <p:txBody>
-          <a:bodyPr wrap="square">
-            <a:spAutoFit/>
-          </a:bodyPr>
-          <a:lstStyle/>
-          <a:p>
-            <a:pPr algn="r">
-              <a:defRPr>
-                <a:latin typeface="Roboto"/>
-              </a:defRPr>
-            </a:pPr>
-            <a:r>
-              <a:rPr sz="900" b="0">
-                <a:solidFill>
-                  <a:srgbClr val="5F6F63"/>
-                </a:solidFill>
-                <a:latin typeface="Roboto"/>
-              </a:rPr>
-              <a:t>Slide 9 of 11</a:t>
+              <a:t>Slide 5 of 5</a:t>
             </a:r>
           </a:p>
         </p:txBody>
@@ -8993,6 +8754,326 @@
 </file>
 
 <file path=ppt/theme/theme1.xml><?xml version="1.0" encoding="utf-8"?>
+<a:theme xmlns:a="http://schemas.openxmlformats.org/drawingml/2006/main" name="Office Theme">
+  <a:themeElements>
+    <a:clrScheme name="Office">
+      <a:dk1>
+        <a:sysClr val="windowText" lastClr="000000"/>
+      </a:dk1>
+      <a:lt1>
+        <a:sysClr val="window" lastClr="FFFFFF"/>
+      </a:lt1>
+      <a:dk2>
+        <a:srgbClr val="25342A"/>
+      </a:dk2>
+      <a:lt2>
+        <a:srgbClr val="F4F7F2"/>
+      </a:lt2>
+      <a:accent1>
+        <a:srgbClr val="2F7A5D"/>
+      </a:accent1>
+      <a:accent2>
+        <a:srgbClr val="0E9F6E"/>
+      </a:accent2>
+      <a:accent3>
+        <a:srgbClr val="7D8790"/>
+      </a:accent3>
+      <a:accent4>
+        <a:srgbClr val="8A6D3B"/>
+      </a:accent4>
+      <a:accent5>
+        <a:srgbClr val="B42318"/>
+      </a:accent5>
+      <a:accent6>
+        <a:srgbClr val="8E9CAB"/>
+      </a:accent6>
+      <a:hlink>
+        <a:srgbClr val="0000FF"/>
+      </a:hlink>
+      <a:folHlink>
+        <a:srgbClr val="800080"/>
+      </a:folHlink>
+    </a:clrScheme>
+    <a:fontScheme name="Office">
+      <a:majorFont>
+        <a:latin typeface="Roboto"/>
+        <a:ea typeface=""/>
+        <a:cs typeface=""/>
+        <a:font script="Jpan" typeface="ＭＳ Ｐゴシック"/>
+        <a:font script="Hang" typeface="맑은 고딕"/>
+        <a:font script="Hans" typeface="宋体"/>
+        <a:font script="Hant" typeface="新細明體"/>
+        <a:font script="Arab" typeface="Times New Roman"/>
+        <a:font script="Hebr" typeface="Times New Roman"/>
+        <a:font script="Thai" typeface="Angsana New"/>
+        <a:font script="Ethi" typeface="Nyala"/>
+        <a:font script="Beng" typeface="Vrinda"/>
+        <a:font script="Gujr" typeface="Shruti"/>
+        <a:font script="Khmr" typeface="MoolBoran"/>
+        <a:font script="Knda" typeface="Tunga"/>
+        <a:font script="Guru" typeface="Raavi"/>
+        <a:font script="Cans" typeface="Euphemia"/>
+        <a:font script="Cher" typeface="Plantagenet Cherokee"/>
+        <a:font script="Yiii" typeface="Microsoft Yi Baiti"/>
+        <a:font script="Tibt" typeface="Microsoft Himalaya"/>
+        <a:font script="Thaa" typeface="MV Boli"/>
+        <a:font script="Deva" typeface="Mangal"/>
+        <a:font script="Telu" typeface="Gautami"/>
+        <a:font script="Taml" typeface="Latha"/>
+        <a:font script="Syrc" typeface="Estrangelo Edessa"/>
+        <a:font script="Orya" typeface="Kalinga"/>
+        <a:font script="Mlym" typeface="Kartika"/>
+        <a:font script="Laoo" typeface="DokChampa"/>
+        <a:font script="Sinh" typeface="Iskoola Pota"/>
+        <a:font script="Mong" typeface="Mongolian Baiti"/>
+        <a:font script="Viet" typeface="Times New Roman"/>
+        <a:font script="Uigh" typeface="Microsoft Uighur"/>
+        <a:font script="Geor" typeface="Sylfaen"/>
+      </a:majorFont>
+      <a:minorFont>
+        <a:latin typeface="Roboto"/>
+        <a:ea typeface=""/>
+        <a:cs typeface=""/>
+        <a:font script="Jpan" typeface="ＭＳ Ｐゴシック"/>
+        <a:font script="Hang" typeface="맑은 고딕"/>
+        <a:font script="Hans" typeface="宋体"/>
+        <a:font script="Hant" typeface="新細明體"/>
+        <a:font script="Arab" typeface="Arial"/>
+        <a:font script="Hebr" typeface="Arial"/>
+        <a:font script="Thai" typeface="Cordia New"/>
+        <a:font script="Ethi" typeface="Nyala"/>
+        <a:font script="Beng" typeface="Vrinda"/>
+        <a:font script="Gujr" typeface="Shruti"/>
+        <a:font script="Khmr" typeface="DaunPenh"/>
+        <a:font script="Knda" typeface="Tunga"/>
+        <a:font script="Guru" typeface="Raavi"/>
+        <a:font script="Cans" typeface="Euphemia"/>
+        <a:font script="Cher" typeface="Plantagenet Cherokee"/>
+        <a:font script="Yiii" typeface="Microsoft Yi Baiti"/>
+        <a:font script="Tibt" typeface="Microsoft Himalaya"/>
+        <a:font script="Thaa" typeface="MV Boli"/>
+        <a:font script="Deva" typeface="Mangal"/>
+        <a:font script="Telu" typeface="Gautami"/>
+        <a:font script="Taml" typeface="Latha"/>
+        <a:font script="Syrc" typeface="Estrangelo Edessa"/>
+        <a:font script="Orya" typeface="Kalinga"/>
+        <a:font script="Mlym" typeface="Kartika"/>
+        <a:font script="Laoo" typeface="DokChampa"/>
+        <a:font script="Sinh" typeface="Iskoola Pota"/>
+        <a:font script="Mong" typeface="Mongolian Baiti"/>
+        <a:font script="Viet" typeface="Arial"/>
+        <a:font script="Uigh" typeface="Microsoft Uighur"/>
+        <a:font script="Geor" typeface="Sylfaen"/>
+      </a:minorFont>
+    </a:fontScheme>
+    <a:fmtScheme name="Office">
+      <a:fillStyleLst>
+        <a:solidFill>
+          <a:schemeClr val="phClr"/>
+        </a:solidFill>
+        <a:gradFill rotWithShape="1">
+          <a:gsLst>
+            <a:gs pos="0">
+              <a:schemeClr val="phClr">
+                <a:tint val="50000"/>
+                <a:satMod val="300000"/>
+              </a:schemeClr>
+            </a:gs>
+            <a:gs pos="35000">
+              <a:schemeClr val="phClr">
+                <a:tint val="37000"/>
+                <a:satMod val="300000"/>
+              </a:schemeClr>
+            </a:gs>
+            <a:gs pos="100000">
+              <a:schemeClr val="phClr">
+                <a:tint val="15000"/>
+                <a:satMod val="350000"/>
+              </a:schemeClr>
+            </a:gs>
+          </a:gsLst>
+          <a:lin ang="16200000" scaled="1"/>
+        </a:gradFill>
+        <a:gradFill rotWithShape="1">
+          <a:gsLst>
+            <a:gs pos="0">
+              <a:schemeClr val="phClr">
+                <a:tint val="100000"/>
+                <a:shade val="100000"/>
+                <a:satMod val="130000"/>
+              </a:schemeClr>
+            </a:gs>
+            <a:gs pos="100000">
+              <a:schemeClr val="phClr">
+                <a:tint val="50000"/>
+                <a:shade val="100000"/>
+                <a:satMod val="350000"/>
+              </a:schemeClr>
+            </a:gs>
+          </a:gsLst>
+          <a:lin ang="16200000" scaled="0"/>
+        </a:gradFill>
+      </a:fillStyleLst>
+      <a:lnStyleLst>
+        <a:ln w="9525" cap="flat" cmpd="sng" algn="ctr">
+          <a:solidFill>
+            <a:schemeClr val="phClr">
+              <a:shade val="95000"/>
+              <a:satMod val="105000"/>
+            </a:schemeClr>
+          </a:solidFill>
+          <a:prstDash val="solid"/>
+        </a:ln>
+        <a:ln w="25400" cap="flat" cmpd="sng" algn="ctr">
+          <a:solidFill>
+            <a:schemeClr val="phClr"/>
+          </a:solidFill>
+          <a:prstDash val="solid"/>
+        </a:ln>
+        <a:ln w="38100" cap="flat" cmpd="sng" algn="ctr">
+          <a:solidFill>
+            <a:schemeClr val="phClr"/>
+          </a:solidFill>
+          <a:prstDash val="solid"/>
+        </a:ln>
+      </a:lnStyleLst>
+      <a:effectStyleLst>
+        <a:effectStyle>
+          <a:effectLst>
+            <a:outerShdw blurRad="40000" dist="20000" dir="5400000" rotWithShape="0">
+              <a:srgbClr val="000000">
+                <a:alpha val="38000"/>
+              </a:srgbClr>
+            </a:outerShdw>
+          </a:effectLst>
+        </a:effectStyle>
+        <a:effectStyle>
+          <a:effectLst>
+            <a:outerShdw blurRad="40000" dist="23000" dir="5400000" rotWithShape="0">
+              <a:srgbClr val="000000">
+                <a:alpha val="35000"/>
+              </a:srgbClr>
+            </a:outerShdw>
+          </a:effectLst>
+        </a:effectStyle>
+        <a:effectStyle>
+          <a:effectLst>
+            <a:outerShdw blurRad="40000" dist="23000" dir="5400000" rotWithShape="0">
+              <a:srgbClr val="000000">
+                <a:alpha val="35000"/>
+              </a:srgbClr>
+            </a:outerShdw>
+          </a:effectLst>
+          <a:scene3d>
+            <a:camera prst="orthographicFront">
+              <a:rot lat="0" lon="0" rev="0"/>
+            </a:camera>
+            <a:lightRig rig="threePt" dir="t">
+              <a:rot lat="0" lon="0" rev="1200000"/>
+            </a:lightRig>
+          </a:scene3d>
+          <a:sp3d>
+            <a:bevelT w="63500" h="25400"/>
+          </a:sp3d>
+        </a:effectStyle>
+      </a:effectStyleLst>
+      <a:bgFillStyleLst>
+        <a:solidFill>
+          <a:schemeClr val="phClr"/>
+        </a:solidFill>
+        <a:gradFill rotWithShape="1">
+          <a:gsLst>
+            <a:gs pos="0">
+              <a:schemeClr val="phClr">
+                <a:tint val="40000"/>
+                <a:satMod val="350000"/>
+              </a:schemeClr>
+            </a:gs>
+            <a:gs pos="40000">
+              <a:schemeClr val="phClr">
+                <a:tint val="45000"/>
+                <a:shade val="99000"/>
+                <a:satMod val="350000"/>
+              </a:schemeClr>
+            </a:gs>
+            <a:gs pos="100000">
+              <a:schemeClr val="phClr">
+                <a:shade val="20000"/>
+                <a:satMod val="255000"/>
+              </a:schemeClr>
+            </a:gs>
+          </a:gsLst>
+          <a:path path="circle">
+            <a:fillToRect l="50000" t="-80000" r="50000" b="180000"/>
+          </a:path>
+        </a:gradFill>
+        <a:gradFill rotWithShape="1">
+          <a:gsLst>
+            <a:gs pos="0">
+              <a:schemeClr val="phClr">
+                <a:tint val="80000"/>
+                <a:satMod val="300000"/>
+              </a:schemeClr>
+            </a:gs>
+            <a:gs pos="100000">
+              <a:schemeClr val="phClr">
+                <a:shade val="30000"/>
+                <a:satMod val="200000"/>
+              </a:schemeClr>
+            </a:gs>
+          </a:gsLst>
+          <a:path path="circle">
+            <a:fillToRect l="50000" t="50000" r="50000" b="50000"/>
+          </a:path>
+        </a:gradFill>
+      </a:bgFillStyleLst>
+    </a:fmtScheme>
+  </a:themeElements>
+  <a:objectDefaults>
+    <a:spDef>
+      <a:spPr/>
+      <a:bodyPr/>
+      <a:lstStyle/>
+      <a:style>
+        <a:lnRef idx="1">
+          <a:schemeClr val="accent1"/>
+        </a:lnRef>
+        <a:fillRef idx="3">
+          <a:schemeClr val="accent1"/>
+        </a:fillRef>
+        <a:effectRef idx="2">
+          <a:schemeClr val="accent1"/>
+        </a:effectRef>
+        <a:fontRef idx="minor">
+          <a:schemeClr val="lt1"/>
+        </a:fontRef>
+      </a:style>
+    </a:spDef>
+    <a:lnDef>
+      <a:spPr/>
+      <a:bodyPr/>
+      <a:lstStyle/>
+      <a:style>
+        <a:lnRef idx="2">
+          <a:schemeClr val="accent1"/>
+        </a:lnRef>
+        <a:fillRef idx="0">
+          <a:schemeClr val="accent1"/>
+        </a:fillRef>
+        <a:effectRef idx="1">
+          <a:schemeClr val="accent1"/>
+        </a:effectRef>
+        <a:fontRef idx="minor">
+          <a:schemeClr val="tx1"/>
+        </a:fontRef>
+      </a:style>
+    </a:lnDef>
+  </a:objectDefaults>
+  <a:extraClrSchemeLst/>
+</a:theme>
+</file>
+
+<file path=ppt/theme/theme2.xml><?xml version="1.0" encoding="utf-8"?>
 <a:theme xmlns:a="http://schemas.openxmlformats.org/drawingml/2006/main" name="Office Theme">
   <a:themeElements>
     <a:clrScheme name="Office">

--- a/media/exports/reports/2026-02/cost-to-raise.pptx
+++ b/media/exports/reports/2026-02/cost-to-raise.pptx
@@ -1402,7 +1402,7 @@
           <a:lstStyle/>
           <a:p>
             <a:r>
-              <a:t>What does it cost to raise a dollar?. Sample Community Services Ltd. Period: February 2026. What fundraising costs (grant writing, donor campaigns, events) for every dollar it brings in. Pick a source and every number, chart and note follows it.</a:t>
+              <a:t>What does it cost to raise a dollar?. Sample Community Services Ltd. Period: February 2026. In short: Each dollar raised cost 13¢ in February, and 14¢ a dollar this financial year to date. What fundraising costs (grant writing, donor campaigns, events) for every dollar it brings in. Pick a source and every number, chart and note follows it.</a:t>
             </a:r>
           </a:p>
         </p:txBody>
@@ -4907,7 +4907,7 @@
         <p:spPr>
           <a:xfrm>
             <a:off x="457200" y="3703320"/>
-            <a:ext cx="11277295" cy="535940"/>
+            <a:ext cx="11277295" cy="758190"/>
           </a:xfrm>
           <a:prstGeom prst="rect">
             <a:avLst/>
@@ -4932,7 +4932,7 @@
                 </a:solidFill>
                 <a:latin typeface="Roboto"/>
               </a:rPr>
-              <a:t>Period: February 2026. What fundraising costs (grant writing, donor campaigns, events) for every dollar it brings in. Pick a source and every number, chart and note follows it.</a:t>
+              <a:t>Period: February 2026. In short: Each dollar raised cost 13¢ in February, and 14¢ a dollar this financial year to date. What fundraising costs (grant writing, donor campaigns, events) for every dollar it brings in. Pick a source and every number, chart and note follows it.</a:t>
             </a:r>
           </a:p>
         </p:txBody>
@@ -4945,7 +4945,7 @@
         </p:nvSpPr>
         <p:spPr>
           <a:xfrm>
-            <a:off x="457200" y="4330700"/>
+            <a:off x="457200" y="4552950"/>
             <a:ext cx="11277295" cy="1097280"/>
           </a:xfrm>
           <a:prstGeom prst="rect">
@@ -5097,7 +5097,7 @@
                 </a:solidFill>
                 <a:latin typeface="Roboto"/>
               </a:rPr>
-              <a:t>Data retrieved 2pm, Tue 6 Oct 2026 · Generated 8 Oct 2026, 9:35am · Sample data · Made with Python (python-pptx)</a:t>
+              <a:t>Data retrieved 2pm, Tue 6 Oct 2026 · Generated 10 Oct 2026, 9:55pm · Sample data · Made with Python (python-pptx)</a:t>
             </a:r>
           </a:p>
         </p:txBody>
@@ -5998,7 +5998,7 @@
                 </a:solidFill>
                 <a:latin typeface="Roboto"/>
               </a:rPr>
-              <a:t>Data retrieved 2pm, Tue 6 Oct 2026 · Generated 8 Oct 2026, 9:35am · Sample data · Made with Python (python-pptx)</a:t>
+              <a:t>Data retrieved 2pm, Tue 6 Oct 2026 · Generated 10 Oct 2026, 9:55pm · Sample data · Made with Python (python-pptx)</a:t>
             </a:r>
           </a:p>
         </p:txBody>
@@ -6899,7 +6899,7 @@
                 </a:solidFill>
                 <a:latin typeface="Roboto"/>
               </a:rPr>
-              <a:t>Data retrieved 2pm, Tue 6 Oct 2026 · Generated 8 Oct 2026, 9:35am · Sample data · Made with Python (python-pptx)</a:t>
+              <a:t>Data retrieved 2pm, Tue 6 Oct 2026 · Generated 10 Oct 2026, 9:55pm · Sample data · Made with Python (python-pptx)</a:t>
             </a:r>
           </a:p>
         </p:txBody>
@@ -7800,7 +7800,7 @@
                 </a:solidFill>
                 <a:latin typeface="Roboto"/>
               </a:rPr>
-              <a:t>Data retrieved 2pm, Tue 6 Oct 2026 · Generated 8 Oct 2026, 9:35am · Sample data · Made with Python (python-pptx)</a:t>
+              <a:t>Data retrieved 2pm, Tue 6 Oct 2026 · Generated 10 Oct 2026, 9:55pm · Sample data · Made with Python (python-pptx)</a:t>
             </a:r>
           </a:p>
         </p:txBody>
@@ -8701,7 +8701,7 @@
                 </a:solidFill>
                 <a:latin typeface="Roboto"/>
               </a:rPr>
-              <a:t>Data retrieved 2pm, Tue 6 Oct 2026 · Generated 8 Oct 2026, 9:35am · Sample data · Made with Python (python-pptx)</a:t>
+              <a:t>Data retrieved 2pm, Tue 6 Oct 2026 · Generated 10 Oct 2026, 9:55pm · Sample data · Made with Python (python-pptx)</a:t>
             </a:r>
           </a:p>
         </p:txBody>
